--- a/Проект «Сфера Тестов».pptx
+++ b/Проект «Сфера Тестов».pptx
@@ -2,7 +2,7 @@
 <file path=ppt/presentation.xml><?xml version="1.0" encoding="utf-8"?>
 <p:presentation xmlns:a="http://schemas.openxmlformats.org/drawingml/2006/main" xmlns:r="http://schemas.openxmlformats.org/officeDocument/2006/relationships" xmlns:mc="http://schemas.openxmlformats.org/markup-compatibility/2006" xmlns:mv="urn:schemas-microsoft-com:mac:vml" xmlns:p="http://schemas.openxmlformats.org/presentationml/2006/main" xmlns:c="http://schemas.openxmlformats.org/drawingml/2006/chart" xmlns:dgm="http://schemas.openxmlformats.org/drawingml/2006/diagram" xmlns:o="urn:schemas-microsoft-com:office:office" xmlns:v="urn:schemas-microsoft-com:vml" xmlns:pvml="urn:schemas-microsoft-com:office:powerpoint" xmlns:com="http://schemas.openxmlformats.org/drawingml/2006/compatibility" xmlns:p14="http://schemas.microsoft.com/office/powerpoint/2010/main" xmlns:p15="http://schemas.microsoft.com/office/powerpoint/2012/main" xmlns:ahyp="http://schemas.microsoft.com/office/drawing/2018/hyperlinkcolor" autoCompressPictures="0" embedTrueTypeFonts="1" strictFirstAndLastChars="0" saveSubsetFonts="1">
   <p:sldMasterIdLst>
-    <p:sldMasterId id="2147483658" r:id="rId3"/>
+    <p:sldMasterId id="2147483648" r:id="rId3"/>
   </p:sldMasterIdLst>
   <p:notesMasterIdLst>
     <p:notesMasterId r:id="rId4"/>
@@ -22,16 +22,15 @@
   <p:notesSz cx="8229600" cy="14630400"/>
   <p:embeddedFontLst>
     <p:embeddedFont>
-      <p:font typeface="Arimo"/>
-      <p:regular r:id="rId14"/>
-      <p:bold r:id="rId15"/>
-      <p:italic r:id="rId16"/>
-      <p:boldItalic r:id="rId17"/>
+      <p:font typeface="Outfit ExtraBold"/>
+      <p:bold r:id="rId14"/>
     </p:embeddedFont>
     <p:embeddedFont>
-      <p:font typeface="Outfit"/>
-      <p:regular r:id="rId18"/>
-      <p:bold r:id="rId19"/>
+      <p:font typeface="Arimo"/>
+      <p:regular r:id="rId15"/>
+      <p:bold r:id="rId16"/>
+      <p:italic r:id="rId17"/>
+      <p:boldItalic r:id="rId18"/>
     </p:embeddedFont>
   </p:embeddedFontLst>
   <p:defaultTextStyle>
@@ -263,6 +262,11 @@
       </a:defRPr>
     </a:lvl9pPr>
   </p:defaultTextStyle>
+  <p:extLst>
+    <p:ext uri="GoogleSlidesCustomDataVersion2">
+      <go:slidesCustomData xmlns:go="http://customooxmlschemas.google.com/" r:id="rId19" roundtripDataSignature="AMtx7mjbRaU6BbpA7nvHg5aS633q2QgO1A=="/>
+    </p:ext>
+  </p:extLst>
 </p:presentation>
 </file>
 
@@ -1364,7 +1368,7 @@
   <p:cSld>
     <p:spTree>
       <p:nvGrpSpPr>
-        <p:cNvPr id="45" name="Shape 45"/>
+        <p:cNvPr id="47" name="Shape 47"/>
         <p:cNvGrpSpPr/>
         <p:nvPr/>
       </p:nvGrpSpPr>
@@ -1378,7 +1382,7 @@
       </p:grpSpPr>
       <p:sp>
         <p:nvSpPr>
-          <p:cNvPr id="46" name="Google Shape;46;p2:notes"/>
+          <p:cNvPr id="48" name="Google Shape;48;p2:notes"/>
           <p:cNvSpPr/>
           <p:nvPr>
             <p:ph idx="2" type="sldImg"/>
@@ -1423,7 +1427,7 @@
       </p:sp>
       <p:sp>
         <p:nvSpPr>
-          <p:cNvPr id="47" name="Google Shape;47;p2:notes"/>
+          <p:cNvPr id="49" name="Google Shape;49;p2:notes"/>
           <p:cNvSpPr txBox="1"/>
           <p:nvPr>
             <p:ph idx="1" type="body"/>
@@ -1466,7 +1470,7 @@
       </p:sp>
       <p:sp>
         <p:nvSpPr>
-          <p:cNvPr id="48" name="Google Shape;48;p2:notes"/>
+          <p:cNvPr id="50" name="Google Shape;50;p2:notes"/>
           <p:cNvSpPr txBox="1"/>
           <p:nvPr>
             <p:ph idx="12" type="sldNum"/>
@@ -1521,7 +1525,7 @@
   <p:cSld>
     <p:spTree>
       <p:nvGrpSpPr>
-        <p:cNvPr id="52" name="Shape 52"/>
+        <p:cNvPr id="69" name="Shape 69"/>
         <p:cNvGrpSpPr/>
         <p:nvPr/>
       </p:nvGrpSpPr>
@@ -1535,7 +1539,7 @@
       </p:grpSpPr>
       <p:sp>
         <p:nvSpPr>
-          <p:cNvPr id="53" name="Google Shape;53;p3:notes"/>
+          <p:cNvPr id="70" name="Google Shape;70;p3:notes"/>
           <p:cNvSpPr/>
           <p:nvPr>
             <p:ph idx="2" type="sldImg"/>
@@ -1580,7 +1584,7 @@
       </p:sp>
       <p:sp>
         <p:nvSpPr>
-          <p:cNvPr id="54" name="Google Shape;54;p3:notes"/>
+          <p:cNvPr id="71" name="Google Shape;71;p3:notes"/>
           <p:cNvSpPr txBox="1"/>
           <p:nvPr>
             <p:ph idx="1" type="body"/>
@@ -1623,7 +1627,7 @@
       </p:sp>
       <p:sp>
         <p:nvSpPr>
-          <p:cNvPr id="55" name="Google Shape;55;p3:notes"/>
+          <p:cNvPr id="72" name="Google Shape;72;p3:notes"/>
           <p:cNvSpPr txBox="1"/>
           <p:nvPr>
             <p:ph idx="12" type="sldNum"/>
@@ -1678,7 +1682,7 @@
   <p:cSld>
     <p:spTree>
       <p:nvGrpSpPr>
-        <p:cNvPr id="59" name="Shape 59"/>
+        <p:cNvPr id="85" name="Shape 85"/>
         <p:cNvGrpSpPr/>
         <p:nvPr/>
       </p:nvGrpSpPr>
@@ -1692,7 +1696,7 @@
       </p:grpSpPr>
       <p:sp>
         <p:nvSpPr>
-          <p:cNvPr id="60" name="Google Shape;60;p4:notes"/>
+          <p:cNvPr id="86" name="Google Shape;86;p4:notes"/>
           <p:cNvSpPr/>
           <p:nvPr>
             <p:ph idx="2" type="sldImg"/>
@@ -1737,7 +1741,7 @@
       </p:sp>
       <p:sp>
         <p:nvSpPr>
-          <p:cNvPr id="61" name="Google Shape;61;p4:notes"/>
+          <p:cNvPr id="87" name="Google Shape;87;p4:notes"/>
           <p:cNvSpPr txBox="1"/>
           <p:nvPr>
             <p:ph idx="1" type="body"/>
@@ -1780,7 +1784,7 @@
       </p:sp>
       <p:sp>
         <p:nvSpPr>
-          <p:cNvPr id="62" name="Google Shape;62;p4:notes"/>
+          <p:cNvPr id="88" name="Google Shape;88;p4:notes"/>
           <p:cNvSpPr txBox="1"/>
           <p:nvPr>
             <p:ph idx="12" type="sldNum"/>
@@ -1835,7 +1839,7 @@
   <p:cSld>
     <p:spTree>
       <p:nvGrpSpPr>
-        <p:cNvPr id="81" name="Shape 81"/>
+        <p:cNvPr id="102" name="Shape 102"/>
         <p:cNvGrpSpPr/>
         <p:nvPr/>
       </p:nvGrpSpPr>
@@ -1849,7 +1853,7 @@
       </p:grpSpPr>
       <p:sp>
         <p:nvSpPr>
-          <p:cNvPr id="82" name="Google Shape;82;p5:notes"/>
+          <p:cNvPr id="103" name="Google Shape;103;p5:notes"/>
           <p:cNvSpPr/>
           <p:nvPr>
             <p:ph idx="2" type="sldImg"/>
@@ -1894,7 +1898,7 @@
       </p:sp>
       <p:sp>
         <p:nvSpPr>
-          <p:cNvPr id="83" name="Google Shape;83;p5:notes"/>
+          <p:cNvPr id="104" name="Google Shape;104;p5:notes"/>
           <p:cNvSpPr txBox="1"/>
           <p:nvPr>
             <p:ph idx="1" type="body"/>
@@ -1937,7 +1941,7 @@
       </p:sp>
       <p:sp>
         <p:nvSpPr>
-          <p:cNvPr id="84" name="Google Shape;84;p5:notes"/>
+          <p:cNvPr id="105" name="Google Shape;105;p5:notes"/>
           <p:cNvSpPr txBox="1"/>
           <p:nvPr>
             <p:ph idx="12" type="sldNum"/>
@@ -1992,7 +1996,7 @@
   <p:cSld>
     <p:spTree>
       <p:nvGrpSpPr>
-        <p:cNvPr id="94" name="Shape 94"/>
+        <p:cNvPr id="120" name="Shape 120"/>
         <p:cNvGrpSpPr/>
         <p:nvPr/>
       </p:nvGrpSpPr>
@@ -2006,7 +2010,7 @@
       </p:grpSpPr>
       <p:sp>
         <p:nvSpPr>
-          <p:cNvPr id="95" name="Google Shape;95;p6:notes"/>
+          <p:cNvPr id="121" name="Google Shape;121;p6:notes"/>
           <p:cNvSpPr/>
           <p:nvPr>
             <p:ph idx="2" type="sldImg"/>
@@ -2051,7 +2055,7 @@
       </p:sp>
       <p:sp>
         <p:nvSpPr>
-          <p:cNvPr id="96" name="Google Shape;96;p6:notes"/>
+          <p:cNvPr id="122" name="Google Shape;122;p6:notes"/>
           <p:cNvSpPr txBox="1"/>
           <p:nvPr>
             <p:ph idx="1" type="body"/>
@@ -2094,7 +2098,7 @@
       </p:sp>
       <p:sp>
         <p:nvSpPr>
-          <p:cNvPr id="97" name="Google Shape;97;p6:notes"/>
+          <p:cNvPr id="123" name="Google Shape;123;p6:notes"/>
           <p:cNvSpPr txBox="1"/>
           <p:nvPr>
             <p:ph idx="12" type="sldNum"/>
@@ -2149,7 +2153,7 @@
   <p:cSld>
     <p:spTree>
       <p:nvGrpSpPr>
-        <p:cNvPr id="109" name="Shape 109"/>
+        <p:cNvPr id="138" name="Shape 138"/>
         <p:cNvGrpSpPr/>
         <p:nvPr/>
       </p:nvGrpSpPr>
@@ -2163,7 +2167,7 @@
       </p:grpSpPr>
       <p:sp>
         <p:nvSpPr>
-          <p:cNvPr id="110" name="Google Shape;110;p7:notes"/>
+          <p:cNvPr id="139" name="Google Shape;139;p7:notes"/>
           <p:cNvSpPr/>
           <p:nvPr>
             <p:ph idx="2" type="sldImg"/>
@@ -2208,7 +2212,7 @@
       </p:sp>
       <p:sp>
         <p:nvSpPr>
-          <p:cNvPr id="111" name="Google Shape;111;p7:notes"/>
+          <p:cNvPr id="140" name="Google Shape;140;p7:notes"/>
           <p:cNvSpPr txBox="1"/>
           <p:nvPr>
             <p:ph idx="1" type="body"/>
@@ -2251,7 +2255,7 @@
       </p:sp>
       <p:sp>
         <p:nvSpPr>
-          <p:cNvPr id="112" name="Google Shape;112;p7:notes"/>
+          <p:cNvPr id="141" name="Google Shape;141;p7:notes"/>
           <p:cNvSpPr txBox="1"/>
           <p:nvPr>
             <p:ph idx="12" type="sldNum"/>
@@ -2306,7 +2310,7 @@
   <p:cSld>
     <p:spTree>
       <p:nvGrpSpPr>
-        <p:cNvPr id="135" name="Shape 135"/>
+        <p:cNvPr id="152" name="Shape 152"/>
         <p:cNvGrpSpPr/>
         <p:nvPr/>
       </p:nvGrpSpPr>
@@ -2320,7 +2324,7 @@
       </p:grpSpPr>
       <p:sp>
         <p:nvSpPr>
-          <p:cNvPr id="136" name="Google Shape;136;p8:notes"/>
+          <p:cNvPr id="153" name="Google Shape;153;p8:notes"/>
           <p:cNvSpPr/>
           <p:nvPr>
             <p:ph idx="2" type="sldImg"/>
@@ -2365,7 +2369,7 @@
       </p:sp>
       <p:sp>
         <p:nvSpPr>
-          <p:cNvPr id="137" name="Google Shape;137;p8:notes"/>
+          <p:cNvPr id="154" name="Google Shape;154;p8:notes"/>
           <p:cNvSpPr txBox="1"/>
           <p:nvPr>
             <p:ph idx="1" type="body"/>
@@ -2408,7 +2412,7 @@
       </p:sp>
       <p:sp>
         <p:nvSpPr>
-          <p:cNvPr id="138" name="Google Shape;138;p8:notes"/>
+          <p:cNvPr id="155" name="Google Shape;155;p8:notes"/>
           <p:cNvSpPr txBox="1"/>
           <p:nvPr>
             <p:ph idx="12" type="sldNum"/>
@@ -2463,7 +2467,7 @@
   <p:cSld>
     <p:spTree>
       <p:nvGrpSpPr>
-        <p:cNvPr id="151" name="Shape 151"/>
+        <p:cNvPr id="159" name="Shape 159"/>
         <p:cNvGrpSpPr/>
         <p:nvPr/>
       </p:nvGrpSpPr>
@@ -2477,7 +2481,7 @@
       </p:grpSpPr>
       <p:sp>
         <p:nvSpPr>
-          <p:cNvPr id="152" name="Google Shape;152;p9:notes"/>
+          <p:cNvPr id="160" name="Google Shape;160;p9:notes"/>
           <p:cNvSpPr/>
           <p:nvPr>
             <p:ph idx="2" type="sldImg"/>
@@ -2522,7 +2526,7 @@
       </p:sp>
       <p:sp>
         <p:nvSpPr>
-          <p:cNvPr id="153" name="Google Shape;153;p9:notes"/>
+          <p:cNvPr id="161" name="Google Shape;161;p9:notes"/>
           <p:cNvSpPr txBox="1"/>
           <p:nvPr>
             <p:ph idx="1" type="body"/>
@@ -2565,7 +2569,7 @@
       </p:sp>
       <p:sp>
         <p:nvSpPr>
-          <p:cNvPr id="154" name="Google Shape;154;p9:notes"/>
+          <p:cNvPr id="162" name="Google Shape;162;p9:notes"/>
           <p:cNvSpPr txBox="1"/>
           <p:nvPr>
             <p:ph idx="12" type="sldNum"/>
@@ -2641,7 +2645,7 @@
       </p:grpSpPr>
       <p:pic>
         <p:nvPicPr>
-          <p:cNvPr descr="preencoded.png" id="11" name="Google Shape;11;p2"/>
+          <p:cNvPr descr="preencoded.png" id="11" name="Google Shape;11;p11"/>
           <p:cNvPicPr preferRelativeResize="0"/>
           <p:nvPr/>
         </p:nvPicPr>
@@ -2668,7 +2672,7 @@
       </p:pic>
       <p:sp>
         <p:nvSpPr>
-          <p:cNvPr id="12" name="Google Shape;12;p2"/>
+          <p:cNvPr id="12" name="Google Shape;12;p11"/>
           <p:cNvSpPr/>
           <p:nvPr/>
         </p:nvSpPr>
@@ -2777,7 +2781,7 @@
       </p:grpSpPr>
       <p:pic>
         <p:nvPicPr>
-          <p:cNvPr descr="preencoded.png" id="14" name="Google Shape;14;p3"/>
+          <p:cNvPr descr="preencoded.png" id="14" name="Google Shape;14;p12"/>
           <p:cNvPicPr preferRelativeResize="0"/>
           <p:nvPr/>
         </p:nvPicPr>
@@ -2804,7 +2808,7 @@
       </p:pic>
       <p:sp>
         <p:nvSpPr>
-          <p:cNvPr id="15" name="Google Shape;15;p3"/>
+          <p:cNvPr id="15" name="Google Shape;15;p12"/>
           <p:cNvSpPr/>
           <p:nvPr/>
         </p:nvSpPr>
@@ -2881,7 +2885,7 @@
       </p:grpSpPr>
       <p:pic>
         <p:nvPicPr>
-          <p:cNvPr descr="preencoded.png" id="17" name="Google Shape;17;p4"/>
+          <p:cNvPr descr="preencoded.png" id="17" name="Google Shape;17;p13"/>
           <p:cNvPicPr preferRelativeResize="0"/>
           <p:nvPr/>
         </p:nvPicPr>
@@ -2908,7 +2912,7 @@
       </p:pic>
       <p:sp>
         <p:nvSpPr>
-          <p:cNvPr id="18" name="Google Shape;18;p4"/>
+          <p:cNvPr id="18" name="Google Shape;18;p13"/>
           <p:cNvSpPr/>
           <p:nvPr/>
         </p:nvSpPr>
@@ -2985,7 +2989,7 @@
       </p:grpSpPr>
       <p:pic>
         <p:nvPicPr>
-          <p:cNvPr descr="preencoded.png" id="20" name="Google Shape;20;p5"/>
+          <p:cNvPr descr="preencoded.png" id="20" name="Google Shape;20;p14"/>
           <p:cNvPicPr preferRelativeResize="0"/>
           <p:nvPr/>
         </p:nvPicPr>
@@ -3012,7 +3016,7 @@
       </p:pic>
       <p:sp>
         <p:nvSpPr>
-          <p:cNvPr id="21" name="Google Shape;21;p5"/>
+          <p:cNvPr id="21" name="Google Shape;21;p14"/>
           <p:cNvSpPr/>
           <p:nvPr/>
         </p:nvSpPr>
@@ -3089,7 +3093,7 @@
       </p:grpSpPr>
       <p:pic>
         <p:nvPicPr>
-          <p:cNvPr descr="preencoded.png" id="23" name="Google Shape;23;p6"/>
+          <p:cNvPr descr="preencoded.png" id="23" name="Google Shape;23;p15"/>
           <p:cNvPicPr preferRelativeResize="0"/>
           <p:nvPr/>
         </p:nvPicPr>
@@ -3116,7 +3120,7 @@
       </p:pic>
       <p:sp>
         <p:nvSpPr>
-          <p:cNvPr id="24" name="Google Shape;24;p6"/>
+          <p:cNvPr id="24" name="Google Shape;24;p15"/>
           <p:cNvSpPr/>
           <p:nvPr/>
         </p:nvSpPr>
@@ -3193,7 +3197,7 @@
       </p:grpSpPr>
       <p:pic>
         <p:nvPicPr>
-          <p:cNvPr descr="preencoded.png" id="26" name="Google Shape;26;p7"/>
+          <p:cNvPr descr="preencoded.png" id="26" name="Google Shape;26;p16"/>
           <p:cNvPicPr preferRelativeResize="0"/>
           <p:nvPr/>
         </p:nvPicPr>
@@ -3220,7 +3224,7 @@
       </p:pic>
       <p:sp>
         <p:nvSpPr>
-          <p:cNvPr id="27" name="Google Shape;27;p7"/>
+          <p:cNvPr id="27" name="Google Shape;27;p16"/>
           <p:cNvSpPr/>
           <p:nvPr/>
         </p:nvSpPr>
@@ -3297,7 +3301,7 @@
       </p:grpSpPr>
       <p:pic>
         <p:nvPicPr>
-          <p:cNvPr descr="preencoded.png" id="29" name="Google Shape;29;p8"/>
+          <p:cNvPr descr="preencoded.png" id="29" name="Google Shape;29;p17"/>
           <p:cNvPicPr preferRelativeResize="0"/>
           <p:nvPr/>
         </p:nvPicPr>
@@ -3324,7 +3328,7 @@
       </p:pic>
       <p:sp>
         <p:nvSpPr>
-          <p:cNvPr id="30" name="Google Shape;30;p8"/>
+          <p:cNvPr id="30" name="Google Shape;30;p17"/>
           <p:cNvSpPr/>
           <p:nvPr/>
         </p:nvSpPr>
@@ -3401,7 +3405,7 @@
       </p:grpSpPr>
       <p:pic>
         <p:nvPicPr>
-          <p:cNvPr descr="preencoded.png" id="32" name="Google Shape;32;p9"/>
+          <p:cNvPr descr="preencoded.png" id="32" name="Google Shape;32;p18"/>
           <p:cNvPicPr preferRelativeResize="0"/>
           <p:nvPr/>
         </p:nvPicPr>
@@ -3428,7 +3432,7 @@
       </p:pic>
       <p:sp>
         <p:nvSpPr>
-          <p:cNvPr id="33" name="Google Shape;33;p9"/>
+          <p:cNvPr id="33" name="Google Shape;33;p18"/>
           <p:cNvSpPr/>
           <p:nvPr/>
         </p:nvSpPr>
@@ -3505,7 +3509,7 @@
       </p:grpSpPr>
       <p:pic>
         <p:nvPicPr>
-          <p:cNvPr descr="preencoded.png" id="35" name="Google Shape;35;p10"/>
+          <p:cNvPr descr="preencoded.png" id="35" name="Google Shape;35;p19"/>
           <p:cNvPicPr preferRelativeResize="0"/>
           <p:nvPr/>
         </p:nvPicPr>
@@ -3532,7 +3536,7 @@
       </p:pic>
       <p:sp>
         <p:nvSpPr>
-          <p:cNvPr id="36" name="Google Shape;36;p10"/>
+          <p:cNvPr id="36" name="Google Shape;36;p19"/>
           <p:cNvSpPr/>
           <p:nvPr/>
         </p:nvSpPr>
@@ -3604,16 +3608,16 @@
   </p:cSld>
   <p:clrMap accent1="accent1" accent2="accent2" accent3="accent3" accent4="accent4" accent5="accent5" accent6="accent6" bg1="lt1" bg2="dk2" tx1="dk1" tx2="lt2" folHlink="folHlink" hlink="hlink"/>
   <p:sldLayoutIdLst>
-    <p:sldLayoutId id="2147483648" r:id="rId1"/>
-    <p:sldLayoutId id="2147483649" r:id="rId2"/>
-    <p:sldLayoutId id="2147483650" r:id="rId3"/>
-    <p:sldLayoutId id="2147483651" r:id="rId4"/>
-    <p:sldLayoutId id="2147483652" r:id="rId5"/>
-    <p:sldLayoutId id="2147483653" r:id="rId6"/>
-    <p:sldLayoutId id="2147483654" r:id="rId7"/>
-    <p:sldLayoutId id="2147483655" r:id="rId8"/>
-    <p:sldLayoutId id="2147483656" r:id="rId9"/>
-    <p:sldLayoutId id="2147483657" r:id="rId10"/>
+    <p:sldLayoutId id="2147483649" r:id="rId1"/>
+    <p:sldLayoutId id="2147483650" r:id="rId2"/>
+    <p:sldLayoutId id="2147483651" r:id="rId3"/>
+    <p:sldLayoutId id="2147483652" r:id="rId4"/>
+    <p:sldLayoutId id="2147483653" r:id="rId5"/>
+    <p:sldLayoutId id="2147483654" r:id="rId6"/>
+    <p:sldLayoutId id="2147483655" r:id="rId7"/>
+    <p:sldLayoutId id="2147483656" r:id="rId8"/>
+    <p:sldLayoutId id="2147483657" r:id="rId9"/>
+    <p:sldLayoutId id="2147483658" r:id="rId10"/>
   </p:sldLayoutIdLst>
   <p:hf dt="0" ftr="0" hdr="0" sldNum="0"/>
   <p:txStyles>
@@ -4327,14 +4331,14 @@
       </p:grpSpPr>
       <p:sp>
         <p:nvSpPr>
-          <p:cNvPr id="43" name="Google Shape;43;p12"/>
+          <p:cNvPr id="43" name="Google Shape;43;p1"/>
           <p:cNvSpPr/>
           <p:nvPr/>
         </p:nvSpPr>
         <p:spPr>
           <a:xfrm>
-            <a:off x="793790" y="3352086"/>
-            <a:ext cx="6466403" cy="708779"/>
+            <a:off x="793790" y="3011448"/>
+            <a:ext cx="6774537" cy="708779"/>
           </a:xfrm>
           <a:prstGeom prst="rect">
             <a:avLst/>
@@ -4364,7 +4368,7 @@
                 <a:srgbClr val="231971"/>
               </a:buClr>
               <a:buSzPts val="4450"/>
-              <a:buFont typeface="Outfit"/>
+              <a:buFont typeface="Outfit ExtraBold"/>
               <a:buNone/>
             </a:pPr>
             <a:r>
@@ -4372,10 +4376,10 @@
                 <a:solidFill>
                   <a:srgbClr val="231971"/>
                 </a:solidFill>
-                <a:latin typeface="Outfit"/>
-                <a:ea typeface="Outfit"/>
-                <a:cs typeface="Outfit"/>
-                <a:sym typeface="Outfit"/>
+                <a:latin typeface="Outfit ExtraBold"/>
+                <a:ea typeface="Outfit ExtraBold"/>
+                <a:cs typeface="Outfit ExtraBold"/>
+                <a:sym typeface="Outfit ExtraBold"/>
               </a:rPr>
               <a:t>Проект «Сфера Тестов»</a:t>
             </a:r>
@@ -4385,13 +4389,13 @@
       </p:sp>
       <p:sp>
         <p:nvSpPr>
-          <p:cNvPr id="44" name="Google Shape;44;p12"/>
+          <p:cNvPr id="44" name="Google Shape;44;p1"/>
           <p:cNvSpPr/>
           <p:nvPr/>
         </p:nvSpPr>
         <p:spPr>
           <a:xfrm>
-            <a:off x="793790" y="4514493"/>
+            <a:off x="793790" y="4173855"/>
             <a:ext cx="13042821" cy="362903"/>
           </a:xfrm>
           <a:prstGeom prst="rect">
@@ -4435,10 +4439,101 @@
                 <a:cs typeface="Arimo"/>
                 <a:sym typeface="Arimo"/>
               </a:rPr>
-              <a:t>Выполнил </a:t>
+              <a:t>Веб-платформа для психологического и медицинского самотестирования</a:t>
             </a:r>
+            <a:endParaRPr b="0" i="0" sz="1750" u="none" cap="none" strike="noStrike"/>
+          </a:p>
+        </p:txBody>
+      </p:sp>
+      <p:sp>
+        <p:nvSpPr>
+          <p:cNvPr id="45" name="Google Shape;45;p1"/>
+          <p:cNvSpPr/>
+          <p:nvPr/>
+        </p:nvSpPr>
+        <p:spPr>
+          <a:xfrm>
+            <a:off x="793790" y="4791908"/>
+            <a:ext cx="2157055" cy="426244"/>
+          </a:xfrm>
+          <a:prstGeom prst="roundRect">
+            <a:avLst>
+              <a:gd fmla="val 17880" name="adj"/>
+            </a:avLst>
+          </a:prstGeom>
+          <a:solidFill>
+            <a:srgbClr val="D7D2F9"/>
+          </a:solidFill>
+          <a:ln>
+            <a:noFill/>
+          </a:ln>
+        </p:spPr>
+        <p:txBody>
+          <a:bodyPr anchorCtr="0" anchor="ctr" bIns="91425" lIns="91425" spcFirstLastPara="1" rIns="91425" wrap="square" tIns="91425">
+            <a:noAutofit/>
+          </a:bodyPr>
+          <a:lstStyle/>
+          <a:p>
+            <a:pPr indent="0" lvl="0" marL="0" rtl="0" algn="l">
+              <a:spcBef>
+                <a:spcPts val="0"/>
+              </a:spcBef>
+              <a:spcAft>
+                <a:spcPts val="0"/>
+              </a:spcAft>
+              <a:buNone/>
+            </a:pPr>
             <a:r>
-              <a:rPr b="1" i="0" lang="en-US" sz="1750" u="none" cap="none" strike="noStrike">
+              <a:t/>
+            </a:r>
+            <a:endParaRPr/>
+          </a:p>
+        </p:txBody>
+      </p:sp>
+      <p:sp>
+        <p:nvSpPr>
+          <p:cNvPr id="46" name="Google Shape;46;p1"/>
+          <p:cNvSpPr/>
+          <p:nvPr/>
+        </p:nvSpPr>
+        <p:spPr>
+          <a:xfrm>
+            <a:off x="929878" y="4859893"/>
+            <a:ext cx="1884878" cy="290274"/>
+          </a:xfrm>
+          <a:prstGeom prst="rect">
+            <a:avLst/>
+          </a:prstGeom>
+          <a:noFill/>
+          <a:ln>
+            <a:noFill/>
+          </a:ln>
+        </p:spPr>
+        <p:txBody>
+          <a:bodyPr anchorCtr="0" anchor="t" bIns="0" lIns="0" spcFirstLastPara="1" rIns="0" wrap="square" tIns="0">
+            <a:noAutofit/>
+          </a:bodyPr>
+          <a:lstStyle/>
+          <a:p>
+            <a:pPr indent="0" lvl="0" marL="0" marR="0" rtl="0" algn="l">
+              <a:lnSpc>
+                <a:spcPct val="160714"/>
+              </a:lnSpc>
+              <a:spcBef>
+                <a:spcPts val="0"/>
+              </a:spcBef>
+              <a:spcAft>
+                <a:spcPts val="0"/>
+              </a:spcAft>
+              <a:buClr>
+                <a:srgbClr val="2A2742"/>
+              </a:buClr>
+              <a:buSzPts val="1400"/>
+              <a:buFont typeface="Arimo"/>
+              <a:buNone/>
+            </a:pPr>
+            <a:r>
+              <a:rPr b="0" i="0" lang="en-US" sz="1400" u="none" cap="none" strike="noStrike">
                 <a:solidFill>
                   <a:srgbClr val="2A2742"/>
                 </a:solidFill>
@@ -4447,21 +4542,9 @@
                 <a:cs typeface="Arimo"/>
                 <a:sym typeface="Arimo"/>
               </a:rPr>
-              <a:t>Тушин Иван</a:t>
+              <a:t>ТУШИН ИВАН · ИИ-72</a:t>
             </a:r>
-            <a:r>
-              <a:rPr b="0" i="0" lang="en-US" sz="1750" u="none" cap="none" strike="noStrike">
-                <a:solidFill>
-                  <a:srgbClr val="2A2742"/>
-                </a:solidFill>
-                <a:latin typeface="Arimo"/>
-                <a:ea typeface="Arimo"/>
-                <a:cs typeface="Arimo"/>
-                <a:sym typeface="Arimo"/>
-              </a:rPr>
-              <a:t>, группа ИИ-72</a:t>
-            </a:r>
-            <a:endParaRPr b="0" i="0" sz="1750" u="none" cap="none" strike="noStrike"/>
+            <a:endParaRPr b="0" i="0" sz="1400" u="none" cap="none" strike="noStrike"/>
           </a:p>
         </p:txBody>
       </p:sp>
@@ -4478,7 +4561,7 @@
   <p:cSld>
     <p:spTree>
       <p:nvGrpSpPr>
-        <p:cNvPr id="49" name="Shape 49"/>
+        <p:cNvPr id="51" name="Shape 51"/>
         <p:cNvGrpSpPr/>
         <p:nvPr/>
       </p:nvGrpSpPr>
@@ -4492,13 +4575,13 @@
       </p:grpSpPr>
       <p:sp>
         <p:nvSpPr>
-          <p:cNvPr id="50" name="Google Shape;50;p13"/>
+          <p:cNvPr id="52" name="Google Shape;52;p2"/>
           <p:cNvSpPr/>
           <p:nvPr/>
         </p:nvSpPr>
         <p:spPr>
           <a:xfrm>
-            <a:off x="793790" y="2989183"/>
+            <a:off x="793790" y="1689378"/>
             <a:ext cx="5670590" cy="708779"/>
           </a:xfrm>
           <a:prstGeom prst="rect">
@@ -4529,7 +4612,7 @@
                 <a:srgbClr val="231971"/>
               </a:buClr>
               <a:buSzPts val="4450"/>
-              <a:buFont typeface="Outfit"/>
+              <a:buFont typeface="Outfit ExtraBold"/>
               <a:buNone/>
             </a:pPr>
             <a:r>
@@ -4537,12 +4620,12 @@
                 <a:solidFill>
                   <a:srgbClr val="231971"/>
                 </a:solidFill>
-                <a:latin typeface="Outfit"/>
-                <a:ea typeface="Outfit"/>
-                <a:cs typeface="Outfit"/>
-                <a:sym typeface="Outfit"/>
+                <a:latin typeface="Outfit ExtraBold"/>
+                <a:ea typeface="Outfit ExtraBold"/>
+                <a:cs typeface="Outfit ExtraBold"/>
+                <a:sym typeface="Outfit ExtraBold"/>
               </a:rPr>
-              <a:t>О проекте</a:t>
+              <a:t>Проблема</a:t>
             </a:r>
             <a:endParaRPr b="0" i="0" sz="4450" u="none" cap="none" strike="noStrike"/>
           </a:p>
@@ -4550,14 +4633,170 @@
       </p:sp>
       <p:sp>
         <p:nvSpPr>
-          <p:cNvPr id="51" name="Google Shape;51;p13"/>
+          <p:cNvPr id="53" name="Google Shape;53;p2"/>
           <p:cNvSpPr/>
           <p:nvPr/>
         </p:nvSpPr>
         <p:spPr>
           <a:xfrm>
-            <a:off x="793790" y="4151590"/>
-            <a:ext cx="13042821" cy="1088708"/>
+            <a:off x="793790" y="2851785"/>
+            <a:ext cx="6407944" cy="1730812"/>
+          </a:xfrm>
+          <a:prstGeom prst="roundRect">
+            <a:avLst>
+              <a:gd fmla="val 8453" name="adj"/>
+            </a:avLst>
+          </a:prstGeom>
+          <a:solidFill>
+            <a:srgbClr val="FAFAFA">
+              <a:alpha val="94901"/>
+            </a:srgbClr>
+          </a:solidFill>
+          <a:ln cap="flat" cmpd="sng" w="30475">
+            <a:solidFill>
+              <a:srgbClr val="BDB8DF"/>
+            </a:solidFill>
+            <a:prstDash val="solid"/>
+            <a:round/>
+            <a:headEnd len="sm" w="sm" type="none"/>
+            <a:tailEnd len="sm" w="sm" type="none"/>
+          </a:ln>
+        </p:spPr>
+        <p:txBody>
+          <a:bodyPr anchorCtr="0" anchor="ctr" bIns="91425" lIns="91425" spcFirstLastPara="1" rIns="91425" wrap="square" tIns="91425">
+            <a:noAutofit/>
+          </a:bodyPr>
+          <a:lstStyle/>
+          <a:p>
+            <a:pPr indent="0" lvl="0" marL="0" rtl="0" algn="l">
+              <a:spcBef>
+                <a:spcPts val="0"/>
+              </a:spcBef>
+              <a:spcAft>
+                <a:spcPts val="0"/>
+              </a:spcAft>
+              <a:buNone/>
+            </a:pPr>
+            <a:r>
+              <a:t/>
+            </a:r>
+            <a:endParaRPr/>
+          </a:p>
+        </p:txBody>
+      </p:sp>
+      <p:sp>
+        <p:nvSpPr>
+          <p:cNvPr id="54" name="Google Shape;54;p2"/>
+          <p:cNvSpPr/>
+          <p:nvPr/>
+        </p:nvSpPr>
+        <p:spPr>
+          <a:xfrm>
+            <a:off x="763310" y="2851785"/>
+            <a:ext cx="121920" cy="1730812"/>
+          </a:xfrm>
+          <a:prstGeom prst="roundRect">
+            <a:avLst>
+              <a:gd fmla="val 78139" name="adj"/>
+            </a:avLst>
+          </a:prstGeom>
+          <a:solidFill>
+            <a:srgbClr val="5E4CE6"/>
+          </a:solidFill>
+          <a:ln>
+            <a:noFill/>
+          </a:ln>
+        </p:spPr>
+        <p:txBody>
+          <a:bodyPr anchorCtr="0" anchor="ctr" bIns="91425" lIns="91425" spcFirstLastPara="1" rIns="91425" wrap="square" tIns="91425">
+            <a:noAutofit/>
+          </a:bodyPr>
+          <a:lstStyle/>
+          <a:p>
+            <a:pPr indent="0" lvl="0" marL="0" rtl="0" algn="l">
+              <a:spcBef>
+                <a:spcPts val="0"/>
+              </a:spcBef>
+              <a:spcAft>
+                <a:spcPts val="0"/>
+              </a:spcAft>
+              <a:buNone/>
+            </a:pPr>
+            <a:r>
+              <a:t/>
+            </a:r>
+            <a:endParaRPr/>
+          </a:p>
+        </p:txBody>
+      </p:sp>
+      <p:sp>
+        <p:nvSpPr>
+          <p:cNvPr id="55" name="Google Shape;55;p2"/>
+          <p:cNvSpPr/>
+          <p:nvPr/>
+        </p:nvSpPr>
+        <p:spPr>
+          <a:xfrm>
+            <a:off x="1142524" y="3109079"/>
+            <a:ext cx="2835235" cy="354330"/>
+          </a:xfrm>
+          <a:prstGeom prst="rect">
+            <a:avLst/>
+          </a:prstGeom>
+          <a:noFill/>
+          <a:ln>
+            <a:noFill/>
+          </a:ln>
+        </p:spPr>
+        <p:txBody>
+          <a:bodyPr anchorCtr="0" anchor="t" bIns="0" lIns="0" spcFirstLastPara="1" rIns="0" wrap="square" tIns="0">
+            <a:noAutofit/>
+          </a:bodyPr>
+          <a:lstStyle/>
+          <a:p>
+            <a:pPr indent="0" lvl="0" marL="0" marR="0" rtl="0" algn="l">
+              <a:lnSpc>
+                <a:spcPct val="125000"/>
+              </a:lnSpc>
+              <a:spcBef>
+                <a:spcPts val="0"/>
+              </a:spcBef>
+              <a:spcAft>
+                <a:spcPts val="0"/>
+              </a:spcAft>
+              <a:buClr>
+                <a:srgbClr val="2A2742"/>
+              </a:buClr>
+              <a:buSzPts val="2200"/>
+              <a:buFont typeface="Outfit ExtraBold"/>
+              <a:buNone/>
+            </a:pPr>
+            <a:r>
+              <a:rPr b="1" i="0" lang="en-US" sz="2200" u="none" cap="none" strike="noStrike">
+                <a:solidFill>
+                  <a:srgbClr val="2A2742"/>
+                </a:solidFill>
+                <a:latin typeface="Outfit ExtraBold"/>
+                <a:ea typeface="Outfit ExtraBold"/>
+                <a:cs typeface="Outfit ExtraBold"/>
+                <a:sym typeface="Outfit ExtraBold"/>
+              </a:rPr>
+              <a:t>Платный доступ</a:t>
+            </a:r>
+            <a:endParaRPr b="0" i="0" sz="2200" u="none" cap="none" strike="noStrike"/>
+          </a:p>
+        </p:txBody>
+      </p:sp>
+      <p:sp>
+        <p:nvSpPr>
+          <p:cNvPr id="56" name="Google Shape;56;p2"/>
+          <p:cNvSpPr/>
+          <p:nvPr/>
+        </p:nvSpPr>
+        <p:spPr>
+          <a:xfrm>
+            <a:off x="1142524" y="3599497"/>
+            <a:ext cx="5801916" cy="725805"/>
           </a:xfrm>
           <a:prstGeom prst="rect">
             <a:avLst/>
@@ -4600,7 +4839,649 @@
                 <a:cs typeface="Arimo"/>
                 <a:sym typeface="Arimo"/>
               </a:rPr>
-              <a:t>Современная веб-платформа для психологического и медицинского самотестирования. Быстро, анонимно и бесплатно — от тестов на дальтонизм и аутизм до шкал депрессии и стресса — с мгновенной профессиональной интерпретацией результата.</a:t>
+              <a:t>Качественные тесты скрывают результаты за оплатой в конце</a:t>
+            </a:r>
+            <a:endParaRPr b="0" i="0" sz="1750" u="none" cap="none" strike="noStrike"/>
+          </a:p>
+        </p:txBody>
+      </p:sp>
+      <p:sp>
+        <p:nvSpPr>
+          <p:cNvPr id="57" name="Google Shape;57;p2"/>
+          <p:cNvSpPr/>
+          <p:nvPr/>
+        </p:nvSpPr>
+        <p:spPr>
+          <a:xfrm>
+            <a:off x="7428548" y="2851785"/>
+            <a:ext cx="6408063" cy="1730812"/>
+          </a:xfrm>
+          <a:prstGeom prst="roundRect">
+            <a:avLst>
+              <a:gd fmla="val 8453" name="adj"/>
+            </a:avLst>
+          </a:prstGeom>
+          <a:solidFill>
+            <a:srgbClr val="FAFAFA">
+              <a:alpha val="94901"/>
+            </a:srgbClr>
+          </a:solidFill>
+          <a:ln cap="flat" cmpd="sng" w="30475">
+            <a:solidFill>
+              <a:srgbClr val="BDB8DF"/>
+            </a:solidFill>
+            <a:prstDash val="solid"/>
+            <a:round/>
+            <a:headEnd len="sm" w="sm" type="none"/>
+            <a:tailEnd len="sm" w="sm" type="none"/>
+          </a:ln>
+        </p:spPr>
+        <p:txBody>
+          <a:bodyPr anchorCtr="0" anchor="ctr" bIns="91425" lIns="91425" spcFirstLastPara="1" rIns="91425" wrap="square" tIns="91425">
+            <a:noAutofit/>
+          </a:bodyPr>
+          <a:lstStyle/>
+          <a:p>
+            <a:pPr indent="0" lvl="0" marL="0" rtl="0" algn="l">
+              <a:spcBef>
+                <a:spcPts val="0"/>
+              </a:spcBef>
+              <a:spcAft>
+                <a:spcPts val="0"/>
+              </a:spcAft>
+              <a:buNone/>
+            </a:pPr>
+            <a:r>
+              <a:t/>
+            </a:r>
+            <a:endParaRPr/>
+          </a:p>
+        </p:txBody>
+      </p:sp>
+      <p:sp>
+        <p:nvSpPr>
+          <p:cNvPr id="58" name="Google Shape;58;p2"/>
+          <p:cNvSpPr/>
+          <p:nvPr/>
+        </p:nvSpPr>
+        <p:spPr>
+          <a:xfrm>
+            <a:off x="7398067" y="2851785"/>
+            <a:ext cx="121920" cy="1730812"/>
+          </a:xfrm>
+          <a:prstGeom prst="roundRect">
+            <a:avLst>
+              <a:gd fmla="val 78139" name="adj"/>
+            </a:avLst>
+          </a:prstGeom>
+          <a:solidFill>
+            <a:srgbClr val="5E4CE6"/>
+          </a:solidFill>
+          <a:ln>
+            <a:noFill/>
+          </a:ln>
+        </p:spPr>
+        <p:txBody>
+          <a:bodyPr anchorCtr="0" anchor="ctr" bIns="91425" lIns="91425" spcFirstLastPara="1" rIns="91425" wrap="square" tIns="91425">
+            <a:noAutofit/>
+          </a:bodyPr>
+          <a:lstStyle/>
+          <a:p>
+            <a:pPr indent="0" lvl="0" marL="0" rtl="0" algn="l">
+              <a:spcBef>
+                <a:spcPts val="0"/>
+              </a:spcBef>
+              <a:spcAft>
+                <a:spcPts val="0"/>
+              </a:spcAft>
+              <a:buNone/>
+            </a:pPr>
+            <a:r>
+              <a:t/>
+            </a:r>
+            <a:endParaRPr/>
+          </a:p>
+        </p:txBody>
+      </p:sp>
+      <p:sp>
+        <p:nvSpPr>
+          <p:cNvPr id="59" name="Google Shape;59;p2"/>
+          <p:cNvSpPr/>
+          <p:nvPr/>
+        </p:nvSpPr>
+        <p:spPr>
+          <a:xfrm>
+            <a:off x="7777282" y="3109079"/>
+            <a:ext cx="2835235" cy="354330"/>
+          </a:xfrm>
+          <a:prstGeom prst="rect">
+            <a:avLst/>
+          </a:prstGeom>
+          <a:noFill/>
+          <a:ln>
+            <a:noFill/>
+          </a:ln>
+        </p:spPr>
+        <p:txBody>
+          <a:bodyPr anchorCtr="0" anchor="t" bIns="0" lIns="0" spcFirstLastPara="1" rIns="0" wrap="square" tIns="0">
+            <a:noAutofit/>
+          </a:bodyPr>
+          <a:lstStyle/>
+          <a:p>
+            <a:pPr indent="0" lvl="0" marL="0" marR="0" rtl="0" algn="l">
+              <a:lnSpc>
+                <a:spcPct val="125000"/>
+              </a:lnSpc>
+              <a:spcBef>
+                <a:spcPts val="0"/>
+              </a:spcBef>
+              <a:spcAft>
+                <a:spcPts val="0"/>
+              </a:spcAft>
+              <a:buClr>
+                <a:srgbClr val="2A2742"/>
+              </a:buClr>
+              <a:buSzPts val="2200"/>
+              <a:buFont typeface="Outfit ExtraBold"/>
+              <a:buNone/>
+            </a:pPr>
+            <a:r>
+              <a:rPr b="1" i="0" lang="en-US" sz="2200" u="none" cap="none" strike="noStrike">
+                <a:solidFill>
+                  <a:srgbClr val="2A2742"/>
+                </a:solidFill>
+                <a:latin typeface="Outfit ExtraBold"/>
+                <a:ea typeface="Outfit ExtraBold"/>
+                <a:cs typeface="Outfit ExtraBold"/>
+                <a:sym typeface="Outfit ExtraBold"/>
+              </a:rPr>
+              <a:t>Низкое качество</a:t>
+            </a:r>
+            <a:endParaRPr b="0" i="0" sz="2200" u="none" cap="none" strike="noStrike"/>
+          </a:p>
+        </p:txBody>
+      </p:sp>
+      <p:sp>
+        <p:nvSpPr>
+          <p:cNvPr id="60" name="Google Shape;60;p2"/>
+          <p:cNvSpPr/>
+          <p:nvPr/>
+        </p:nvSpPr>
+        <p:spPr>
+          <a:xfrm>
+            <a:off x="7777282" y="3599497"/>
+            <a:ext cx="5802035" cy="725805"/>
+          </a:xfrm>
+          <a:prstGeom prst="rect">
+            <a:avLst/>
+          </a:prstGeom>
+          <a:noFill/>
+          <a:ln>
+            <a:noFill/>
+          </a:ln>
+        </p:spPr>
+        <p:txBody>
+          <a:bodyPr anchorCtr="0" anchor="t" bIns="0" lIns="0" spcFirstLastPara="1" rIns="0" wrap="square" tIns="0">
+            <a:noAutofit/>
+          </a:bodyPr>
+          <a:lstStyle/>
+          <a:p>
+            <a:pPr indent="0" lvl="0" marL="0" marR="0" rtl="0" algn="l">
+              <a:lnSpc>
+                <a:spcPct val="162857"/>
+              </a:lnSpc>
+              <a:spcBef>
+                <a:spcPts val="0"/>
+              </a:spcBef>
+              <a:spcAft>
+                <a:spcPts val="0"/>
+              </a:spcAft>
+              <a:buClr>
+                <a:srgbClr val="2A2742"/>
+              </a:buClr>
+              <a:buSzPts val="1750"/>
+              <a:buFont typeface="Arimo"/>
+              <a:buNone/>
+            </a:pPr>
+            <a:r>
+              <a:rPr b="0" i="0" lang="en-US" sz="1750" u="none" cap="none" strike="noStrike">
+                <a:solidFill>
+                  <a:srgbClr val="2A2742"/>
+                </a:solidFill>
+                <a:latin typeface="Arimo"/>
+                <a:ea typeface="Arimo"/>
+                <a:cs typeface="Arimo"/>
+                <a:sym typeface="Arimo"/>
+              </a:rPr>
+              <a:t>Развлекательные порталы предлагают антинаучные методики</a:t>
+            </a:r>
+            <a:endParaRPr b="0" i="0" sz="1750" u="none" cap="none" strike="noStrike"/>
+          </a:p>
+        </p:txBody>
+      </p:sp>
+      <p:sp>
+        <p:nvSpPr>
+          <p:cNvPr id="61" name="Google Shape;61;p2"/>
+          <p:cNvSpPr/>
+          <p:nvPr/>
+        </p:nvSpPr>
+        <p:spPr>
+          <a:xfrm>
+            <a:off x="793790" y="4809411"/>
+            <a:ext cx="6407944" cy="1730812"/>
+          </a:xfrm>
+          <a:prstGeom prst="roundRect">
+            <a:avLst>
+              <a:gd fmla="val 8453" name="adj"/>
+            </a:avLst>
+          </a:prstGeom>
+          <a:solidFill>
+            <a:srgbClr val="FAFAFA">
+              <a:alpha val="94901"/>
+            </a:srgbClr>
+          </a:solidFill>
+          <a:ln cap="flat" cmpd="sng" w="30475">
+            <a:solidFill>
+              <a:srgbClr val="BDB8DF"/>
+            </a:solidFill>
+            <a:prstDash val="solid"/>
+            <a:round/>
+            <a:headEnd len="sm" w="sm" type="none"/>
+            <a:tailEnd len="sm" w="sm" type="none"/>
+          </a:ln>
+        </p:spPr>
+        <p:txBody>
+          <a:bodyPr anchorCtr="0" anchor="ctr" bIns="91425" lIns="91425" spcFirstLastPara="1" rIns="91425" wrap="square" tIns="91425">
+            <a:noAutofit/>
+          </a:bodyPr>
+          <a:lstStyle/>
+          <a:p>
+            <a:pPr indent="0" lvl="0" marL="0" rtl="0" algn="l">
+              <a:spcBef>
+                <a:spcPts val="0"/>
+              </a:spcBef>
+              <a:spcAft>
+                <a:spcPts val="0"/>
+              </a:spcAft>
+              <a:buNone/>
+            </a:pPr>
+            <a:r>
+              <a:t/>
+            </a:r>
+            <a:endParaRPr/>
+          </a:p>
+        </p:txBody>
+      </p:sp>
+      <p:sp>
+        <p:nvSpPr>
+          <p:cNvPr id="62" name="Google Shape;62;p2"/>
+          <p:cNvSpPr/>
+          <p:nvPr/>
+        </p:nvSpPr>
+        <p:spPr>
+          <a:xfrm>
+            <a:off x="763310" y="4809411"/>
+            <a:ext cx="121920" cy="1730812"/>
+          </a:xfrm>
+          <a:prstGeom prst="roundRect">
+            <a:avLst>
+              <a:gd fmla="val 78139" name="adj"/>
+            </a:avLst>
+          </a:prstGeom>
+          <a:solidFill>
+            <a:srgbClr val="5E4CE6"/>
+          </a:solidFill>
+          <a:ln>
+            <a:noFill/>
+          </a:ln>
+        </p:spPr>
+        <p:txBody>
+          <a:bodyPr anchorCtr="0" anchor="ctr" bIns="91425" lIns="91425" spcFirstLastPara="1" rIns="91425" wrap="square" tIns="91425">
+            <a:noAutofit/>
+          </a:bodyPr>
+          <a:lstStyle/>
+          <a:p>
+            <a:pPr indent="0" lvl="0" marL="0" rtl="0" algn="l">
+              <a:spcBef>
+                <a:spcPts val="0"/>
+              </a:spcBef>
+              <a:spcAft>
+                <a:spcPts val="0"/>
+              </a:spcAft>
+              <a:buNone/>
+            </a:pPr>
+            <a:r>
+              <a:t/>
+            </a:r>
+            <a:endParaRPr/>
+          </a:p>
+        </p:txBody>
+      </p:sp>
+      <p:sp>
+        <p:nvSpPr>
+          <p:cNvPr id="63" name="Google Shape;63;p2"/>
+          <p:cNvSpPr/>
+          <p:nvPr/>
+        </p:nvSpPr>
+        <p:spPr>
+          <a:xfrm>
+            <a:off x="1142524" y="5066705"/>
+            <a:ext cx="2835235" cy="354330"/>
+          </a:xfrm>
+          <a:prstGeom prst="rect">
+            <a:avLst/>
+          </a:prstGeom>
+          <a:noFill/>
+          <a:ln>
+            <a:noFill/>
+          </a:ln>
+        </p:spPr>
+        <p:txBody>
+          <a:bodyPr anchorCtr="0" anchor="t" bIns="0" lIns="0" spcFirstLastPara="1" rIns="0" wrap="square" tIns="0">
+            <a:noAutofit/>
+          </a:bodyPr>
+          <a:lstStyle/>
+          <a:p>
+            <a:pPr indent="0" lvl="0" marL="0" marR="0" rtl="0" algn="l">
+              <a:lnSpc>
+                <a:spcPct val="125000"/>
+              </a:lnSpc>
+              <a:spcBef>
+                <a:spcPts val="0"/>
+              </a:spcBef>
+              <a:spcAft>
+                <a:spcPts val="0"/>
+              </a:spcAft>
+              <a:buClr>
+                <a:srgbClr val="2A2742"/>
+              </a:buClr>
+              <a:buSzPts val="2200"/>
+              <a:buFont typeface="Outfit ExtraBold"/>
+              <a:buNone/>
+            </a:pPr>
+            <a:r>
+              <a:rPr b="1" i="0" lang="en-US" sz="2200" u="none" cap="none" strike="noStrike">
+                <a:solidFill>
+                  <a:srgbClr val="2A2742"/>
+                </a:solidFill>
+                <a:latin typeface="Outfit ExtraBold"/>
+                <a:ea typeface="Outfit ExtraBold"/>
+                <a:cs typeface="Outfit ExtraBold"/>
+                <a:sym typeface="Outfit ExtraBold"/>
+              </a:rPr>
+              <a:t>Поход к врачу</a:t>
+            </a:r>
+            <a:endParaRPr b="0" i="0" sz="2200" u="none" cap="none" strike="noStrike"/>
+          </a:p>
+        </p:txBody>
+      </p:sp>
+      <p:sp>
+        <p:nvSpPr>
+          <p:cNvPr id="64" name="Google Shape;64;p2"/>
+          <p:cNvSpPr/>
+          <p:nvPr/>
+        </p:nvSpPr>
+        <p:spPr>
+          <a:xfrm>
+            <a:off x="1142524" y="5557123"/>
+            <a:ext cx="5801916" cy="725805"/>
+          </a:xfrm>
+          <a:prstGeom prst="rect">
+            <a:avLst/>
+          </a:prstGeom>
+          <a:noFill/>
+          <a:ln>
+            <a:noFill/>
+          </a:ln>
+        </p:spPr>
+        <p:txBody>
+          <a:bodyPr anchorCtr="0" anchor="t" bIns="0" lIns="0" spcFirstLastPara="1" rIns="0" wrap="square" tIns="0">
+            <a:noAutofit/>
+          </a:bodyPr>
+          <a:lstStyle/>
+          <a:p>
+            <a:pPr indent="0" lvl="0" marL="0" marR="0" rtl="0" algn="l">
+              <a:lnSpc>
+                <a:spcPct val="162857"/>
+              </a:lnSpc>
+              <a:spcBef>
+                <a:spcPts val="0"/>
+              </a:spcBef>
+              <a:spcAft>
+                <a:spcPts val="0"/>
+              </a:spcAft>
+              <a:buClr>
+                <a:srgbClr val="2A2742"/>
+              </a:buClr>
+              <a:buSzPts val="1750"/>
+              <a:buFont typeface="Arimo"/>
+              <a:buNone/>
+            </a:pPr>
+            <a:r>
+              <a:rPr b="0" i="0" lang="en-US" sz="1750" u="none" cap="none" strike="noStrike">
+                <a:solidFill>
+                  <a:srgbClr val="2A2742"/>
+                </a:solidFill>
+                <a:latin typeface="Arimo"/>
+                <a:ea typeface="Arimo"/>
+                <a:cs typeface="Arimo"/>
+                <a:sym typeface="Arimo"/>
+              </a:rPr>
+              <a:t>Дорого, долго и требует личного визита — барьер для первичной диагностики</a:t>
+            </a:r>
+            <a:endParaRPr b="0" i="0" sz="1750" u="none" cap="none" strike="noStrike"/>
+          </a:p>
+        </p:txBody>
+      </p:sp>
+      <p:sp>
+        <p:nvSpPr>
+          <p:cNvPr id="65" name="Google Shape;65;p2"/>
+          <p:cNvSpPr/>
+          <p:nvPr/>
+        </p:nvSpPr>
+        <p:spPr>
+          <a:xfrm>
+            <a:off x="7428548" y="4809411"/>
+            <a:ext cx="6408063" cy="1730812"/>
+          </a:xfrm>
+          <a:prstGeom prst="roundRect">
+            <a:avLst>
+              <a:gd fmla="val 8453" name="adj"/>
+            </a:avLst>
+          </a:prstGeom>
+          <a:solidFill>
+            <a:srgbClr val="FAFAFA">
+              <a:alpha val="94901"/>
+            </a:srgbClr>
+          </a:solidFill>
+          <a:ln cap="flat" cmpd="sng" w="30475">
+            <a:solidFill>
+              <a:srgbClr val="BDB8DF"/>
+            </a:solidFill>
+            <a:prstDash val="solid"/>
+            <a:round/>
+            <a:headEnd len="sm" w="sm" type="none"/>
+            <a:tailEnd len="sm" w="sm" type="none"/>
+          </a:ln>
+        </p:spPr>
+        <p:txBody>
+          <a:bodyPr anchorCtr="0" anchor="ctr" bIns="91425" lIns="91425" spcFirstLastPara="1" rIns="91425" wrap="square" tIns="91425">
+            <a:noAutofit/>
+          </a:bodyPr>
+          <a:lstStyle/>
+          <a:p>
+            <a:pPr indent="0" lvl="0" marL="0" rtl="0" algn="l">
+              <a:spcBef>
+                <a:spcPts val="0"/>
+              </a:spcBef>
+              <a:spcAft>
+                <a:spcPts val="0"/>
+              </a:spcAft>
+              <a:buNone/>
+            </a:pPr>
+            <a:r>
+              <a:t/>
+            </a:r>
+            <a:endParaRPr/>
+          </a:p>
+        </p:txBody>
+      </p:sp>
+      <p:sp>
+        <p:nvSpPr>
+          <p:cNvPr id="66" name="Google Shape;66;p2"/>
+          <p:cNvSpPr/>
+          <p:nvPr/>
+        </p:nvSpPr>
+        <p:spPr>
+          <a:xfrm>
+            <a:off x="7398067" y="4809411"/>
+            <a:ext cx="121920" cy="1730812"/>
+          </a:xfrm>
+          <a:prstGeom prst="roundRect">
+            <a:avLst>
+              <a:gd fmla="val 78139" name="adj"/>
+            </a:avLst>
+          </a:prstGeom>
+          <a:solidFill>
+            <a:srgbClr val="5E4CE6"/>
+          </a:solidFill>
+          <a:ln>
+            <a:noFill/>
+          </a:ln>
+        </p:spPr>
+        <p:txBody>
+          <a:bodyPr anchorCtr="0" anchor="ctr" bIns="91425" lIns="91425" spcFirstLastPara="1" rIns="91425" wrap="square" tIns="91425">
+            <a:noAutofit/>
+          </a:bodyPr>
+          <a:lstStyle/>
+          <a:p>
+            <a:pPr indent="0" lvl="0" marL="0" rtl="0" algn="l">
+              <a:spcBef>
+                <a:spcPts val="0"/>
+              </a:spcBef>
+              <a:spcAft>
+                <a:spcPts val="0"/>
+              </a:spcAft>
+              <a:buNone/>
+            </a:pPr>
+            <a:r>
+              <a:t/>
+            </a:r>
+            <a:endParaRPr/>
+          </a:p>
+        </p:txBody>
+      </p:sp>
+      <p:sp>
+        <p:nvSpPr>
+          <p:cNvPr id="67" name="Google Shape;67;p2"/>
+          <p:cNvSpPr/>
+          <p:nvPr/>
+        </p:nvSpPr>
+        <p:spPr>
+          <a:xfrm>
+            <a:off x="7777282" y="5066705"/>
+            <a:ext cx="2835235" cy="354330"/>
+          </a:xfrm>
+          <a:prstGeom prst="rect">
+            <a:avLst/>
+          </a:prstGeom>
+          <a:noFill/>
+          <a:ln>
+            <a:noFill/>
+          </a:ln>
+        </p:spPr>
+        <p:txBody>
+          <a:bodyPr anchorCtr="0" anchor="t" bIns="0" lIns="0" spcFirstLastPara="1" rIns="0" wrap="square" tIns="0">
+            <a:noAutofit/>
+          </a:bodyPr>
+          <a:lstStyle/>
+          <a:p>
+            <a:pPr indent="0" lvl="0" marL="0" marR="0" rtl="0" algn="l">
+              <a:lnSpc>
+                <a:spcPct val="125000"/>
+              </a:lnSpc>
+              <a:spcBef>
+                <a:spcPts val="0"/>
+              </a:spcBef>
+              <a:spcAft>
+                <a:spcPts val="0"/>
+              </a:spcAft>
+              <a:buClr>
+                <a:srgbClr val="2A2742"/>
+              </a:buClr>
+              <a:buSzPts val="2200"/>
+              <a:buFont typeface="Outfit ExtraBold"/>
+              <a:buNone/>
+            </a:pPr>
+            <a:r>
+              <a:rPr b="1" i="0" lang="en-US" sz="2200" u="none" cap="none" strike="noStrike">
+                <a:solidFill>
+                  <a:srgbClr val="2A2742"/>
+                </a:solidFill>
+                <a:latin typeface="Outfit ExtraBold"/>
+                <a:ea typeface="Outfit ExtraBold"/>
+                <a:cs typeface="Outfit ExtraBold"/>
+                <a:sym typeface="Outfit ExtraBold"/>
+              </a:rPr>
+              <a:t>Разрозненность</a:t>
+            </a:r>
+            <a:endParaRPr b="0" i="0" sz="2200" u="none" cap="none" strike="noStrike"/>
+          </a:p>
+        </p:txBody>
+      </p:sp>
+      <p:sp>
+        <p:nvSpPr>
+          <p:cNvPr id="68" name="Google Shape;68;p2"/>
+          <p:cNvSpPr/>
+          <p:nvPr/>
+        </p:nvSpPr>
+        <p:spPr>
+          <a:xfrm>
+            <a:off x="7777282" y="5557123"/>
+            <a:ext cx="5802035" cy="725805"/>
+          </a:xfrm>
+          <a:prstGeom prst="rect">
+            <a:avLst/>
+          </a:prstGeom>
+          <a:noFill/>
+          <a:ln>
+            <a:noFill/>
+          </a:ln>
+        </p:spPr>
+        <p:txBody>
+          <a:bodyPr anchorCtr="0" anchor="t" bIns="0" lIns="0" spcFirstLastPara="1" rIns="0" wrap="square" tIns="0">
+            <a:noAutofit/>
+          </a:bodyPr>
+          <a:lstStyle/>
+          <a:p>
+            <a:pPr indent="0" lvl="0" marL="0" marR="0" rtl="0" algn="l">
+              <a:lnSpc>
+                <a:spcPct val="162857"/>
+              </a:lnSpc>
+              <a:spcBef>
+                <a:spcPts val="0"/>
+              </a:spcBef>
+              <a:spcAft>
+                <a:spcPts val="0"/>
+              </a:spcAft>
+              <a:buClr>
+                <a:srgbClr val="2A2742"/>
+              </a:buClr>
+              <a:buSzPts val="1750"/>
+              <a:buFont typeface="Arimo"/>
+              <a:buNone/>
+            </a:pPr>
+            <a:r>
+              <a:rPr b="0" i="0" lang="en-US" sz="1750" u="none" cap="none" strike="noStrike">
+                <a:solidFill>
+                  <a:srgbClr val="2A2742"/>
+                </a:solidFill>
+                <a:latin typeface="Arimo"/>
+                <a:ea typeface="Arimo"/>
+                <a:cs typeface="Arimo"/>
+                <a:sym typeface="Arimo"/>
+              </a:rPr>
+              <a:t>Нет единой платформы с проверенными методиками по разным направлениям</a:t>
             </a:r>
             <a:endParaRPr b="0" i="0" sz="1750" u="none" cap="none" strike="noStrike"/>
           </a:p>
@@ -4619,7 +5500,7 @@
   <p:cSld>
     <p:spTree>
       <p:nvGrpSpPr>
-        <p:cNvPr id="56" name="Shape 56"/>
+        <p:cNvPr id="73" name="Shape 73"/>
         <p:cNvGrpSpPr/>
         <p:nvPr/>
       </p:nvGrpSpPr>
@@ -4633,14 +5514,14 @@
       </p:grpSpPr>
       <p:sp>
         <p:nvSpPr>
-          <p:cNvPr id="57" name="Google Shape;57;p14"/>
+          <p:cNvPr id="74" name="Google Shape;74;p3"/>
           <p:cNvSpPr/>
           <p:nvPr/>
         </p:nvSpPr>
         <p:spPr>
           <a:xfrm>
-            <a:off x="744260" y="584716"/>
-            <a:ext cx="3455551" cy="431840"/>
+            <a:off x="793790" y="2381964"/>
+            <a:ext cx="5670590" cy="708779"/>
           </a:xfrm>
           <a:prstGeom prst="rect">
             <a:avLst/>
@@ -4658,7 +5539,7 @@
           <a:p>
             <a:pPr indent="0" lvl="0" marL="0" marR="0" rtl="0" algn="l">
               <a:lnSpc>
-                <a:spcPct val="125925"/>
+                <a:spcPct val="124719"/>
               </a:lnSpc>
               <a:spcBef>
                 <a:spcPts val="0"/>
@@ -4669,53 +5550,585 @@
               <a:buClr>
                 <a:srgbClr val="231971"/>
               </a:buClr>
-              <a:buSzPts val="2700"/>
-              <a:buFont typeface="Outfit"/>
+              <a:buSzPts val="4450"/>
+              <a:buFont typeface="Outfit ExtraBold"/>
               <a:buNone/>
             </a:pPr>
             <a:r>
-              <a:rPr b="1" i="0" lang="en-US" sz="2700" u="none" cap="none" strike="noStrike">
+              <a:rPr b="1" i="0" lang="en-US" sz="4450" u="none" cap="none" strike="noStrike">
                 <a:solidFill>
                   <a:srgbClr val="231971"/>
                 </a:solidFill>
-                <a:latin typeface="Outfit"/>
-                <a:ea typeface="Outfit"/>
-                <a:cs typeface="Outfit"/>
-                <a:sym typeface="Outfit"/>
+                <a:latin typeface="Outfit ExtraBold"/>
+                <a:ea typeface="Outfit ExtraBold"/>
+                <a:cs typeface="Outfit ExtraBold"/>
+                <a:sym typeface="Outfit ExtraBold"/>
               </a:rPr>
-              <a:t>Мой GitHub</a:t>
+              <a:t>О проекте</a:t>
             </a:r>
-            <a:endParaRPr b="0" i="0" sz="2700" u="none" cap="none" strike="noStrike"/>
-          </a:p>
-        </p:txBody>
-      </p:sp>
-      <p:pic>
-        <p:nvPicPr>
-          <p:cNvPr descr="preencoded.png" id="58" name="Google Shape;58;p14"/>
-          <p:cNvPicPr preferRelativeResize="0"/>
-          <p:nvPr/>
-        </p:nvPicPr>
-        <p:blipFill rotWithShape="1">
-          <a:blip r:embed="rId3">
-            <a:alphaModFix/>
-          </a:blip>
-          <a:srcRect b="0" l="0" r="0" t="0"/>
-          <a:stretch/>
-        </p:blipFill>
-        <p:spPr>
-          <a:xfrm>
-            <a:off x="7424023" y="1184910"/>
-            <a:ext cx="6462117" cy="6462117"/>
-          </a:xfrm>
-          <a:prstGeom prst="rect">
-            <a:avLst/>
-          </a:prstGeom>
-          <a:noFill/>
-          <a:ln>
-            <a:noFill/>
-          </a:ln>
-        </p:spPr>
-      </p:pic>
+            <a:endParaRPr b="0" i="0" sz="4450" u="none" cap="none" strike="noStrike"/>
+          </a:p>
+        </p:txBody>
+      </p:sp>
+      <p:sp>
+        <p:nvSpPr>
+          <p:cNvPr id="75" name="Google Shape;75;p3"/>
+          <p:cNvSpPr/>
+          <p:nvPr/>
+        </p:nvSpPr>
+        <p:spPr>
+          <a:xfrm>
+            <a:off x="793790" y="3544372"/>
+            <a:ext cx="13042821" cy="362903"/>
+          </a:xfrm>
+          <a:prstGeom prst="rect">
+            <a:avLst/>
+          </a:prstGeom>
+          <a:noFill/>
+          <a:ln>
+            <a:noFill/>
+          </a:ln>
+        </p:spPr>
+        <p:txBody>
+          <a:bodyPr anchorCtr="0" anchor="t" bIns="0" lIns="0" spcFirstLastPara="1" rIns="0" wrap="square" tIns="0">
+            <a:noAutofit/>
+          </a:bodyPr>
+          <a:lstStyle/>
+          <a:p>
+            <a:pPr indent="0" lvl="0" marL="0" marR="0" rtl="0" algn="l">
+              <a:lnSpc>
+                <a:spcPct val="162857"/>
+              </a:lnSpc>
+              <a:spcBef>
+                <a:spcPts val="0"/>
+              </a:spcBef>
+              <a:spcAft>
+                <a:spcPts val="0"/>
+              </a:spcAft>
+              <a:buClr>
+                <a:srgbClr val="2A2742"/>
+              </a:buClr>
+              <a:buSzPts val="1750"/>
+              <a:buFont typeface="Arimo"/>
+              <a:buNone/>
+            </a:pPr>
+            <a:r>
+              <a:rPr b="0" i="0" lang="en-US" sz="1750" u="none" cap="none" strike="noStrike">
+                <a:solidFill>
+                  <a:srgbClr val="2A2742"/>
+                </a:solidFill>
+                <a:latin typeface="Arimo"/>
+                <a:ea typeface="Arimo"/>
+                <a:cs typeface="Arimo"/>
+                <a:sym typeface="Arimo"/>
+              </a:rPr>
+              <a:t>Современная веб-платформа для психологического и медицинского самотестирования — быстро, анонимно и бесплатно.</a:t>
+            </a:r>
+            <a:endParaRPr b="0" i="0" sz="1750" u="none" cap="none" strike="noStrike"/>
+          </a:p>
+        </p:txBody>
+      </p:sp>
+      <p:sp>
+        <p:nvSpPr>
+          <p:cNvPr id="76" name="Google Shape;76;p3"/>
+          <p:cNvSpPr/>
+          <p:nvPr/>
+        </p:nvSpPr>
+        <p:spPr>
+          <a:xfrm>
+            <a:off x="793790" y="4162425"/>
+            <a:ext cx="4196358" cy="1685092"/>
+          </a:xfrm>
+          <a:prstGeom prst="roundRect">
+            <a:avLst>
+              <a:gd fmla="val 5654" name="adj"/>
+            </a:avLst>
+          </a:prstGeom>
+          <a:solidFill>
+            <a:srgbClr val="E9E6FA"/>
+          </a:solidFill>
+          <a:ln cap="flat" cmpd="sng" w="9525">
+            <a:solidFill>
+              <a:srgbClr val="BDB8DF"/>
+            </a:solidFill>
+            <a:prstDash val="solid"/>
+            <a:round/>
+            <a:headEnd len="sm" w="sm" type="none"/>
+            <a:tailEnd len="sm" w="sm" type="none"/>
+          </a:ln>
+        </p:spPr>
+        <p:txBody>
+          <a:bodyPr anchorCtr="0" anchor="ctr" bIns="91425" lIns="91425" spcFirstLastPara="1" rIns="91425" wrap="square" tIns="91425">
+            <a:noAutofit/>
+          </a:bodyPr>
+          <a:lstStyle/>
+          <a:p>
+            <a:pPr indent="0" lvl="0" marL="0" rtl="0" algn="l">
+              <a:spcBef>
+                <a:spcPts val="0"/>
+              </a:spcBef>
+              <a:spcAft>
+                <a:spcPts val="0"/>
+              </a:spcAft>
+              <a:buNone/>
+            </a:pPr>
+            <a:r>
+              <a:t/>
+            </a:r>
+            <a:endParaRPr/>
+          </a:p>
+        </p:txBody>
+      </p:sp>
+      <p:sp>
+        <p:nvSpPr>
+          <p:cNvPr id="77" name="Google Shape;77;p3"/>
+          <p:cNvSpPr/>
+          <p:nvPr/>
+        </p:nvSpPr>
+        <p:spPr>
+          <a:xfrm>
+            <a:off x="1028224" y="4396859"/>
+            <a:ext cx="2835235" cy="354330"/>
+          </a:xfrm>
+          <a:prstGeom prst="rect">
+            <a:avLst/>
+          </a:prstGeom>
+          <a:noFill/>
+          <a:ln>
+            <a:noFill/>
+          </a:ln>
+        </p:spPr>
+        <p:txBody>
+          <a:bodyPr anchorCtr="0" anchor="t" bIns="0" lIns="0" spcFirstLastPara="1" rIns="0" wrap="square" tIns="0">
+            <a:noAutofit/>
+          </a:bodyPr>
+          <a:lstStyle/>
+          <a:p>
+            <a:pPr indent="0" lvl="0" marL="0" marR="0" rtl="0" algn="l">
+              <a:lnSpc>
+                <a:spcPct val="125000"/>
+              </a:lnSpc>
+              <a:spcBef>
+                <a:spcPts val="0"/>
+              </a:spcBef>
+              <a:spcAft>
+                <a:spcPts val="0"/>
+              </a:spcAft>
+              <a:buClr>
+                <a:srgbClr val="2A2742"/>
+              </a:buClr>
+              <a:buSzPts val="2200"/>
+              <a:buFont typeface="Outfit ExtraBold"/>
+              <a:buNone/>
+            </a:pPr>
+            <a:r>
+              <a:rPr b="1" i="0" lang="en-US" sz="2200" u="none" cap="none" strike="noStrike">
+                <a:solidFill>
+                  <a:srgbClr val="2A2742"/>
+                </a:solidFill>
+                <a:latin typeface="Outfit ExtraBold"/>
+                <a:ea typeface="Outfit ExtraBold"/>
+                <a:cs typeface="Outfit ExtraBold"/>
+                <a:sym typeface="Outfit ExtraBold"/>
+              </a:rPr>
+              <a:t>Широкий охват</a:t>
+            </a:r>
+            <a:endParaRPr b="0" i="0" sz="2200" u="none" cap="none" strike="noStrike"/>
+          </a:p>
+        </p:txBody>
+      </p:sp>
+      <p:sp>
+        <p:nvSpPr>
+          <p:cNvPr id="78" name="Google Shape;78;p3"/>
+          <p:cNvSpPr/>
+          <p:nvPr/>
+        </p:nvSpPr>
+        <p:spPr>
+          <a:xfrm>
+            <a:off x="1028224" y="4887278"/>
+            <a:ext cx="3727490" cy="725805"/>
+          </a:xfrm>
+          <a:prstGeom prst="rect">
+            <a:avLst/>
+          </a:prstGeom>
+          <a:noFill/>
+          <a:ln>
+            <a:noFill/>
+          </a:ln>
+        </p:spPr>
+        <p:txBody>
+          <a:bodyPr anchorCtr="0" anchor="t" bIns="0" lIns="0" spcFirstLastPara="1" rIns="0" wrap="square" tIns="0">
+            <a:noAutofit/>
+          </a:bodyPr>
+          <a:lstStyle/>
+          <a:p>
+            <a:pPr indent="0" lvl="0" marL="0" marR="0" rtl="0" algn="l">
+              <a:lnSpc>
+                <a:spcPct val="162857"/>
+              </a:lnSpc>
+              <a:spcBef>
+                <a:spcPts val="0"/>
+              </a:spcBef>
+              <a:spcAft>
+                <a:spcPts val="0"/>
+              </a:spcAft>
+              <a:buClr>
+                <a:srgbClr val="2A2742"/>
+              </a:buClr>
+              <a:buSzPts val="1750"/>
+              <a:buFont typeface="Arimo"/>
+              <a:buNone/>
+            </a:pPr>
+            <a:r>
+              <a:rPr b="0" i="0" lang="en-US" sz="1750" u="none" cap="none" strike="noStrike">
+                <a:solidFill>
+                  <a:srgbClr val="2A2742"/>
+                </a:solidFill>
+                <a:latin typeface="Arimo"/>
+                <a:ea typeface="Arimo"/>
+                <a:cs typeface="Arimo"/>
+                <a:sym typeface="Arimo"/>
+              </a:rPr>
+              <a:t>Тесты на аутизм, шкалы депрессии и стресса</a:t>
+            </a:r>
+            <a:endParaRPr b="0" i="0" sz="1750" u="none" cap="none" strike="noStrike"/>
+          </a:p>
+        </p:txBody>
+      </p:sp>
+      <p:sp>
+        <p:nvSpPr>
+          <p:cNvPr id="79" name="Google Shape;79;p3"/>
+          <p:cNvSpPr/>
+          <p:nvPr/>
+        </p:nvSpPr>
+        <p:spPr>
+          <a:xfrm>
+            <a:off x="5216962" y="4162425"/>
+            <a:ext cx="4196358" cy="1685092"/>
+          </a:xfrm>
+          <a:prstGeom prst="roundRect">
+            <a:avLst>
+              <a:gd fmla="val 5654" name="adj"/>
+            </a:avLst>
+          </a:prstGeom>
+          <a:solidFill>
+            <a:srgbClr val="E9E6FA"/>
+          </a:solidFill>
+          <a:ln cap="flat" cmpd="sng" w="9525">
+            <a:solidFill>
+              <a:srgbClr val="BDB8DF"/>
+            </a:solidFill>
+            <a:prstDash val="solid"/>
+            <a:round/>
+            <a:headEnd len="sm" w="sm" type="none"/>
+            <a:tailEnd len="sm" w="sm" type="none"/>
+          </a:ln>
+        </p:spPr>
+        <p:txBody>
+          <a:bodyPr anchorCtr="0" anchor="ctr" bIns="91425" lIns="91425" spcFirstLastPara="1" rIns="91425" wrap="square" tIns="91425">
+            <a:noAutofit/>
+          </a:bodyPr>
+          <a:lstStyle/>
+          <a:p>
+            <a:pPr indent="0" lvl="0" marL="0" rtl="0" algn="l">
+              <a:spcBef>
+                <a:spcPts val="0"/>
+              </a:spcBef>
+              <a:spcAft>
+                <a:spcPts val="0"/>
+              </a:spcAft>
+              <a:buNone/>
+            </a:pPr>
+            <a:r>
+              <a:t/>
+            </a:r>
+            <a:endParaRPr/>
+          </a:p>
+        </p:txBody>
+      </p:sp>
+      <p:sp>
+        <p:nvSpPr>
+          <p:cNvPr id="80" name="Google Shape;80;p3"/>
+          <p:cNvSpPr/>
+          <p:nvPr/>
+        </p:nvSpPr>
+        <p:spPr>
+          <a:xfrm>
+            <a:off x="5451396" y="4396859"/>
+            <a:ext cx="3490674" cy="354330"/>
+          </a:xfrm>
+          <a:prstGeom prst="rect">
+            <a:avLst/>
+          </a:prstGeom>
+          <a:noFill/>
+          <a:ln>
+            <a:noFill/>
+          </a:ln>
+        </p:spPr>
+        <p:txBody>
+          <a:bodyPr anchorCtr="0" anchor="t" bIns="0" lIns="0" spcFirstLastPara="1" rIns="0" wrap="square" tIns="0">
+            <a:noAutofit/>
+          </a:bodyPr>
+          <a:lstStyle/>
+          <a:p>
+            <a:pPr indent="0" lvl="0" marL="0" marR="0" rtl="0" algn="l">
+              <a:lnSpc>
+                <a:spcPct val="125000"/>
+              </a:lnSpc>
+              <a:spcBef>
+                <a:spcPts val="0"/>
+              </a:spcBef>
+              <a:spcAft>
+                <a:spcPts val="0"/>
+              </a:spcAft>
+              <a:buClr>
+                <a:srgbClr val="2A2742"/>
+              </a:buClr>
+              <a:buSzPts val="2200"/>
+              <a:buFont typeface="Outfit ExtraBold"/>
+              <a:buNone/>
+            </a:pPr>
+            <a:r>
+              <a:rPr b="1" i="0" lang="en-US" sz="2200" u="none" cap="none" strike="noStrike">
+                <a:solidFill>
+                  <a:srgbClr val="2A2742"/>
+                </a:solidFill>
+                <a:latin typeface="Outfit ExtraBold"/>
+                <a:ea typeface="Outfit ExtraBold"/>
+                <a:cs typeface="Outfit ExtraBold"/>
+                <a:sym typeface="Outfit ExtraBold"/>
+              </a:rPr>
+              <a:t>Мгновенный результат</a:t>
+            </a:r>
+            <a:endParaRPr b="0" i="0" sz="2200" u="none" cap="none" strike="noStrike"/>
+          </a:p>
+        </p:txBody>
+      </p:sp>
+      <p:sp>
+        <p:nvSpPr>
+          <p:cNvPr id="81" name="Google Shape;81;p3"/>
+          <p:cNvSpPr/>
+          <p:nvPr/>
+        </p:nvSpPr>
+        <p:spPr>
+          <a:xfrm>
+            <a:off x="5451396" y="4887278"/>
+            <a:ext cx="3727490" cy="725805"/>
+          </a:xfrm>
+          <a:prstGeom prst="rect">
+            <a:avLst/>
+          </a:prstGeom>
+          <a:noFill/>
+          <a:ln>
+            <a:noFill/>
+          </a:ln>
+        </p:spPr>
+        <p:txBody>
+          <a:bodyPr anchorCtr="0" anchor="t" bIns="0" lIns="0" spcFirstLastPara="1" rIns="0" wrap="square" tIns="0">
+            <a:noAutofit/>
+          </a:bodyPr>
+          <a:lstStyle/>
+          <a:p>
+            <a:pPr indent="0" lvl="0" marL="0" marR="0" rtl="0" algn="l">
+              <a:lnSpc>
+                <a:spcPct val="162857"/>
+              </a:lnSpc>
+              <a:spcBef>
+                <a:spcPts val="0"/>
+              </a:spcBef>
+              <a:spcAft>
+                <a:spcPts val="0"/>
+              </a:spcAft>
+              <a:buClr>
+                <a:srgbClr val="2A2742"/>
+              </a:buClr>
+              <a:buSzPts val="1750"/>
+              <a:buFont typeface="Arimo"/>
+              <a:buNone/>
+            </a:pPr>
+            <a:r>
+              <a:rPr b="0" i="0" lang="en-US" sz="1750" u="none" cap="none" strike="noStrike">
+                <a:solidFill>
+                  <a:srgbClr val="2A2742"/>
+                </a:solidFill>
+                <a:latin typeface="Arimo"/>
+                <a:ea typeface="Arimo"/>
+                <a:cs typeface="Arimo"/>
+                <a:sym typeface="Arimo"/>
+              </a:rPr>
+              <a:t>Профессиональная интерпретация сразу после прохождения</a:t>
+            </a:r>
+            <a:endParaRPr b="0" i="0" sz="1750" u="none" cap="none" strike="noStrike"/>
+          </a:p>
+        </p:txBody>
+      </p:sp>
+      <p:sp>
+        <p:nvSpPr>
+          <p:cNvPr id="82" name="Google Shape;82;p3"/>
+          <p:cNvSpPr/>
+          <p:nvPr/>
+        </p:nvSpPr>
+        <p:spPr>
+          <a:xfrm>
+            <a:off x="9640133" y="4162425"/>
+            <a:ext cx="4196358" cy="1685092"/>
+          </a:xfrm>
+          <a:prstGeom prst="roundRect">
+            <a:avLst>
+              <a:gd fmla="val 5654" name="adj"/>
+            </a:avLst>
+          </a:prstGeom>
+          <a:solidFill>
+            <a:srgbClr val="E9E6FA"/>
+          </a:solidFill>
+          <a:ln cap="flat" cmpd="sng" w="9525">
+            <a:solidFill>
+              <a:srgbClr val="BDB8DF"/>
+            </a:solidFill>
+            <a:prstDash val="solid"/>
+            <a:round/>
+            <a:headEnd len="sm" w="sm" type="none"/>
+            <a:tailEnd len="sm" w="sm" type="none"/>
+          </a:ln>
+        </p:spPr>
+        <p:txBody>
+          <a:bodyPr anchorCtr="0" anchor="ctr" bIns="91425" lIns="91425" spcFirstLastPara="1" rIns="91425" wrap="square" tIns="91425">
+            <a:noAutofit/>
+          </a:bodyPr>
+          <a:lstStyle/>
+          <a:p>
+            <a:pPr indent="0" lvl="0" marL="0" rtl="0" algn="l">
+              <a:spcBef>
+                <a:spcPts val="0"/>
+              </a:spcBef>
+              <a:spcAft>
+                <a:spcPts val="0"/>
+              </a:spcAft>
+              <a:buNone/>
+            </a:pPr>
+            <a:r>
+              <a:t/>
+            </a:r>
+            <a:endParaRPr/>
+          </a:p>
+        </p:txBody>
+      </p:sp>
+      <p:sp>
+        <p:nvSpPr>
+          <p:cNvPr id="83" name="Google Shape;83;p3"/>
+          <p:cNvSpPr/>
+          <p:nvPr/>
+        </p:nvSpPr>
+        <p:spPr>
+          <a:xfrm>
+            <a:off x="9874568" y="4396859"/>
+            <a:ext cx="2835235" cy="354330"/>
+          </a:xfrm>
+          <a:prstGeom prst="rect">
+            <a:avLst/>
+          </a:prstGeom>
+          <a:noFill/>
+          <a:ln>
+            <a:noFill/>
+          </a:ln>
+        </p:spPr>
+        <p:txBody>
+          <a:bodyPr anchorCtr="0" anchor="t" bIns="0" lIns="0" spcFirstLastPara="1" rIns="0" wrap="square" tIns="0">
+            <a:noAutofit/>
+          </a:bodyPr>
+          <a:lstStyle/>
+          <a:p>
+            <a:pPr indent="0" lvl="0" marL="0" marR="0" rtl="0" algn="l">
+              <a:lnSpc>
+                <a:spcPct val="125000"/>
+              </a:lnSpc>
+              <a:spcBef>
+                <a:spcPts val="0"/>
+              </a:spcBef>
+              <a:spcAft>
+                <a:spcPts val="0"/>
+              </a:spcAft>
+              <a:buClr>
+                <a:srgbClr val="2A2742"/>
+              </a:buClr>
+              <a:buSzPts val="2200"/>
+              <a:buFont typeface="Outfit ExtraBold"/>
+              <a:buNone/>
+            </a:pPr>
+            <a:r>
+              <a:rPr b="1" i="0" lang="en-US" sz="2200" u="none" cap="none" strike="noStrike">
+                <a:solidFill>
+                  <a:srgbClr val="2A2742"/>
+                </a:solidFill>
+                <a:latin typeface="Outfit ExtraBold"/>
+                <a:ea typeface="Outfit ExtraBold"/>
+                <a:cs typeface="Outfit ExtraBold"/>
+                <a:sym typeface="Outfit ExtraBold"/>
+              </a:rPr>
+              <a:t>Анонимность</a:t>
+            </a:r>
+            <a:endParaRPr b="0" i="0" sz="2200" u="none" cap="none" strike="noStrike"/>
+          </a:p>
+        </p:txBody>
+      </p:sp>
+      <p:sp>
+        <p:nvSpPr>
+          <p:cNvPr id="84" name="Google Shape;84;p3"/>
+          <p:cNvSpPr/>
+          <p:nvPr/>
+        </p:nvSpPr>
+        <p:spPr>
+          <a:xfrm>
+            <a:off x="9874568" y="4887278"/>
+            <a:ext cx="3727490" cy="725805"/>
+          </a:xfrm>
+          <a:prstGeom prst="rect">
+            <a:avLst/>
+          </a:prstGeom>
+          <a:noFill/>
+          <a:ln>
+            <a:noFill/>
+          </a:ln>
+        </p:spPr>
+        <p:txBody>
+          <a:bodyPr anchorCtr="0" anchor="t" bIns="0" lIns="0" spcFirstLastPara="1" rIns="0" wrap="square" tIns="0">
+            <a:noAutofit/>
+          </a:bodyPr>
+          <a:lstStyle/>
+          <a:p>
+            <a:pPr indent="0" lvl="0" marL="0" marR="0" rtl="0" algn="l">
+              <a:lnSpc>
+                <a:spcPct val="162857"/>
+              </a:lnSpc>
+              <a:spcBef>
+                <a:spcPts val="0"/>
+              </a:spcBef>
+              <a:spcAft>
+                <a:spcPts val="0"/>
+              </a:spcAft>
+              <a:buClr>
+                <a:srgbClr val="2A2742"/>
+              </a:buClr>
+              <a:buSzPts val="1750"/>
+              <a:buFont typeface="Arimo"/>
+              <a:buNone/>
+            </a:pPr>
+            <a:r>
+              <a:rPr b="0" i="0" lang="en-US" sz="1750" u="none" cap="none" strike="noStrike">
+                <a:solidFill>
+                  <a:srgbClr val="2A2742"/>
+                </a:solidFill>
+                <a:latin typeface="Arimo"/>
+                <a:ea typeface="Arimo"/>
+                <a:cs typeface="Arimo"/>
+                <a:sym typeface="Arimo"/>
+              </a:rPr>
+              <a:t>Диагностика без регистрации и сбора личных данных</a:t>
+            </a:r>
+            <a:endParaRPr b="0" i="0" sz="1750" u="none" cap="none" strike="noStrike"/>
+          </a:p>
+        </p:txBody>
+      </p:sp>
     </p:spTree>
   </p:cSld>
   <p:clrMapOvr>
@@ -4729,7 +6142,7 @@
   <p:cSld>
     <p:spTree>
       <p:nvGrpSpPr>
-        <p:cNvPr id="63" name="Shape 63"/>
+        <p:cNvPr id="89" name="Shape 89"/>
         <p:cNvGrpSpPr/>
         <p:nvPr/>
       </p:nvGrpSpPr>
@@ -4743,14 +6156,14 @@
       </p:grpSpPr>
       <p:sp>
         <p:nvSpPr>
-          <p:cNvPr id="64" name="Google Shape;64;p15"/>
+          <p:cNvPr id="90" name="Google Shape;90;p4"/>
           <p:cNvSpPr/>
           <p:nvPr/>
         </p:nvSpPr>
         <p:spPr>
           <a:xfrm>
-            <a:off x="793790" y="1689378"/>
-            <a:ext cx="5670590" cy="708779"/>
+            <a:off x="793790" y="1264444"/>
+            <a:ext cx="9027914" cy="708779"/>
           </a:xfrm>
           <a:prstGeom prst="rect">
             <a:avLst/>
@@ -4780,7 +6193,7 @@
                 <a:srgbClr val="231971"/>
               </a:buClr>
               <a:buSzPts val="4450"/>
-              <a:buFont typeface="Outfit"/>
+              <a:buFont typeface="Outfit ExtraBold"/>
               <a:buNone/>
             </a:pPr>
             <a:r>
@@ -4788,12 +6201,12 @@
                 <a:solidFill>
                   <a:srgbClr val="231971"/>
                 </a:solidFill>
-                <a:latin typeface="Outfit"/>
-                <a:ea typeface="Outfit"/>
-                <a:cs typeface="Outfit"/>
-                <a:sym typeface="Outfit"/>
+                <a:latin typeface="Outfit ExtraBold"/>
+                <a:ea typeface="Outfit ExtraBold"/>
+                <a:cs typeface="Outfit ExtraBold"/>
+                <a:sym typeface="Outfit ExtraBold"/>
               </a:rPr>
-              <a:t>Проблема</a:t>
+              <a:t>Аналоги и позиционирование</a:t>
             </a:r>
             <a:endParaRPr b="0" i="0" sz="4450" u="none" cap="none" strike="noStrike"/>
           </a:p>
@@ -4801,26 +6214,24 @@
       </p:sp>
       <p:sp>
         <p:nvSpPr>
-          <p:cNvPr id="65" name="Google Shape;65;p15"/>
+          <p:cNvPr id="91" name="Google Shape;91;p4"/>
           <p:cNvSpPr/>
           <p:nvPr/>
         </p:nvSpPr>
         <p:spPr>
           <a:xfrm>
-            <a:off x="793790" y="2851785"/>
-            <a:ext cx="6407944" cy="1730812"/>
+            <a:off x="793790" y="2568535"/>
+            <a:ext cx="3008948" cy="2501622"/>
           </a:xfrm>
           <a:prstGeom prst="roundRect">
             <a:avLst>
-              <a:gd fmla="val 8453" name="adj"/>
+              <a:gd fmla="val 3808" name="adj"/>
             </a:avLst>
           </a:prstGeom>
           <a:solidFill>
-            <a:srgbClr val="FAFAFA">
-              <a:alpha val="94901"/>
-            </a:srgbClr>
+            <a:srgbClr val="E9E6FA"/>
           </a:solidFill>
-          <a:ln cap="flat" cmpd="sng" w="30475">
+          <a:ln cap="flat" cmpd="sng" w="9525">
             <a:solidFill>
               <a:srgbClr val="BDB8DF"/>
             </a:solidFill>
@@ -4854,59 +6265,14 @@
       </p:sp>
       <p:sp>
         <p:nvSpPr>
-          <p:cNvPr id="66" name="Google Shape;66;p15"/>
+          <p:cNvPr id="92" name="Google Shape;92;p4"/>
           <p:cNvSpPr/>
           <p:nvPr/>
         </p:nvSpPr>
         <p:spPr>
           <a:xfrm>
-            <a:off x="763310" y="2851785"/>
-            <a:ext cx="121920" cy="1730812"/>
-          </a:xfrm>
-          <a:prstGeom prst="roundRect">
-            <a:avLst>
-              <a:gd fmla="val 78139" name="adj"/>
-            </a:avLst>
-          </a:prstGeom>
-          <a:solidFill>
-            <a:srgbClr val="5E4CE6"/>
-          </a:solidFill>
-          <a:ln>
-            <a:noFill/>
-          </a:ln>
-        </p:spPr>
-        <p:txBody>
-          <a:bodyPr anchorCtr="0" anchor="ctr" bIns="91425" lIns="91425" spcFirstLastPara="1" rIns="91425" wrap="square" tIns="91425">
-            <a:noAutofit/>
-          </a:bodyPr>
-          <a:lstStyle/>
-          <a:p>
-            <a:pPr indent="0" lvl="0" marL="0" rtl="0" algn="l">
-              <a:spcBef>
-                <a:spcPts val="0"/>
-              </a:spcBef>
-              <a:spcAft>
-                <a:spcPts val="0"/>
-              </a:spcAft>
-              <a:buNone/>
-            </a:pPr>
-            <a:r>
-              <a:t/>
-            </a:r>
-            <a:endParaRPr/>
-          </a:p>
-        </p:txBody>
-      </p:sp>
-      <p:sp>
-        <p:nvSpPr>
-          <p:cNvPr id="67" name="Google Shape;67;p15"/>
-          <p:cNvSpPr/>
-          <p:nvPr/>
-        </p:nvSpPr>
-        <p:spPr>
-          <a:xfrm>
-            <a:off x="1142524" y="3109079"/>
-            <a:ext cx="2835235" cy="354330"/>
+            <a:off x="1028224" y="2802969"/>
+            <a:ext cx="2540079" cy="354330"/>
           </a:xfrm>
           <a:prstGeom prst="rect">
             <a:avLst/>
@@ -4936,7 +6302,7 @@
                 <a:srgbClr val="2A2742"/>
               </a:buClr>
               <a:buSzPts val="2200"/>
-              <a:buFont typeface="Outfit"/>
+              <a:buFont typeface="Outfit ExtraBold"/>
               <a:buNone/>
             </a:pPr>
             <a:r>
@@ -4944,12 +6310,12 @@
                 <a:solidFill>
                   <a:srgbClr val="2A2742"/>
                 </a:solidFill>
-                <a:latin typeface="Outfit"/>
-                <a:ea typeface="Outfit"/>
-                <a:cs typeface="Outfit"/>
-                <a:sym typeface="Outfit"/>
+                <a:latin typeface="Outfit ExtraBold"/>
+                <a:ea typeface="Outfit ExtraBold"/>
+                <a:cs typeface="Outfit ExtraBold"/>
+                <a:sym typeface="Outfit ExtraBold"/>
               </a:rPr>
-              <a:t>Платный доступ</a:t>
+              <a:t>Психология.ру</a:t>
             </a:r>
             <a:endParaRPr b="0" i="0" sz="2200" u="none" cap="none" strike="noStrike"/>
           </a:p>
@@ -4957,14 +6323,14 @@
       </p:sp>
       <p:sp>
         <p:nvSpPr>
-          <p:cNvPr id="68" name="Google Shape;68;p15"/>
+          <p:cNvPr id="93" name="Google Shape;93;p4"/>
           <p:cNvSpPr/>
           <p:nvPr/>
         </p:nvSpPr>
         <p:spPr>
           <a:xfrm>
-            <a:off x="1142524" y="3599497"/>
-            <a:ext cx="5801916" cy="725805"/>
+            <a:off x="1028224" y="3384113"/>
+            <a:ext cx="2540079" cy="1088708"/>
           </a:xfrm>
           <a:prstGeom prst="rect">
             <a:avLst/>
@@ -5007,7 +6373,7 @@
                 <a:cs typeface="Arimo"/>
                 <a:sym typeface="Arimo"/>
               </a:rPr>
-              <a:t>Качественные тесты скрывают результаты за оплатой в конце.</a:t>
+              <a:t>Много контента, устаревший UX, избыточная реклама</a:t>
             </a:r>
             <a:endParaRPr b="0" i="0" sz="1750" u="none" cap="none" strike="noStrike"/>
           </a:p>
@@ -5015,26 +6381,24 @@
       </p:sp>
       <p:sp>
         <p:nvSpPr>
-          <p:cNvPr id="69" name="Google Shape;69;p15"/>
+          <p:cNvPr id="94" name="Google Shape;94;p4"/>
           <p:cNvSpPr/>
           <p:nvPr/>
         </p:nvSpPr>
         <p:spPr>
           <a:xfrm>
-            <a:off x="7428548" y="2851785"/>
-            <a:ext cx="6408063" cy="1730812"/>
+            <a:off x="4029551" y="2568535"/>
+            <a:ext cx="3008948" cy="2501622"/>
           </a:xfrm>
           <a:prstGeom prst="roundRect">
             <a:avLst>
-              <a:gd fmla="val 8453" name="adj"/>
+              <a:gd fmla="val 3808" name="adj"/>
             </a:avLst>
           </a:prstGeom>
           <a:solidFill>
-            <a:srgbClr val="FAFAFA">
-              <a:alpha val="94901"/>
-            </a:srgbClr>
+            <a:srgbClr val="E9E6FA"/>
           </a:solidFill>
-          <a:ln cap="flat" cmpd="sng" w="30475">
+          <a:ln cap="flat" cmpd="sng" w="9525">
             <a:solidFill>
               <a:srgbClr val="BDB8DF"/>
             </a:solidFill>
@@ -5068,59 +6432,14 @@
       </p:sp>
       <p:sp>
         <p:nvSpPr>
-          <p:cNvPr id="70" name="Google Shape;70;p15"/>
+          <p:cNvPr id="95" name="Google Shape;95;p4"/>
           <p:cNvSpPr/>
           <p:nvPr/>
         </p:nvSpPr>
         <p:spPr>
           <a:xfrm>
-            <a:off x="7398067" y="2851785"/>
-            <a:ext cx="121920" cy="1730812"/>
-          </a:xfrm>
-          <a:prstGeom prst="roundRect">
-            <a:avLst>
-              <a:gd fmla="val 78139" name="adj"/>
-            </a:avLst>
-          </a:prstGeom>
-          <a:solidFill>
-            <a:srgbClr val="5E4CE6"/>
-          </a:solidFill>
-          <a:ln>
-            <a:noFill/>
-          </a:ln>
-        </p:spPr>
-        <p:txBody>
-          <a:bodyPr anchorCtr="0" anchor="ctr" bIns="91425" lIns="91425" spcFirstLastPara="1" rIns="91425" wrap="square" tIns="91425">
-            <a:noAutofit/>
-          </a:bodyPr>
-          <a:lstStyle/>
-          <a:p>
-            <a:pPr indent="0" lvl="0" marL="0" rtl="0" algn="l">
-              <a:spcBef>
-                <a:spcPts val="0"/>
-              </a:spcBef>
-              <a:spcAft>
-                <a:spcPts val="0"/>
-              </a:spcAft>
-              <a:buNone/>
-            </a:pPr>
-            <a:r>
-              <a:t/>
-            </a:r>
-            <a:endParaRPr/>
-          </a:p>
-        </p:txBody>
-      </p:sp>
-      <p:sp>
-        <p:nvSpPr>
-          <p:cNvPr id="71" name="Google Shape;71;p15"/>
-          <p:cNvSpPr/>
-          <p:nvPr/>
-        </p:nvSpPr>
-        <p:spPr>
-          <a:xfrm>
-            <a:off x="7777282" y="3109079"/>
-            <a:ext cx="2835235" cy="354330"/>
+            <a:off x="4263985" y="2802969"/>
+            <a:ext cx="2540079" cy="354330"/>
           </a:xfrm>
           <a:prstGeom prst="rect">
             <a:avLst/>
@@ -5150,7 +6469,7 @@
                 <a:srgbClr val="2A2742"/>
               </a:buClr>
               <a:buSzPts val="2200"/>
-              <a:buFont typeface="Outfit"/>
+              <a:buFont typeface="Outfit ExtraBold"/>
               <a:buNone/>
             </a:pPr>
             <a:r>
@@ -5158,12 +6477,12 @@
                 <a:solidFill>
                   <a:srgbClr val="2A2742"/>
                 </a:solidFill>
-                <a:latin typeface="Outfit"/>
-                <a:ea typeface="Outfit"/>
-                <a:cs typeface="Outfit"/>
-                <a:sym typeface="Outfit"/>
+                <a:latin typeface="Outfit ExtraBold"/>
+                <a:ea typeface="Outfit ExtraBold"/>
+                <a:cs typeface="Outfit ExtraBold"/>
+                <a:sym typeface="Outfit ExtraBold"/>
               </a:rPr>
-              <a:t>Низкое качество</a:t>
+              <a:t>Psychology Today</a:t>
             </a:r>
             <a:endParaRPr b="0" i="0" sz="2200" u="none" cap="none" strike="noStrike"/>
           </a:p>
@@ -5171,14 +6490,14 @@
       </p:sp>
       <p:sp>
         <p:nvSpPr>
-          <p:cNvPr id="72" name="Google Shape;72;p15"/>
+          <p:cNvPr id="96" name="Google Shape;96;p4"/>
           <p:cNvSpPr/>
           <p:nvPr/>
         </p:nvSpPr>
         <p:spPr>
           <a:xfrm>
-            <a:off x="7777282" y="3599497"/>
-            <a:ext cx="5802035" cy="725805"/>
+            <a:off x="4263985" y="3384113"/>
+            <a:ext cx="2540079" cy="1451610"/>
           </a:xfrm>
           <a:prstGeom prst="rect">
             <a:avLst/>
@@ -5221,7 +6540,7 @@
                 <a:cs typeface="Arimo"/>
                 <a:sym typeface="Arimo"/>
               </a:rPr>
-              <a:t>Развлекательные порталы предлагают антинаучные тесты, вводящие в заблуждение.</a:t>
+              <a:t>Качественные тесты, англоязычный, узкоспециализированный</a:t>
             </a:r>
             <a:endParaRPr b="0" i="0" sz="1750" u="none" cap="none" strike="noStrike"/>
           </a:p>
@@ -5229,26 +6548,24 @@
       </p:sp>
       <p:sp>
         <p:nvSpPr>
-          <p:cNvPr id="73" name="Google Shape;73;p15"/>
+          <p:cNvPr id="97" name="Google Shape;97;p4"/>
           <p:cNvSpPr/>
           <p:nvPr/>
         </p:nvSpPr>
         <p:spPr>
           <a:xfrm>
-            <a:off x="793790" y="4809411"/>
-            <a:ext cx="6407944" cy="1730812"/>
+            <a:off x="793790" y="5296972"/>
+            <a:ext cx="6244709" cy="1412915"/>
           </a:xfrm>
           <a:prstGeom prst="roundRect">
             <a:avLst>
-              <a:gd fmla="val 8453" name="adj"/>
+              <a:gd fmla="val 6743" name="adj"/>
             </a:avLst>
           </a:prstGeom>
           <a:solidFill>
-            <a:srgbClr val="FAFAFA">
-              <a:alpha val="94901"/>
-            </a:srgbClr>
+            <a:srgbClr val="E9E6FA"/>
           </a:solidFill>
-          <a:ln cap="flat" cmpd="sng" w="30475">
+          <a:ln cap="flat" cmpd="sng" w="9525">
             <a:solidFill>
               <a:srgbClr val="BDB8DF"/>
             </a:solidFill>
@@ -5282,59 +6599,14 @@
       </p:sp>
       <p:sp>
         <p:nvSpPr>
-          <p:cNvPr id="74" name="Google Shape;74;p15"/>
+          <p:cNvPr id="98" name="Google Shape;98;p4"/>
           <p:cNvSpPr/>
           <p:nvPr/>
         </p:nvSpPr>
         <p:spPr>
           <a:xfrm>
-            <a:off x="763310" y="4809411"/>
-            <a:ext cx="121920" cy="1730812"/>
-          </a:xfrm>
-          <a:prstGeom prst="roundRect">
-            <a:avLst>
-              <a:gd fmla="val 78139" name="adj"/>
-            </a:avLst>
-          </a:prstGeom>
-          <a:solidFill>
-            <a:srgbClr val="5E4CE6"/>
-          </a:solidFill>
-          <a:ln>
-            <a:noFill/>
-          </a:ln>
-        </p:spPr>
-        <p:txBody>
-          <a:bodyPr anchorCtr="0" anchor="ctr" bIns="91425" lIns="91425" spcFirstLastPara="1" rIns="91425" wrap="square" tIns="91425">
-            <a:noAutofit/>
-          </a:bodyPr>
-          <a:lstStyle/>
-          <a:p>
-            <a:pPr indent="0" lvl="0" marL="0" rtl="0" algn="l">
-              <a:spcBef>
-                <a:spcPts val="0"/>
-              </a:spcBef>
-              <a:spcAft>
-                <a:spcPts val="0"/>
-              </a:spcAft>
-              <a:buNone/>
-            </a:pPr>
-            <a:r>
-              <a:t/>
-            </a:r>
-            <a:endParaRPr/>
-          </a:p>
-        </p:txBody>
-      </p:sp>
-      <p:sp>
-        <p:nvSpPr>
-          <p:cNvPr id="75" name="Google Shape;75;p15"/>
-          <p:cNvSpPr/>
-          <p:nvPr/>
-        </p:nvSpPr>
-        <p:spPr>
-          <a:xfrm>
-            <a:off x="1142524" y="5066705"/>
-            <a:ext cx="2902625" cy="354330"/>
+            <a:off x="1028224" y="5531406"/>
+            <a:ext cx="2835235" cy="354330"/>
           </a:xfrm>
           <a:prstGeom prst="rect">
             <a:avLst/>
@@ -5364,7 +6636,7 @@
                 <a:srgbClr val="2A2742"/>
               </a:buClr>
               <a:buSzPts val="2200"/>
-              <a:buFont typeface="Outfit"/>
+              <a:buFont typeface="Outfit ExtraBold"/>
               <a:buNone/>
             </a:pPr>
             <a:r>
@@ -5372,12 +6644,12 @@
                 <a:solidFill>
                   <a:srgbClr val="2A2742"/>
                 </a:solidFill>
-                <a:latin typeface="Outfit"/>
-                <a:ea typeface="Outfit"/>
-                <a:cs typeface="Outfit"/>
-                <a:sym typeface="Outfit"/>
+                <a:latin typeface="Outfit ExtraBold"/>
+                <a:ea typeface="Outfit ExtraBold"/>
+                <a:cs typeface="Outfit ExtraBold"/>
+                <a:sym typeface="Outfit ExtraBold"/>
               </a:rPr>
-              <a:t>Сложный интерфейс</a:t>
+              <a:t>Headspace</a:t>
             </a:r>
             <a:endParaRPr b="0" i="0" sz="2200" u="none" cap="none" strike="noStrike"/>
           </a:p>
@@ -5385,14 +6657,14 @@
       </p:sp>
       <p:sp>
         <p:nvSpPr>
-          <p:cNvPr id="76" name="Google Shape;76;p15"/>
+          <p:cNvPr id="99" name="Google Shape;99;p4"/>
           <p:cNvSpPr/>
           <p:nvPr/>
         </p:nvSpPr>
         <p:spPr>
           <a:xfrm>
-            <a:off x="1142524" y="5557123"/>
-            <a:ext cx="5801916" cy="725805"/>
+            <a:off x="1028224" y="6112550"/>
+            <a:ext cx="5775841" cy="362903"/>
           </a:xfrm>
           <a:prstGeom prst="rect">
             <a:avLst/>
@@ -5435,7 +6707,7 @@
                 <a:cs typeface="Arimo"/>
                 <a:sym typeface="Arimo"/>
               </a:rPr>
-              <a:t>Медицинские сайты устарели: перегружены текстом и рекламой.</a:t>
+              <a:t>Платная подписка, требует установки</a:t>
             </a:r>
             <a:endParaRPr b="0" i="0" sz="1750" u="none" cap="none" strike="noStrike"/>
           </a:p>
@@ -5443,111 +6715,13 @@
       </p:sp>
       <p:sp>
         <p:nvSpPr>
-          <p:cNvPr id="77" name="Google Shape;77;p15"/>
+          <p:cNvPr id="100" name="Google Shape;100;p4"/>
           <p:cNvSpPr/>
           <p:nvPr/>
         </p:nvSpPr>
         <p:spPr>
           <a:xfrm>
-            <a:off x="7428548" y="4809411"/>
-            <a:ext cx="6408063" cy="1730812"/>
-          </a:xfrm>
-          <a:prstGeom prst="roundRect">
-            <a:avLst>
-              <a:gd fmla="val 8453" name="adj"/>
-            </a:avLst>
-          </a:prstGeom>
-          <a:solidFill>
-            <a:srgbClr val="FAFAFA">
-              <a:alpha val="94901"/>
-            </a:srgbClr>
-          </a:solidFill>
-          <a:ln cap="flat" cmpd="sng" w="30475">
-            <a:solidFill>
-              <a:srgbClr val="BDB8DF"/>
-            </a:solidFill>
-            <a:prstDash val="solid"/>
-            <a:round/>
-            <a:headEnd len="sm" w="sm" type="none"/>
-            <a:tailEnd len="sm" w="sm" type="none"/>
-          </a:ln>
-        </p:spPr>
-        <p:txBody>
-          <a:bodyPr anchorCtr="0" anchor="ctr" bIns="91425" lIns="91425" spcFirstLastPara="1" rIns="91425" wrap="square" tIns="91425">
-            <a:noAutofit/>
-          </a:bodyPr>
-          <a:lstStyle/>
-          <a:p>
-            <a:pPr indent="0" lvl="0" marL="0" rtl="0" algn="l">
-              <a:spcBef>
-                <a:spcPts val="0"/>
-              </a:spcBef>
-              <a:spcAft>
-                <a:spcPts val="0"/>
-              </a:spcAft>
-              <a:buNone/>
-            </a:pPr>
-            <a:r>
-              <a:t/>
-            </a:r>
-            <a:endParaRPr/>
-          </a:p>
-        </p:txBody>
-      </p:sp>
-      <p:sp>
-        <p:nvSpPr>
-          <p:cNvPr id="78" name="Google Shape;78;p15"/>
-          <p:cNvSpPr/>
-          <p:nvPr/>
-        </p:nvSpPr>
-        <p:spPr>
-          <a:xfrm>
-            <a:off x="7398067" y="4809411"/>
-            <a:ext cx="121920" cy="1730812"/>
-          </a:xfrm>
-          <a:prstGeom prst="roundRect">
-            <a:avLst>
-              <a:gd fmla="val 78139" name="adj"/>
-            </a:avLst>
-          </a:prstGeom>
-          <a:solidFill>
-            <a:srgbClr val="5E4CE6"/>
-          </a:solidFill>
-          <a:ln>
-            <a:noFill/>
-          </a:ln>
-        </p:spPr>
-        <p:txBody>
-          <a:bodyPr anchorCtr="0" anchor="ctr" bIns="91425" lIns="91425" spcFirstLastPara="1" rIns="91425" wrap="square" tIns="91425">
-            <a:noAutofit/>
-          </a:bodyPr>
-          <a:lstStyle/>
-          <a:p>
-            <a:pPr indent="0" lvl="0" marL="0" rtl="0" algn="l">
-              <a:spcBef>
-                <a:spcPts val="0"/>
-              </a:spcBef>
-              <a:spcAft>
-                <a:spcPts val="0"/>
-              </a:spcAft>
-              <a:buNone/>
-            </a:pPr>
-            <a:r>
-              <a:t/>
-            </a:r>
-            <a:endParaRPr/>
-          </a:p>
-        </p:txBody>
-      </p:sp>
-      <p:sp>
-        <p:nvSpPr>
-          <p:cNvPr id="79" name="Google Shape;79;p15"/>
-          <p:cNvSpPr/>
-          <p:nvPr/>
-        </p:nvSpPr>
-        <p:spPr>
-          <a:xfrm>
-            <a:off x="7777282" y="5066705"/>
+            <a:off x="7599521" y="3634145"/>
             <a:ext cx="2835235" cy="354330"/>
           </a:xfrm>
           <a:prstGeom prst="rect">
@@ -5575,23 +6749,23 @@
                 <a:spcPts val="0"/>
               </a:spcAft>
               <a:buClr>
-                <a:srgbClr val="2A2742"/>
+                <a:srgbClr val="231971"/>
               </a:buClr>
               <a:buSzPts val="2200"/>
-              <a:buFont typeface="Outfit"/>
+              <a:buFont typeface="Outfit ExtraBold"/>
               <a:buNone/>
             </a:pPr>
             <a:r>
               <a:rPr b="1" i="0" lang="en-US" sz="2200" u="none" cap="none" strike="noStrike">
                 <a:solidFill>
-                  <a:srgbClr val="2A2742"/>
+                  <a:srgbClr val="231971"/>
                 </a:solidFill>
-                <a:latin typeface="Outfit"/>
-                <a:ea typeface="Outfit"/>
-                <a:cs typeface="Outfit"/>
-                <a:sym typeface="Outfit"/>
+                <a:latin typeface="Outfit ExtraBold"/>
+                <a:ea typeface="Outfit ExtraBold"/>
+                <a:cs typeface="Outfit ExtraBold"/>
+                <a:sym typeface="Outfit ExtraBold"/>
               </a:rPr>
-              <a:t>Разрозненность</a:t>
+              <a:t>Наша ниша</a:t>
             </a:r>
             <a:endParaRPr b="0" i="0" sz="2200" u="none" cap="none" strike="noStrike"/>
           </a:p>
@@ -5599,14 +6773,14 @@
       </p:sp>
       <p:sp>
         <p:nvSpPr>
-          <p:cNvPr id="80" name="Google Shape;80;p15"/>
+          <p:cNvPr id="101" name="Google Shape;101;p4"/>
           <p:cNvSpPr/>
           <p:nvPr/>
         </p:nvSpPr>
         <p:spPr>
           <a:xfrm>
-            <a:off x="7777282" y="5557123"/>
-            <a:ext cx="5802035" cy="725805"/>
+            <a:off x="7599521" y="4215289"/>
+            <a:ext cx="6244709" cy="1451610"/>
           </a:xfrm>
           <a:prstGeom prst="rect">
             <a:avLst/>
@@ -5649,7 +6823,7 @@
                 <a:cs typeface="Arimo"/>
                 <a:sym typeface="Arimo"/>
               </a:rPr>
-              <a:t>Нет единой платформы с проверенными методиками по разным направлениям.</a:t>
+              <a:t>Русскоязычная веб-платформа с научно верифицированными тестами, современным интерфейсом и полностью бесплатным доступом — без установки и регистрации.</a:t>
             </a:r>
             <a:endParaRPr b="0" i="0" sz="1750" u="none" cap="none" strike="noStrike"/>
           </a:p>
@@ -5668,7 +6842,7 @@
   <p:cSld>
     <p:spTree>
       <p:nvGrpSpPr>
-        <p:cNvPr id="85" name="Shape 85"/>
+        <p:cNvPr id="106" name="Shape 106"/>
         <p:cNvGrpSpPr/>
         <p:nvPr/>
       </p:nvGrpSpPr>
@@ -5682,14 +6856,14 @@
       </p:grpSpPr>
       <p:sp>
         <p:nvSpPr>
-          <p:cNvPr id="86" name="Google Shape;86;p16"/>
+          <p:cNvPr id="107" name="Google Shape;107;p5"/>
           <p:cNvSpPr/>
           <p:nvPr/>
         </p:nvSpPr>
         <p:spPr>
           <a:xfrm>
-            <a:off x="793790" y="1721406"/>
-            <a:ext cx="5670590" cy="708779"/>
+            <a:off x="793790" y="1353383"/>
+            <a:ext cx="6309598" cy="708779"/>
           </a:xfrm>
           <a:prstGeom prst="rect">
             <a:avLst/>
@@ -5719,7 +6893,7 @@
                 <a:srgbClr val="231971"/>
               </a:buClr>
               <a:buSzPts val="4450"/>
-              <a:buFont typeface="Outfit"/>
+              <a:buFont typeface="Outfit ExtraBold"/>
               <a:buNone/>
             </a:pPr>
             <a:r>
@@ -5727,12 +6901,12 @@
                 <a:solidFill>
                   <a:srgbClr val="231971"/>
                 </a:solidFill>
-                <a:latin typeface="Outfit"/>
-                <a:ea typeface="Outfit"/>
-                <a:cs typeface="Outfit"/>
-                <a:sym typeface="Outfit"/>
+                <a:latin typeface="Outfit ExtraBold"/>
+                <a:ea typeface="Outfit ExtraBold"/>
+                <a:cs typeface="Outfit ExtraBold"/>
+                <a:sym typeface="Outfit ExtraBold"/>
               </a:rPr>
-              <a:t>Финансирование</a:t>
+              <a:t>Наши преимущества</a:t>
             </a:r>
             <a:endParaRPr b="0" i="0" sz="4450" u="none" cap="none" strike="noStrike"/>
           </a:p>
@@ -5740,111 +6914,14 @@
       </p:sp>
       <p:sp>
         <p:nvSpPr>
-          <p:cNvPr id="87" name="Google Shape;87;p16"/>
+          <p:cNvPr id="108" name="Google Shape;108;p5"/>
           <p:cNvSpPr/>
           <p:nvPr/>
         </p:nvSpPr>
         <p:spPr>
           <a:xfrm>
-            <a:off x="793790" y="4457700"/>
-            <a:ext cx="6244709" cy="362903"/>
-          </a:xfrm>
-          <a:prstGeom prst="rect">
-            <a:avLst/>
-          </a:prstGeom>
-          <a:noFill/>
-          <a:ln>
-            <a:noFill/>
-          </a:ln>
-        </p:spPr>
-        <p:txBody>
-          <a:bodyPr anchorCtr="0" anchor="t" bIns="0" lIns="0" spcFirstLastPara="1" rIns="0" wrap="square" tIns="0">
-            <a:noAutofit/>
-          </a:bodyPr>
-          <a:lstStyle/>
-          <a:p>
-            <a:pPr indent="0" lvl="0" marL="0" marR="0" rtl="0" algn="l">
-              <a:lnSpc>
-                <a:spcPct val="162857"/>
-              </a:lnSpc>
-              <a:spcBef>
-                <a:spcPts val="0"/>
-              </a:spcBef>
-              <a:spcAft>
-                <a:spcPts val="0"/>
-              </a:spcAft>
-              <a:buSzPts val="1750"/>
-              <a:buFont typeface="Arial"/>
-              <a:buNone/>
-            </a:pPr>
-            <a:r>
-              <a:t/>
-            </a:r>
-            <a:endParaRPr b="0" i="0" sz="1750" u="none" cap="none" strike="noStrike"/>
-          </a:p>
-        </p:txBody>
-      </p:sp>
-      <p:sp>
-        <p:nvSpPr>
-          <p:cNvPr id="88" name="Google Shape;88;p16"/>
-          <p:cNvSpPr/>
-          <p:nvPr/>
-        </p:nvSpPr>
-        <p:spPr>
-          <a:xfrm>
-            <a:off x="7599521" y="3025497"/>
-            <a:ext cx="3008948" cy="3227427"/>
-          </a:xfrm>
-          <a:prstGeom prst="roundRect">
-            <a:avLst>
-              <a:gd fmla="val 3166" name="adj"/>
-            </a:avLst>
-          </a:prstGeom>
-          <a:solidFill>
-            <a:srgbClr val="E9E6FA"/>
-          </a:solidFill>
-          <a:ln cap="flat" cmpd="sng" w="9525">
-            <a:solidFill>
-              <a:srgbClr val="BDB8DF"/>
-            </a:solidFill>
-            <a:prstDash val="solid"/>
-            <a:round/>
-            <a:headEnd len="sm" w="sm" type="none"/>
-            <a:tailEnd len="sm" w="sm" type="none"/>
-          </a:ln>
-        </p:spPr>
-        <p:txBody>
-          <a:bodyPr anchorCtr="0" anchor="ctr" bIns="91425" lIns="91425" spcFirstLastPara="1" rIns="91425" wrap="square" tIns="91425">
-            <a:noAutofit/>
-          </a:bodyPr>
-          <a:lstStyle/>
-          <a:p>
-            <a:pPr indent="0" lvl="0" marL="0" rtl="0" algn="l">
-              <a:spcBef>
-                <a:spcPts val="0"/>
-              </a:spcBef>
-              <a:spcAft>
-                <a:spcPts val="0"/>
-              </a:spcAft>
-              <a:buNone/>
-            </a:pPr>
-            <a:r>
-              <a:t/>
-            </a:r>
-            <a:endParaRPr/>
-          </a:p>
-        </p:txBody>
-      </p:sp>
-      <p:sp>
-        <p:nvSpPr>
-          <p:cNvPr id="89" name="Google Shape;89;p16"/>
-          <p:cNvSpPr/>
-          <p:nvPr/>
-        </p:nvSpPr>
-        <p:spPr>
-          <a:xfrm>
-            <a:off x="7833955" y="3259931"/>
-            <a:ext cx="2540079" cy="354330"/>
+            <a:off x="793790" y="3252907"/>
+            <a:ext cx="3172897" cy="354330"/>
           </a:xfrm>
           <a:prstGeom prst="rect">
             <a:avLst/>
@@ -5874,7 +6951,7 @@
                 <a:srgbClr val="2A2742"/>
               </a:buClr>
               <a:buSzPts val="2200"/>
-              <a:buFont typeface="Outfit"/>
+              <a:buFont typeface="Outfit ExtraBold"/>
               <a:buNone/>
             </a:pPr>
             <a:r>
@@ -5882,12 +6959,12 @@
                 <a:solidFill>
                   <a:srgbClr val="2A2742"/>
                 </a:solidFill>
-                <a:latin typeface="Outfit"/>
-                <a:ea typeface="Outfit"/>
-                <a:cs typeface="Outfit"/>
-                <a:sym typeface="Outfit"/>
+                <a:latin typeface="Outfit ExtraBold"/>
+                <a:ea typeface="Outfit ExtraBold"/>
+                <a:cs typeface="Outfit ExtraBold"/>
+                <a:sym typeface="Outfit ExtraBold"/>
               </a:rPr>
-              <a:t>Старт</a:t>
+              <a:t>Полная бесплатность</a:t>
             </a:r>
             <a:endParaRPr b="0" i="0" sz="2200" u="none" cap="none" strike="noStrike"/>
           </a:p>
@@ -5895,14 +6972,14 @@
       </p:sp>
       <p:sp>
         <p:nvSpPr>
-          <p:cNvPr id="90" name="Google Shape;90;p16"/>
+          <p:cNvPr id="109" name="Google Shape;109;p5"/>
           <p:cNvSpPr/>
           <p:nvPr/>
         </p:nvSpPr>
         <p:spPr>
           <a:xfrm>
-            <a:off x="7833955" y="3841075"/>
-            <a:ext cx="2540079" cy="725805"/>
+            <a:off x="793790" y="3743325"/>
+            <a:ext cx="6379607" cy="362903"/>
           </a:xfrm>
           <a:prstGeom prst="rect">
             <a:avLst/>
@@ -5945,7 +7022,7 @@
                 <a:cs typeface="Arimo"/>
                 <a:sym typeface="Arimo"/>
               </a:rPr>
-              <a:t>Собственные ресурсы на разработку.</a:t>
+              <a:t>Весь функционал и результаты доступны без оплаты</a:t>
             </a:r>
             <a:endParaRPr b="0" i="0" sz="1750" u="none" cap="none" strike="noStrike"/>
           </a:p>
@@ -5953,65 +7030,14 @@
       </p:sp>
       <p:sp>
         <p:nvSpPr>
-          <p:cNvPr id="91" name="Google Shape;91;p16"/>
+          <p:cNvPr id="110" name="Google Shape;110;p5"/>
           <p:cNvSpPr/>
           <p:nvPr/>
         </p:nvSpPr>
         <p:spPr>
           <a:xfrm>
-            <a:off x="10835283" y="3025497"/>
-            <a:ext cx="3008948" cy="3227427"/>
-          </a:xfrm>
-          <a:prstGeom prst="roundRect">
-            <a:avLst>
-              <a:gd fmla="val 3166" name="adj"/>
-            </a:avLst>
-          </a:prstGeom>
-          <a:solidFill>
-            <a:srgbClr val="E9E6FA"/>
-          </a:solidFill>
-          <a:ln cap="flat" cmpd="sng" w="9525">
-            <a:solidFill>
-              <a:srgbClr val="BDB8DF"/>
-            </a:solidFill>
-            <a:prstDash val="solid"/>
-            <a:round/>
-            <a:headEnd len="sm" w="sm" type="none"/>
-            <a:tailEnd len="sm" w="sm" type="none"/>
-          </a:ln>
-        </p:spPr>
-        <p:txBody>
-          <a:bodyPr anchorCtr="0" anchor="ctr" bIns="91425" lIns="91425" spcFirstLastPara="1" rIns="91425" wrap="square" tIns="91425">
-            <a:noAutofit/>
-          </a:bodyPr>
-          <a:lstStyle/>
-          <a:p>
-            <a:pPr indent="0" lvl="0" marL="0" rtl="0" algn="l">
-              <a:spcBef>
-                <a:spcPts val="0"/>
-              </a:spcBef>
-              <a:spcAft>
-                <a:spcPts val="0"/>
-              </a:spcAft>
-              <a:buNone/>
-            </a:pPr>
-            <a:r>
-              <a:t/>
-            </a:r>
-            <a:endParaRPr/>
-          </a:p>
-        </p:txBody>
-      </p:sp>
-      <p:sp>
-        <p:nvSpPr>
-          <p:cNvPr id="92" name="Google Shape;92;p16"/>
-          <p:cNvSpPr/>
-          <p:nvPr/>
-        </p:nvSpPr>
-        <p:spPr>
-          <a:xfrm>
-            <a:off x="11069717" y="3259931"/>
-            <a:ext cx="2540079" cy="354330"/>
+            <a:off x="7456884" y="3252907"/>
+            <a:ext cx="2835235" cy="354330"/>
           </a:xfrm>
           <a:prstGeom prst="rect">
             <a:avLst/>
@@ -6041,7 +7067,7 @@
                 <a:srgbClr val="2A2742"/>
               </a:buClr>
               <a:buSzPts val="2200"/>
-              <a:buFont typeface="Outfit"/>
+              <a:buFont typeface="Outfit ExtraBold"/>
               <a:buNone/>
             </a:pPr>
             <a:r>
@@ -6049,12 +7075,12 @@
                 <a:solidFill>
                   <a:srgbClr val="2A2742"/>
                 </a:solidFill>
-                <a:latin typeface="Outfit"/>
-                <a:ea typeface="Outfit"/>
-                <a:cs typeface="Outfit"/>
-                <a:sym typeface="Outfit"/>
+                <a:latin typeface="Outfit ExtraBold"/>
+                <a:ea typeface="Outfit ExtraBold"/>
+                <a:cs typeface="Outfit ExtraBold"/>
+                <a:sym typeface="Outfit ExtraBold"/>
               </a:rPr>
-              <a:t>Развитие</a:t>
+              <a:t>Анонимность</a:t>
             </a:r>
             <a:endParaRPr b="0" i="0" sz="2200" u="none" cap="none" strike="noStrike"/>
           </a:p>
@@ -6062,14 +7088,14 @@
       </p:sp>
       <p:sp>
         <p:nvSpPr>
-          <p:cNvPr id="93" name="Google Shape;93;p16"/>
+          <p:cNvPr id="111" name="Google Shape;111;p5"/>
           <p:cNvSpPr/>
           <p:nvPr/>
         </p:nvSpPr>
         <p:spPr>
           <a:xfrm>
-            <a:off x="11069717" y="3841075"/>
-            <a:ext cx="2540079" cy="2177415"/>
+            <a:off x="7456884" y="3743325"/>
+            <a:ext cx="6379726" cy="725805"/>
           </a:xfrm>
           <a:prstGeom prst="rect">
             <a:avLst/>
@@ -6112,12 +7138,356 @@
                 <a:cs typeface="Arimo"/>
                 <a:sym typeface="Arimo"/>
               </a:rPr>
-              <a:t>Грантовые программы Mental Health и EdTech, частные инвестиции для расширения базы тестов и найма экспертов-психологов.</a:t>
+              <a:t>Диагностика без регистрации — критично для психологических тестов</a:t>
             </a:r>
             <a:endParaRPr b="0" i="0" sz="1750" u="none" cap="none" strike="noStrike"/>
           </a:p>
         </p:txBody>
       </p:sp>
+      <p:sp>
+        <p:nvSpPr>
+          <p:cNvPr id="112" name="Google Shape;112;p5"/>
+          <p:cNvSpPr/>
+          <p:nvPr/>
+        </p:nvSpPr>
+        <p:spPr>
+          <a:xfrm>
+            <a:off x="793790" y="5659874"/>
+            <a:ext cx="2835235" cy="354330"/>
+          </a:xfrm>
+          <a:prstGeom prst="rect">
+            <a:avLst/>
+          </a:prstGeom>
+          <a:noFill/>
+          <a:ln>
+            <a:noFill/>
+          </a:ln>
+        </p:spPr>
+        <p:txBody>
+          <a:bodyPr anchorCtr="0" anchor="t" bIns="0" lIns="0" spcFirstLastPara="1" rIns="0" wrap="square" tIns="0">
+            <a:noAutofit/>
+          </a:bodyPr>
+          <a:lstStyle/>
+          <a:p>
+            <a:pPr indent="0" lvl="0" marL="0" marR="0" rtl="0" algn="l">
+              <a:lnSpc>
+                <a:spcPct val="125000"/>
+              </a:lnSpc>
+              <a:spcBef>
+                <a:spcPts val="0"/>
+              </a:spcBef>
+              <a:spcAft>
+                <a:spcPts val="0"/>
+              </a:spcAft>
+              <a:buClr>
+                <a:srgbClr val="2A2742"/>
+              </a:buClr>
+              <a:buSzPts val="2200"/>
+              <a:buFont typeface="Outfit ExtraBold"/>
+              <a:buNone/>
+            </a:pPr>
+            <a:r>
+              <a:rPr b="1" i="0" lang="en-US" sz="2200" u="none" cap="none" strike="noStrike">
+                <a:solidFill>
+                  <a:srgbClr val="2A2742"/>
+                </a:solidFill>
+                <a:latin typeface="Outfit ExtraBold"/>
+                <a:ea typeface="Outfit ExtraBold"/>
+                <a:cs typeface="Outfit ExtraBold"/>
+                <a:sym typeface="Outfit ExtraBold"/>
+              </a:rPr>
+              <a:t>Современный стек</a:t>
+            </a:r>
+            <a:endParaRPr b="0" i="0" sz="2200" u="none" cap="none" strike="noStrike"/>
+          </a:p>
+        </p:txBody>
+      </p:sp>
+      <p:sp>
+        <p:nvSpPr>
+          <p:cNvPr id="113" name="Google Shape;113;p5"/>
+          <p:cNvSpPr/>
+          <p:nvPr/>
+        </p:nvSpPr>
+        <p:spPr>
+          <a:xfrm>
+            <a:off x="793790" y="6150293"/>
+            <a:ext cx="6379607" cy="725805"/>
+          </a:xfrm>
+          <a:prstGeom prst="rect">
+            <a:avLst/>
+          </a:prstGeom>
+          <a:noFill/>
+          <a:ln>
+            <a:noFill/>
+          </a:ln>
+        </p:spPr>
+        <p:txBody>
+          <a:bodyPr anchorCtr="0" anchor="t" bIns="0" lIns="0" spcFirstLastPara="1" rIns="0" wrap="square" tIns="0">
+            <a:noAutofit/>
+          </a:bodyPr>
+          <a:lstStyle/>
+          <a:p>
+            <a:pPr indent="0" lvl="0" marL="0" marR="0" rtl="0" algn="l">
+              <a:lnSpc>
+                <a:spcPct val="162857"/>
+              </a:lnSpc>
+              <a:spcBef>
+                <a:spcPts val="0"/>
+              </a:spcBef>
+              <a:spcAft>
+                <a:spcPts val="0"/>
+              </a:spcAft>
+              <a:buClr>
+                <a:srgbClr val="2A2742"/>
+              </a:buClr>
+              <a:buSzPts val="1750"/>
+              <a:buFont typeface="Arimo"/>
+              <a:buNone/>
+            </a:pPr>
+            <a:r>
+              <a:rPr b="0" i="0" lang="en-US" sz="1750" u="none" cap="none" strike="noStrike">
+                <a:solidFill>
+                  <a:srgbClr val="2A2742"/>
+                </a:solidFill>
+                <a:latin typeface="Arimo"/>
+                <a:ea typeface="Arimo"/>
+                <a:cs typeface="Arimo"/>
+                <a:sym typeface="Arimo"/>
+              </a:rPr>
+              <a:t>Быстрый отклик, адаптивность под любые устройства, высокая безопасность</a:t>
+            </a:r>
+            <a:endParaRPr b="0" i="0" sz="1750" u="none" cap="none" strike="noStrike"/>
+          </a:p>
+        </p:txBody>
+      </p:sp>
+      <p:sp>
+        <p:nvSpPr>
+          <p:cNvPr id="114" name="Google Shape;114;p5"/>
+          <p:cNvSpPr/>
+          <p:nvPr/>
+        </p:nvSpPr>
+        <p:spPr>
+          <a:xfrm>
+            <a:off x="7456884" y="5659874"/>
+            <a:ext cx="2965966" cy="354330"/>
+          </a:xfrm>
+          <a:prstGeom prst="rect">
+            <a:avLst/>
+          </a:prstGeom>
+          <a:noFill/>
+          <a:ln>
+            <a:noFill/>
+          </a:ln>
+        </p:spPr>
+        <p:txBody>
+          <a:bodyPr anchorCtr="0" anchor="t" bIns="0" lIns="0" spcFirstLastPara="1" rIns="0" wrap="square" tIns="0">
+            <a:noAutofit/>
+          </a:bodyPr>
+          <a:lstStyle/>
+          <a:p>
+            <a:pPr indent="0" lvl="0" marL="0" marR="0" rtl="0" algn="l">
+              <a:lnSpc>
+                <a:spcPct val="125000"/>
+              </a:lnSpc>
+              <a:spcBef>
+                <a:spcPts val="0"/>
+              </a:spcBef>
+              <a:spcAft>
+                <a:spcPts val="0"/>
+              </a:spcAft>
+              <a:buClr>
+                <a:srgbClr val="2A2742"/>
+              </a:buClr>
+              <a:buSzPts val="2200"/>
+              <a:buFont typeface="Outfit ExtraBold"/>
+              <a:buNone/>
+            </a:pPr>
+            <a:r>
+              <a:rPr b="1" i="0" lang="en-US" sz="2200" u="none" cap="none" strike="noStrike">
+                <a:solidFill>
+                  <a:srgbClr val="2A2742"/>
+                </a:solidFill>
+                <a:latin typeface="Outfit ExtraBold"/>
+                <a:ea typeface="Outfit ExtraBold"/>
+                <a:cs typeface="Outfit ExtraBold"/>
+                <a:sym typeface="Outfit ExtraBold"/>
+              </a:rPr>
+              <a:t>Масштабируемость</a:t>
+            </a:r>
+            <a:endParaRPr b="0" i="0" sz="2200" u="none" cap="none" strike="noStrike"/>
+          </a:p>
+        </p:txBody>
+      </p:sp>
+      <p:sp>
+        <p:nvSpPr>
+          <p:cNvPr id="115" name="Google Shape;115;p5"/>
+          <p:cNvSpPr/>
+          <p:nvPr/>
+        </p:nvSpPr>
+        <p:spPr>
+          <a:xfrm>
+            <a:off x="7456884" y="6150293"/>
+            <a:ext cx="6379726" cy="725805"/>
+          </a:xfrm>
+          <a:prstGeom prst="rect">
+            <a:avLst/>
+          </a:prstGeom>
+          <a:noFill/>
+          <a:ln>
+            <a:noFill/>
+          </a:ln>
+        </p:spPr>
+        <p:txBody>
+          <a:bodyPr anchorCtr="0" anchor="t" bIns="0" lIns="0" spcFirstLastPara="1" rIns="0" wrap="square" tIns="0">
+            <a:noAutofit/>
+          </a:bodyPr>
+          <a:lstStyle/>
+          <a:p>
+            <a:pPr indent="0" lvl="0" marL="0" marR="0" rtl="0" algn="l">
+              <a:lnSpc>
+                <a:spcPct val="162857"/>
+              </a:lnSpc>
+              <a:spcBef>
+                <a:spcPts val="0"/>
+              </a:spcBef>
+              <a:spcAft>
+                <a:spcPts val="0"/>
+              </a:spcAft>
+              <a:buClr>
+                <a:srgbClr val="2A2742"/>
+              </a:buClr>
+              <a:buSzPts val="1750"/>
+              <a:buFont typeface="Arimo"/>
+              <a:buNone/>
+            </a:pPr>
+            <a:r>
+              <a:rPr b="0" i="0" lang="en-US" sz="1750" u="none" cap="none" strike="noStrike">
+                <a:solidFill>
+                  <a:srgbClr val="2A2742"/>
+                </a:solidFill>
+                <a:latin typeface="Arimo"/>
+                <a:ea typeface="Arimo"/>
+                <a:cs typeface="Arimo"/>
+                <a:sym typeface="Arimo"/>
+              </a:rPr>
+              <a:t>Архитектура позволяет легко добавлять новые категории тестов</a:t>
+            </a:r>
+            <a:endParaRPr b="0" i="0" sz="1750" u="none" cap="none" strike="noStrike"/>
+          </a:p>
+        </p:txBody>
+      </p:sp>
+      <p:pic>
+        <p:nvPicPr>
+          <p:cNvPr id="116" name="Google Shape;116;p5"/>
+          <p:cNvPicPr preferRelativeResize="0"/>
+          <p:nvPr/>
+        </p:nvPicPr>
+        <p:blipFill>
+          <a:blip r:embed="rId3">
+            <a:alphaModFix/>
+          </a:blip>
+          <a:stretch>
+            <a:fillRect/>
+          </a:stretch>
+        </p:blipFill>
+        <p:spPr>
+          <a:xfrm>
+            <a:off x="793798" y="2516461"/>
+            <a:ext cx="453626" cy="452302"/>
+          </a:xfrm>
+          <a:prstGeom prst="rect">
+            <a:avLst/>
+          </a:prstGeom>
+          <a:noFill/>
+          <a:ln>
+            <a:noFill/>
+          </a:ln>
+        </p:spPr>
+      </p:pic>
+      <p:pic>
+        <p:nvPicPr>
+          <p:cNvPr id="117" name="Google Shape;117;p5"/>
+          <p:cNvPicPr preferRelativeResize="0"/>
+          <p:nvPr/>
+        </p:nvPicPr>
+        <p:blipFill>
+          <a:blip r:embed="rId4">
+            <a:alphaModFix/>
+          </a:blip>
+          <a:stretch>
+            <a:fillRect/>
+          </a:stretch>
+        </p:blipFill>
+        <p:spPr>
+          <a:xfrm>
+            <a:off x="7456866" y="2515800"/>
+            <a:ext cx="453625" cy="453625"/>
+          </a:xfrm>
+          <a:prstGeom prst="rect">
+            <a:avLst/>
+          </a:prstGeom>
+          <a:noFill/>
+          <a:ln>
+            <a:noFill/>
+          </a:ln>
+        </p:spPr>
+      </p:pic>
+      <p:pic>
+        <p:nvPicPr>
+          <p:cNvPr id="118" name="Google Shape;118;p5"/>
+          <p:cNvPicPr preferRelativeResize="0"/>
+          <p:nvPr/>
+        </p:nvPicPr>
+        <p:blipFill>
+          <a:blip r:embed="rId5">
+            <a:alphaModFix/>
+          </a:blip>
+          <a:stretch>
+            <a:fillRect/>
+          </a:stretch>
+        </p:blipFill>
+        <p:spPr>
+          <a:xfrm>
+            <a:off x="793800" y="4922744"/>
+            <a:ext cx="453624" cy="453624"/>
+          </a:xfrm>
+          <a:prstGeom prst="rect">
+            <a:avLst/>
+          </a:prstGeom>
+          <a:noFill/>
+          <a:ln>
+            <a:noFill/>
+          </a:ln>
+        </p:spPr>
+      </p:pic>
+      <p:pic>
+        <p:nvPicPr>
+          <p:cNvPr id="119" name="Google Shape;119;p5"/>
+          <p:cNvPicPr preferRelativeResize="0"/>
+          <p:nvPr/>
+        </p:nvPicPr>
+        <p:blipFill>
+          <a:blip r:embed="rId6">
+            <a:alphaModFix/>
+          </a:blip>
+          <a:stretch>
+            <a:fillRect/>
+          </a:stretch>
+        </p:blipFill>
+        <p:spPr>
+          <a:xfrm>
+            <a:off x="7456867" y="4922758"/>
+            <a:ext cx="453624" cy="453624"/>
+          </a:xfrm>
+          <a:prstGeom prst="rect">
+            <a:avLst/>
+          </a:prstGeom>
+          <a:noFill/>
+          <a:ln>
+            <a:noFill/>
+          </a:ln>
+        </p:spPr>
+      </p:pic>
     </p:spTree>
   </p:cSld>
   <p:clrMapOvr>
@@ -6131,7 +7501,7 @@
   <p:cSld>
     <p:spTree>
       <p:nvGrpSpPr>
-        <p:cNvPr id="98" name="Shape 98"/>
+        <p:cNvPr id="124" name="Shape 124"/>
         <p:cNvGrpSpPr/>
         <p:nvPr/>
       </p:nvGrpSpPr>
@@ -6145,14 +7515,14 @@
       </p:grpSpPr>
       <p:sp>
         <p:nvSpPr>
-          <p:cNvPr id="99" name="Google Shape;99;p17"/>
+          <p:cNvPr id="125" name="Google Shape;125;p6"/>
           <p:cNvSpPr/>
           <p:nvPr/>
         </p:nvSpPr>
         <p:spPr>
           <a:xfrm>
-            <a:off x="793790" y="2309574"/>
-            <a:ext cx="5670590" cy="708779"/>
+            <a:off x="793790" y="1258491"/>
+            <a:ext cx="9958507" cy="708779"/>
           </a:xfrm>
           <a:prstGeom prst="rect">
             <a:avLst/>
@@ -6182,7 +7552,7 @@
                 <a:srgbClr val="231971"/>
               </a:buClr>
               <a:buSzPts val="4450"/>
-              <a:buFont typeface="Outfit"/>
+              <a:buFont typeface="Outfit ExtraBold"/>
               <a:buNone/>
             </a:pPr>
             <a:r>
@@ -6190,80 +7560,344 @@
                 <a:solidFill>
                   <a:srgbClr val="231971"/>
                 </a:solidFill>
-                <a:latin typeface="Outfit"/>
-                <a:ea typeface="Outfit"/>
-                <a:cs typeface="Outfit"/>
-                <a:sym typeface="Outfit"/>
+                <a:latin typeface="Outfit ExtraBold"/>
+                <a:ea typeface="Outfit ExtraBold"/>
+                <a:cs typeface="Outfit ExtraBold"/>
+                <a:sym typeface="Outfit ExtraBold"/>
               </a:rPr>
-              <a:t>Аналоги</a:t>
+              <a:t>Экономика: модель Freemium-Ads</a:t>
             </a:r>
             <a:endParaRPr b="0" i="0" sz="4450" u="none" cap="none" strike="noStrike"/>
           </a:p>
         </p:txBody>
       </p:sp>
-      <p:sp>
-        <p:nvSpPr>
-          <p:cNvPr id="100" name="Google Shape;100;p17"/>
+      <p:pic>
+        <p:nvPicPr>
+          <p:cNvPr descr="preencoded.png" id="126" name="Google Shape;126;p6"/>
+          <p:cNvPicPr preferRelativeResize="0"/>
+          <p:nvPr/>
+        </p:nvPicPr>
+        <p:blipFill rotWithShape="1">
+          <a:blip r:embed="rId3">
+            <a:alphaModFix/>
+          </a:blip>
+          <a:srcRect b="0" l="0" r="0" t="0"/>
+          <a:stretch/>
+        </p:blipFill>
+        <p:spPr>
+          <a:xfrm>
+            <a:off x="793790" y="2562582"/>
+            <a:ext cx="6244709" cy="3693438"/>
+          </a:xfrm>
+          <a:prstGeom prst="rect">
+            <a:avLst/>
+          </a:prstGeom>
+          <a:noFill/>
+          <a:ln>
+            <a:noFill/>
+          </a:ln>
+        </p:spPr>
+      </p:pic>
+      <p:sp>
+        <p:nvSpPr>
+          <p:cNvPr id="127" name="Google Shape;127;p6"/>
           <p:cNvSpPr/>
           <p:nvPr/>
         </p:nvSpPr>
         <p:spPr>
           <a:xfrm>
-            <a:off x="793790" y="3471982"/>
-            <a:ext cx="4196358" cy="2448044"/>
-          </a:xfrm>
-          <a:prstGeom prst="roundRect">
-            <a:avLst>
-              <a:gd fmla="val 3892" name="adj"/>
-            </a:avLst>
-          </a:prstGeom>
-          <a:solidFill>
-            <a:srgbClr val="FAFAFA">
-              <a:alpha val="94901"/>
-            </a:srgbClr>
-          </a:solidFill>
-          <a:ln cap="flat" cmpd="sng" w="30475">
-            <a:solidFill>
-              <a:srgbClr val="BDB8DF"/>
-            </a:solidFill>
-            <a:prstDash val="solid"/>
-            <a:round/>
-            <a:headEnd len="sm" w="sm" type="none"/>
-            <a:tailEnd len="sm" w="sm" type="none"/>
-          </a:ln>
-        </p:spPr>
-        <p:txBody>
-          <a:bodyPr anchorCtr="0" anchor="ctr" bIns="91425" lIns="91425" spcFirstLastPara="1" rIns="91425" wrap="square" tIns="91425">
-            <a:noAutofit/>
-          </a:bodyPr>
-          <a:lstStyle/>
-          <a:p>
-            <a:pPr indent="0" lvl="0" marL="0" rtl="0" algn="l">
-              <a:spcBef>
-                <a:spcPts val="0"/>
-              </a:spcBef>
-              <a:spcAft>
-                <a:spcPts val="0"/>
-              </a:spcAft>
+            <a:off x="2729329" y="2950440"/>
+            <a:ext cx="138470" cy="144780"/>
+          </a:xfrm>
+          <a:prstGeom prst="rect">
+            <a:avLst/>
+          </a:prstGeom>
+          <a:noFill/>
+          <a:ln>
+            <a:noFill/>
+          </a:ln>
+        </p:spPr>
+        <p:txBody>
+          <a:bodyPr anchorCtr="0" anchor="t" bIns="30475" lIns="30475" spcFirstLastPara="1" rIns="30475" wrap="square" tIns="30475">
+            <a:noAutofit/>
+          </a:bodyPr>
+          <a:lstStyle/>
+          <a:p>
+            <a:pPr indent="0" lvl="0" marL="0" marR="0" rtl="0" algn="l">
+              <a:lnSpc>
+                <a:spcPct val="100000"/>
+              </a:lnSpc>
+              <a:spcBef>
+                <a:spcPts val="0"/>
+              </a:spcBef>
+              <a:spcAft>
+                <a:spcPts val="0"/>
+              </a:spcAft>
+              <a:buClr>
+                <a:srgbClr val="FFFFFF"/>
+              </a:buClr>
+              <a:buSzPts val="650"/>
+              <a:buFont typeface="Arial"/>
               <a:buNone/>
             </a:pPr>
             <a:r>
-              <a:t/>
+              <a:rPr b="0" i="0" lang="en-US" sz="650" u="none" cap="none" strike="noStrike">
+                <a:solidFill>
+                  <a:srgbClr val="FFFFFF"/>
+                </a:solidFill>
+                <a:latin typeface="Arial"/>
+                <a:ea typeface="Arial"/>
+                <a:cs typeface="Arial"/>
+                <a:sym typeface="Arial"/>
+              </a:rPr>
+              <a:t>3k</a:t>
             </a:r>
-            <a:endParaRPr/>
-          </a:p>
-        </p:txBody>
-      </p:sp>
-      <p:sp>
-        <p:nvSpPr>
-          <p:cNvPr id="101" name="Google Shape;101;p17"/>
+            <a:endParaRPr b="0" i="0" sz="650" u="none" cap="none" strike="noStrike"/>
+          </a:p>
+        </p:txBody>
+      </p:sp>
+      <p:sp>
+        <p:nvSpPr>
+          <p:cNvPr id="128" name="Google Shape;128;p6"/>
           <p:cNvSpPr/>
           <p:nvPr/>
         </p:nvSpPr>
         <p:spPr>
           <a:xfrm>
-            <a:off x="1051084" y="3729276"/>
-            <a:ext cx="3484364" cy="354330"/>
+            <a:off x="2161044" y="3588996"/>
+            <a:ext cx="189667" cy="144780"/>
+          </a:xfrm>
+          <a:prstGeom prst="rect">
+            <a:avLst/>
+          </a:prstGeom>
+          <a:noFill/>
+          <a:ln>
+            <a:noFill/>
+          </a:ln>
+        </p:spPr>
+        <p:txBody>
+          <a:bodyPr anchorCtr="0" anchor="t" bIns="30475" lIns="30475" spcFirstLastPara="1" rIns="30475" wrap="square" tIns="30475">
+            <a:noAutofit/>
+          </a:bodyPr>
+          <a:lstStyle/>
+          <a:p>
+            <a:pPr indent="0" lvl="0" marL="0" marR="0" rtl="0" algn="l">
+              <a:lnSpc>
+                <a:spcPct val="100000"/>
+              </a:lnSpc>
+              <a:spcBef>
+                <a:spcPts val="0"/>
+              </a:spcBef>
+              <a:spcAft>
+                <a:spcPts val="0"/>
+              </a:spcAft>
+              <a:buClr>
+                <a:srgbClr val="000000"/>
+              </a:buClr>
+              <a:buSzPts val="650"/>
+              <a:buFont typeface="Arial"/>
+              <a:buNone/>
+            </a:pPr>
+            <a:r>
+              <a:rPr b="0" i="0" lang="en-US" sz="650" u="none" cap="none" strike="noStrike">
+                <a:solidFill>
+                  <a:srgbClr val="000000"/>
+                </a:solidFill>
+                <a:latin typeface="Arial"/>
+                <a:ea typeface="Arial"/>
+                <a:cs typeface="Arial"/>
+                <a:sym typeface="Arial"/>
+              </a:rPr>
+              <a:t>500</a:t>
+            </a:r>
+            <a:endParaRPr b="0" i="0" sz="650" u="none" cap="none" strike="noStrike"/>
+          </a:p>
+        </p:txBody>
+      </p:sp>
+      <p:sp>
+        <p:nvSpPr>
+          <p:cNvPr id="129" name="Google Shape;129;p6"/>
+          <p:cNvSpPr/>
+          <p:nvPr/>
+        </p:nvSpPr>
+        <p:spPr>
+          <a:xfrm>
+            <a:off x="3353217" y="4227552"/>
+            <a:ext cx="138470" cy="144780"/>
+          </a:xfrm>
+          <a:prstGeom prst="rect">
+            <a:avLst/>
+          </a:prstGeom>
+          <a:noFill/>
+          <a:ln>
+            <a:noFill/>
+          </a:ln>
+        </p:spPr>
+        <p:txBody>
+          <a:bodyPr anchorCtr="0" anchor="t" bIns="30475" lIns="30475" spcFirstLastPara="1" rIns="30475" wrap="square" tIns="30475">
+            <a:noAutofit/>
+          </a:bodyPr>
+          <a:lstStyle/>
+          <a:p>
+            <a:pPr indent="0" lvl="0" marL="0" marR="0" rtl="0" algn="l">
+              <a:lnSpc>
+                <a:spcPct val="100000"/>
+              </a:lnSpc>
+              <a:spcBef>
+                <a:spcPts val="0"/>
+              </a:spcBef>
+              <a:spcAft>
+                <a:spcPts val="0"/>
+              </a:spcAft>
+              <a:buClr>
+                <a:srgbClr val="FFFFFF"/>
+              </a:buClr>
+              <a:buSzPts val="650"/>
+              <a:buFont typeface="Arial"/>
+              <a:buNone/>
+            </a:pPr>
+            <a:r>
+              <a:rPr b="0" i="0" lang="en-US" sz="650" u="none" cap="none" strike="noStrike">
+                <a:solidFill>
+                  <a:srgbClr val="FFFFFF"/>
+                </a:solidFill>
+                <a:latin typeface="Arial"/>
+                <a:ea typeface="Arial"/>
+                <a:cs typeface="Arial"/>
+                <a:sym typeface="Arial"/>
+              </a:rPr>
+              <a:t>5k</a:t>
+            </a:r>
+            <a:endParaRPr b="0" i="0" sz="650" u="none" cap="none" strike="noStrike"/>
+          </a:p>
+        </p:txBody>
+      </p:sp>
+      <p:sp>
+        <p:nvSpPr>
+          <p:cNvPr id="130" name="Google Shape;130;p6"/>
+          <p:cNvSpPr/>
+          <p:nvPr/>
+        </p:nvSpPr>
+        <p:spPr>
+          <a:xfrm>
+            <a:off x="6426518" y="4866108"/>
+            <a:ext cx="186452" cy="144780"/>
+          </a:xfrm>
+          <a:prstGeom prst="rect">
+            <a:avLst/>
+          </a:prstGeom>
+          <a:noFill/>
+          <a:ln>
+            <a:noFill/>
+          </a:ln>
+        </p:spPr>
+        <p:txBody>
+          <a:bodyPr anchorCtr="0" anchor="t" bIns="30475" lIns="30475" spcFirstLastPara="1" rIns="30475" wrap="square" tIns="30475">
+            <a:noAutofit/>
+          </a:bodyPr>
+          <a:lstStyle/>
+          <a:p>
+            <a:pPr indent="0" lvl="0" marL="0" marR="0" rtl="0" algn="l">
+              <a:lnSpc>
+                <a:spcPct val="100000"/>
+              </a:lnSpc>
+              <a:spcBef>
+                <a:spcPts val="0"/>
+              </a:spcBef>
+              <a:spcAft>
+                <a:spcPts val="0"/>
+              </a:spcAft>
+              <a:buClr>
+                <a:srgbClr val="FFFFFF"/>
+              </a:buClr>
+              <a:buSzPts val="650"/>
+              <a:buFont typeface="Arial"/>
+              <a:buNone/>
+            </a:pPr>
+            <a:r>
+              <a:rPr b="0" i="0" lang="en-US" sz="650" u="none" cap="none" strike="noStrike">
+                <a:solidFill>
+                  <a:srgbClr val="FFFFFF"/>
+                </a:solidFill>
+                <a:latin typeface="Arial"/>
+                <a:ea typeface="Arial"/>
+                <a:cs typeface="Arial"/>
+                <a:sym typeface="Arial"/>
+              </a:rPr>
+              <a:t>15k</a:t>
+            </a:r>
+            <a:endParaRPr b="0" i="0" sz="650" u="none" cap="none" strike="noStrike"/>
+          </a:p>
+        </p:txBody>
+      </p:sp>
+      <p:sp>
+        <p:nvSpPr>
+          <p:cNvPr id="131" name="Google Shape;131;p6"/>
+          <p:cNvSpPr/>
+          <p:nvPr/>
+        </p:nvSpPr>
+        <p:spPr>
+          <a:xfrm>
+            <a:off x="4286667" y="5504664"/>
+            <a:ext cx="138470" cy="144780"/>
+          </a:xfrm>
+          <a:prstGeom prst="rect">
+            <a:avLst/>
+          </a:prstGeom>
+          <a:noFill/>
+          <a:ln>
+            <a:noFill/>
+          </a:ln>
+        </p:spPr>
+        <p:txBody>
+          <a:bodyPr anchorCtr="0" anchor="t" bIns="30475" lIns="30475" spcFirstLastPara="1" rIns="30475" wrap="square" tIns="30475">
+            <a:noAutofit/>
+          </a:bodyPr>
+          <a:lstStyle/>
+          <a:p>
+            <a:pPr indent="0" lvl="0" marL="0" marR="0" rtl="0" algn="l">
+              <a:lnSpc>
+                <a:spcPct val="100000"/>
+              </a:lnSpc>
+              <a:spcBef>
+                <a:spcPts val="0"/>
+              </a:spcBef>
+              <a:spcAft>
+                <a:spcPts val="0"/>
+              </a:spcAft>
+              <a:buClr>
+                <a:srgbClr val="000000"/>
+              </a:buClr>
+              <a:buSzPts val="650"/>
+              <a:buFont typeface="Arial"/>
+              <a:buNone/>
+            </a:pPr>
+            <a:r>
+              <a:rPr b="0" i="0" lang="en-US" sz="650" u="none" cap="none" strike="noStrike">
+                <a:solidFill>
+                  <a:srgbClr val="000000"/>
+                </a:solidFill>
+                <a:latin typeface="Arial"/>
+                <a:ea typeface="Arial"/>
+                <a:cs typeface="Arial"/>
+                <a:sym typeface="Arial"/>
+              </a:rPr>
+              <a:t>8k</a:t>
+            </a:r>
+            <a:endParaRPr b="0" i="0" sz="650" u="none" cap="none" strike="noStrike"/>
+          </a:p>
+        </p:txBody>
+      </p:sp>
+      <p:sp>
+        <p:nvSpPr>
+          <p:cNvPr id="132" name="Google Shape;132;p6"/>
+          <p:cNvSpPr/>
+          <p:nvPr/>
+        </p:nvSpPr>
+        <p:spPr>
+          <a:xfrm>
+            <a:off x="7599521" y="2534245"/>
+            <a:ext cx="2835235" cy="354330"/>
           </a:xfrm>
           <a:prstGeom prst="rect">
             <a:avLst/>
@@ -6290,23 +7924,23 @@
                 <a:spcPts val="0"/>
               </a:spcAft>
               <a:buClr>
-                <a:srgbClr val="2A2742"/>
+                <a:srgbClr val="231971"/>
               </a:buClr>
               <a:buSzPts val="2200"/>
-              <a:buFont typeface="Outfit"/>
+              <a:buFont typeface="Outfit ExtraBold"/>
               <a:buNone/>
             </a:pPr>
             <a:r>
               <a:rPr b="1" i="0" lang="en-US" sz="2200" u="none" cap="none" strike="noStrike">
                 <a:solidFill>
-                  <a:srgbClr val="2A2742"/>
+                  <a:srgbClr val="231971"/>
                 </a:solidFill>
-                <a:latin typeface="Outfit"/>
-                <a:ea typeface="Outfit"/>
-                <a:cs typeface="Outfit"/>
-                <a:sym typeface="Outfit"/>
+                <a:latin typeface="Outfit ExtraBold"/>
+                <a:ea typeface="Outfit ExtraBold"/>
+                <a:cs typeface="Outfit ExtraBold"/>
+                <a:sym typeface="Outfit ExtraBold"/>
               </a:rPr>
-              <a:t>Психология.ру и аналоги</a:t>
+              <a:t>Доходы и расходы</a:t>
             </a:r>
             <a:endParaRPr b="0" i="0" sz="2200" u="none" cap="none" strike="noStrike"/>
           </a:p>
@@ -6314,14 +7948,14 @@
       </p:sp>
       <p:sp>
         <p:nvSpPr>
-          <p:cNvPr id="102" name="Google Shape;102;p17"/>
+          <p:cNvPr id="133" name="Google Shape;133;p6"/>
           <p:cNvSpPr/>
           <p:nvPr/>
         </p:nvSpPr>
         <p:spPr>
           <a:xfrm>
-            <a:off x="1051084" y="4219694"/>
-            <a:ext cx="3681770" cy="725805"/>
+            <a:off x="7599521" y="3115389"/>
+            <a:ext cx="6244709" cy="725805"/>
           </a:xfrm>
           <a:prstGeom prst="rect">
             <a:avLst/>
@@ -6354,6 +7988,18 @@
               <a:buFont typeface="Arimo"/>
               <a:buNone/>
             </a:pPr>
+            <a:r>
+              <a:rPr b="1" i="0" lang="en-US" sz="1750" u="none" cap="none" strike="noStrike">
+                <a:solidFill>
+                  <a:srgbClr val="2A2742"/>
+                </a:solidFill>
+                <a:latin typeface="Arimo"/>
+                <a:ea typeface="Arimo"/>
+                <a:cs typeface="Arimo"/>
+                <a:sym typeface="Arimo"/>
+              </a:rPr>
+              <a:t>Расходы:</a:t>
+            </a:r>
             <a:r>
               <a:rPr b="0" i="0" lang="en-US" sz="1750" u="none" cap="none" strike="noStrike">
                 <a:solidFill>
@@ -6364,7 +8010,7 @@
                 <a:cs typeface="Arimo"/>
                 <a:sym typeface="Arimo"/>
               </a:rPr>
-              <a:t>Много контента, но устаревший UX и избыточная реклама.</a:t>
+              <a:t> ~8 500 ₽/мес (хостинг, домен, верификация контента психологами)</a:t>
             </a:r>
             <a:endParaRPr b="0" i="0" sz="1750" u="none" cap="none" strike="noStrike"/>
           </a:p>
@@ -6372,125 +8018,14 @@
       </p:sp>
       <p:sp>
         <p:nvSpPr>
-          <p:cNvPr id="103" name="Google Shape;103;p17"/>
+          <p:cNvPr id="134" name="Google Shape;134;p6"/>
           <p:cNvSpPr/>
           <p:nvPr/>
         </p:nvSpPr>
         <p:spPr>
           <a:xfrm>
-            <a:off x="5216962" y="3471982"/>
-            <a:ext cx="4196358" cy="2448044"/>
-          </a:xfrm>
-          <a:prstGeom prst="roundRect">
-            <a:avLst>
-              <a:gd fmla="val 3892" name="adj"/>
-            </a:avLst>
-          </a:prstGeom>
-          <a:solidFill>
-            <a:srgbClr val="FAFAFA">
-              <a:alpha val="94901"/>
-            </a:srgbClr>
-          </a:solidFill>
-          <a:ln cap="flat" cmpd="sng" w="30475">
-            <a:solidFill>
-              <a:srgbClr val="BDB8DF"/>
-            </a:solidFill>
-            <a:prstDash val="solid"/>
-            <a:round/>
-            <a:headEnd len="sm" w="sm" type="none"/>
-            <a:tailEnd len="sm" w="sm" type="none"/>
-          </a:ln>
-        </p:spPr>
-        <p:txBody>
-          <a:bodyPr anchorCtr="0" anchor="ctr" bIns="91425" lIns="91425" spcFirstLastPara="1" rIns="91425" wrap="square" tIns="91425">
-            <a:noAutofit/>
-          </a:bodyPr>
-          <a:lstStyle/>
-          <a:p>
-            <a:pPr indent="0" lvl="0" marL="0" rtl="0" algn="l">
-              <a:spcBef>
-                <a:spcPts val="0"/>
-              </a:spcBef>
-              <a:spcAft>
-                <a:spcPts val="0"/>
-              </a:spcAft>
-              <a:buNone/>
-            </a:pPr>
-            <a:r>
-              <a:t/>
-            </a:r>
-            <a:endParaRPr/>
-          </a:p>
-        </p:txBody>
-      </p:sp>
-      <p:sp>
-        <p:nvSpPr>
-          <p:cNvPr id="104" name="Google Shape;104;p17"/>
-          <p:cNvSpPr/>
-          <p:nvPr/>
-        </p:nvSpPr>
-        <p:spPr>
-          <a:xfrm>
-            <a:off x="5474256" y="3729276"/>
-            <a:ext cx="3681770" cy="708660"/>
-          </a:xfrm>
-          <a:prstGeom prst="rect">
-            <a:avLst/>
-          </a:prstGeom>
-          <a:noFill/>
-          <a:ln>
-            <a:noFill/>
-          </a:ln>
-        </p:spPr>
-        <p:txBody>
-          <a:bodyPr anchorCtr="0" anchor="t" bIns="0" lIns="0" spcFirstLastPara="1" rIns="0" wrap="square" tIns="0">
-            <a:noAutofit/>
-          </a:bodyPr>
-          <a:lstStyle/>
-          <a:p>
-            <a:pPr indent="0" lvl="0" marL="0" marR="0" rtl="0" algn="l">
-              <a:lnSpc>
-                <a:spcPct val="125000"/>
-              </a:lnSpc>
-              <a:spcBef>
-                <a:spcPts val="0"/>
-              </a:spcBef>
-              <a:spcAft>
-                <a:spcPts val="0"/>
-              </a:spcAft>
-              <a:buClr>
-                <a:srgbClr val="2A2742"/>
-              </a:buClr>
-              <a:buSzPts val="2200"/>
-              <a:buFont typeface="Outfit"/>
-              <a:buNone/>
-            </a:pPr>
-            <a:r>
-              <a:rPr b="1" i="0" lang="en-US" sz="2200" u="none" cap="none" strike="noStrike">
-                <a:solidFill>
-                  <a:srgbClr val="2A2742"/>
-                </a:solidFill>
-                <a:latin typeface="Outfit"/>
-                <a:ea typeface="Outfit"/>
-                <a:cs typeface="Outfit"/>
-                <a:sym typeface="Outfit"/>
-              </a:rPr>
-              <a:t>Psychology Today, Enchroma</a:t>
-            </a:r>
-            <a:endParaRPr b="0" i="0" sz="2200" u="none" cap="none" strike="noStrike"/>
-          </a:p>
-        </p:txBody>
-      </p:sp>
-      <p:sp>
-        <p:nvSpPr>
-          <p:cNvPr id="105" name="Google Shape;105;p17"/>
-          <p:cNvSpPr/>
-          <p:nvPr/>
-        </p:nvSpPr>
-        <p:spPr>
-          <a:xfrm>
-            <a:off x="5474256" y="4574024"/>
-            <a:ext cx="3681770" cy="1088708"/>
+            <a:off x="7599521" y="4045268"/>
+            <a:ext cx="6244709" cy="1088708"/>
           </a:xfrm>
           <a:prstGeom prst="rect">
             <a:avLst/>
@@ -6523,6 +8058,18 @@
               <a:buFont typeface="Arimo"/>
               <a:buNone/>
             </a:pPr>
+            <a:r>
+              <a:rPr b="1" i="0" lang="en-US" sz="1750" u="none" cap="none" strike="noStrike">
+                <a:solidFill>
+                  <a:srgbClr val="2A2742"/>
+                </a:solidFill>
+                <a:latin typeface="Arimo"/>
+                <a:ea typeface="Arimo"/>
+                <a:cs typeface="Arimo"/>
+                <a:sym typeface="Arimo"/>
+              </a:rPr>
+              <a:t>Доходы:</a:t>
+            </a:r>
             <a:r>
               <a:rPr b="0" i="0" lang="en-US" sz="1750" u="none" cap="none" strike="noStrike">
                 <a:solidFill>
@@ -6533,7 +8080,7 @@
                 <a:cs typeface="Arimo"/>
                 <a:sym typeface="Arimo"/>
               </a:rPr>
-              <a:t>Качественные зарубежные сервисы, но часто англоязычные или узкоспециализированные.</a:t>
+              <a:t> баннерная реклама (Google AdSense) — ~15 000 ₽/мес при 10 000 посетителей; CPA-партнёрство с клиниками — ~8 000 ₽/мес</a:t>
             </a:r>
             <a:endParaRPr b="0" i="0" sz="1750" u="none" cap="none" strike="noStrike"/>
           </a:p>
@@ -6541,33 +8088,25 @@
       </p:sp>
       <p:sp>
         <p:nvSpPr>
-          <p:cNvPr id="106" name="Google Shape;106;p17"/>
+          <p:cNvPr id="135" name="Google Shape;135;p6"/>
           <p:cNvSpPr/>
           <p:nvPr/>
         </p:nvSpPr>
         <p:spPr>
           <a:xfrm>
-            <a:off x="9640133" y="3471982"/>
-            <a:ext cx="4196358" cy="2448044"/>
+            <a:off x="7599521" y="5389126"/>
+            <a:ext cx="6244709" cy="1326713"/>
           </a:xfrm>
           <a:prstGeom prst="roundRect">
             <a:avLst>
-              <a:gd fmla="val 3892" name="adj"/>
+              <a:gd fmla="val 7181" name="adj"/>
             </a:avLst>
           </a:prstGeom>
           <a:solidFill>
-            <a:srgbClr val="FAFAFA">
-              <a:alpha val="94901"/>
-            </a:srgbClr>
+            <a:srgbClr val="B6FCB8"/>
           </a:solidFill>
-          <a:ln cap="flat" cmpd="sng" w="30475">
-            <a:solidFill>
-              <a:srgbClr val="BDB8DF"/>
-            </a:solidFill>
-            <a:prstDash val="solid"/>
-            <a:round/>
-            <a:headEnd len="sm" w="sm" type="none"/>
-            <a:tailEnd len="sm" w="sm" type="none"/>
+          <a:ln>
+            <a:noFill/>
           </a:ln>
         </p:spPr>
         <p:txBody>
@@ -6592,74 +8131,43 @@
           </a:p>
         </p:txBody>
       </p:sp>
-      <p:sp>
-        <p:nvSpPr>
-          <p:cNvPr id="107" name="Google Shape;107;p17"/>
+      <p:pic>
+        <p:nvPicPr>
+          <p:cNvPr descr="preencoded.png" id="136" name="Google Shape;136;p6"/>
+          <p:cNvPicPr preferRelativeResize="0"/>
+          <p:nvPr/>
+        </p:nvPicPr>
+        <p:blipFill rotWithShape="1">
+          <a:blip r:embed="rId4">
+            <a:alphaModFix/>
+          </a:blip>
+          <a:srcRect b="0" l="0" r="0" t="0"/>
+          <a:stretch/>
+        </p:blipFill>
+        <p:spPr>
+          <a:xfrm>
+            <a:off x="7826335" y="5733217"/>
+            <a:ext cx="283488" cy="226814"/>
+          </a:xfrm>
+          <a:prstGeom prst="rect">
+            <a:avLst/>
+          </a:prstGeom>
+          <a:noFill/>
+          <a:ln>
+            <a:noFill/>
+          </a:ln>
+        </p:spPr>
+      </p:pic>
+      <p:sp>
+        <p:nvSpPr>
+          <p:cNvPr id="137" name="Google Shape;137;p6"/>
           <p:cNvSpPr/>
           <p:nvPr/>
         </p:nvSpPr>
         <p:spPr>
           <a:xfrm>
-            <a:off x="9897427" y="3729276"/>
-            <a:ext cx="3433405" cy="354330"/>
-          </a:xfrm>
-          <a:prstGeom prst="rect">
-            <a:avLst/>
-          </a:prstGeom>
-          <a:noFill/>
-          <a:ln>
-            <a:noFill/>
-          </a:ln>
-        </p:spPr>
-        <p:txBody>
-          <a:bodyPr anchorCtr="0" anchor="t" bIns="0" lIns="0" spcFirstLastPara="1" rIns="0" wrap="square" tIns="0">
-            <a:noAutofit/>
-          </a:bodyPr>
-          <a:lstStyle/>
-          <a:p>
-            <a:pPr indent="0" lvl="0" marL="0" marR="0" rtl="0" algn="l">
-              <a:lnSpc>
-                <a:spcPct val="125000"/>
-              </a:lnSpc>
-              <a:spcBef>
-                <a:spcPts val="0"/>
-              </a:spcBef>
-              <a:spcAft>
-                <a:spcPts val="0"/>
-              </a:spcAft>
-              <a:buClr>
-                <a:srgbClr val="2A2742"/>
-              </a:buClr>
-              <a:buSzPts val="2200"/>
-              <a:buFont typeface="Outfit"/>
-              <a:buNone/>
-            </a:pPr>
-            <a:r>
-              <a:rPr b="1" i="0" lang="en-US" sz="2200" u="none" cap="none" strike="noStrike">
-                <a:solidFill>
-                  <a:srgbClr val="2A2742"/>
-                </a:solidFill>
-                <a:latin typeface="Outfit"/>
-                <a:ea typeface="Outfit"/>
-                <a:cs typeface="Outfit"/>
-                <a:sym typeface="Outfit"/>
-              </a:rPr>
-              <a:t>Мобильные приложения</a:t>
-            </a:r>
-            <a:endParaRPr b="0" i="0" sz="2200" u="none" cap="none" strike="noStrike"/>
-          </a:p>
-        </p:txBody>
-      </p:sp>
-      <p:sp>
-        <p:nvSpPr>
-          <p:cNvPr id="108" name="Google Shape;108;p17"/>
-          <p:cNvSpPr/>
-          <p:nvPr/>
-        </p:nvSpPr>
-        <p:spPr>
-          <a:xfrm>
-            <a:off x="9897427" y="4219694"/>
-            <a:ext cx="3681770" cy="1088708"/>
+            <a:off x="8336637" y="5672614"/>
+            <a:ext cx="5280779" cy="725805"/>
           </a:xfrm>
           <a:prstGeom prst="rect">
             <a:avLst/>
@@ -6686,7 +8194,7 @@
                 <a:spcPts val="0"/>
               </a:spcAft>
               <a:buClr>
-                <a:srgbClr val="2A2742"/>
+                <a:srgbClr val="000000"/>
               </a:buClr>
               <a:buSzPts val="1750"/>
               <a:buFont typeface="Arimo"/>
@@ -6695,14 +8203,14 @@
             <a:r>
               <a:rPr b="0" i="0" lang="en-US" sz="1750" u="none" cap="none" strike="noStrike">
                 <a:solidFill>
-                  <a:srgbClr val="2A2742"/>
+                  <a:srgbClr val="000000"/>
                 </a:solidFill>
                 <a:latin typeface="Arimo"/>
                 <a:ea typeface="Arimo"/>
                 <a:cs typeface="Arimo"/>
                 <a:sym typeface="Arimo"/>
               </a:rPr>
-              <a:t>Большинство платные по подписке и требуют обязательной установки.</a:t>
+              <a:t>Выход в плюс: ~3–4 месяца после запуска при органическом росте аудитории</a:t>
             </a:r>
             <a:endParaRPr b="0" i="0" sz="1750" u="none" cap="none" strike="noStrike"/>
           </a:p>
@@ -6721,7 +8229,7 @@
   <p:cSld>
     <p:spTree>
       <p:nvGrpSpPr>
-        <p:cNvPr id="113" name="Shape 113"/>
+        <p:cNvPr id="142" name="Shape 142"/>
         <p:cNvGrpSpPr/>
         <p:nvPr/>
       </p:nvGrpSpPr>
@@ -6735,14 +8243,14 @@
       </p:grpSpPr>
       <p:sp>
         <p:nvSpPr>
-          <p:cNvPr id="114" name="Google Shape;114;p18"/>
+          <p:cNvPr id="143" name="Google Shape;143;p7"/>
           <p:cNvSpPr/>
           <p:nvPr/>
         </p:nvSpPr>
         <p:spPr>
           <a:xfrm>
-            <a:off x="793790" y="827842"/>
-            <a:ext cx="5670590" cy="708779"/>
+            <a:off x="793790" y="623768"/>
+            <a:ext cx="5103614" cy="637937"/>
           </a:xfrm>
           <a:prstGeom prst="rect">
             <a:avLst/>
@@ -6760,7 +8268,7 @@
           <a:p>
             <a:pPr indent="0" lvl="0" marL="0" marR="0" rtl="0" algn="l">
               <a:lnSpc>
-                <a:spcPct val="124719"/>
+                <a:spcPct val="125000"/>
               </a:lnSpc>
               <a:spcBef>
                 <a:spcPts val="0"/>
@@ -6771,125 +8279,29 @@
               <a:buClr>
                 <a:srgbClr val="231971"/>
               </a:buClr>
-              <a:buSzPts val="4450"/>
-              <a:buFont typeface="Outfit"/>
+              <a:buSzPts val="4000"/>
+              <a:buFont typeface="Outfit ExtraBold"/>
               <a:buNone/>
             </a:pPr>
             <a:r>
-              <a:rPr b="1" i="0" lang="en-US" sz="4450" u="none" cap="none" strike="noStrike">
+              <a:rPr b="1" i="0" lang="en-US" sz="4000" u="none" cap="none" strike="noStrike">
                 <a:solidFill>
                   <a:srgbClr val="231971"/>
                 </a:solidFill>
-                <a:latin typeface="Outfit"/>
-                <a:ea typeface="Outfit"/>
-                <a:cs typeface="Outfit"/>
-                <a:sym typeface="Outfit"/>
+                <a:latin typeface="Outfit ExtraBold"/>
+                <a:ea typeface="Outfit ExtraBold"/>
+                <a:cs typeface="Outfit ExtraBold"/>
+                <a:sym typeface="Outfit ExtraBold"/>
               </a:rPr>
-              <a:t>Моё преимущество</a:t>
+              <a:t>Финансирование</a:t>
             </a:r>
-            <a:endParaRPr b="0" i="0" sz="4450" u="none" cap="none" strike="noStrike"/>
-          </a:p>
-        </p:txBody>
-      </p:sp>
-      <p:sp>
-        <p:nvSpPr>
-          <p:cNvPr id="115" name="Google Shape;115;p18"/>
-          <p:cNvSpPr/>
-          <p:nvPr/>
-        </p:nvSpPr>
-        <p:spPr>
-          <a:xfrm>
-            <a:off x="793790" y="1990249"/>
-            <a:ext cx="6407944" cy="2592348"/>
-          </a:xfrm>
-          <a:prstGeom prst="roundRect">
-            <a:avLst>
-              <a:gd fmla="val 3675" name="adj"/>
-            </a:avLst>
-          </a:prstGeom>
-          <a:solidFill>
-            <a:srgbClr val="E9E6FA"/>
-          </a:solidFill>
-          <a:ln cap="flat" cmpd="sng" w="9525">
-            <a:solidFill>
-              <a:srgbClr val="BDB8DF"/>
-            </a:solidFill>
-            <a:prstDash val="solid"/>
-            <a:round/>
-            <a:headEnd len="sm" w="sm" type="none"/>
-            <a:tailEnd len="sm" w="sm" type="none"/>
-          </a:ln>
-        </p:spPr>
-        <p:txBody>
-          <a:bodyPr anchorCtr="0" anchor="ctr" bIns="91425" lIns="91425" spcFirstLastPara="1" rIns="91425" wrap="square" tIns="91425">
-            <a:noAutofit/>
-          </a:bodyPr>
-          <a:lstStyle/>
-          <a:p>
-            <a:pPr indent="0" lvl="0" marL="0" rtl="0" algn="l">
-              <a:spcBef>
-                <a:spcPts val="0"/>
-              </a:spcBef>
-              <a:spcAft>
-                <a:spcPts val="0"/>
-              </a:spcAft>
-              <a:buNone/>
-            </a:pPr>
-            <a:r>
-              <a:t/>
-            </a:r>
-            <a:endParaRPr/>
-          </a:p>
-        </p:txBody>
-      </p:sp>
-      <p:sp>
-        <p:nvSpPr>
-          <p:cNvPr id="116" name="Google Shape;116;p18"/>
-          <p:cNvSpPr/>
-          <p:nvPr/>
-        </p:nvSpPr>
-        <p:spPr>
-          <a:xfrm>
-            <a:off x="1028224" y="2224683"/>
-            <a:ext cx="680442" cy="680442"/>
-          </a:xfrm>
-          <a:prstGeom prst="roundRect">
-            <a:avLst>
-              <a:gd fmla="val 13436980" name="adj"/>
-            </a:avLst>
-          </a:prstGeom>
-          <a:solidFill>
-            <a:srgbClr val="5E4CE6"/>
-          </a:solidFill>
-          <a:ln>
-            <a:noFill/>
-          </a:ln>
-        </p:spPr>
-        <p:txBody>
-          <a:bodyPr anchorCtr="0" anchor="ctr" bIns="91425" lIns="91425" spcFirstLastPara="1" rIns="91425" wrap="square" tIns="91425">
-            <a:noAutofit/>
-          </a:bodyPr>
-          <a:lstStyle/>
-          <a:p>
-            <a:pPr indent="0" lvl="0" marL="0" rtl="0" algn="l">
-              <a:spcBef>
-                <a:spcPts val="0"/>
-              </a:spcBef>
-              <a:spcAft>
-                <a:spcPts val="0"/>
-              </a:spcAft>
-              <a:buNone/>
-            </a:pPr>
-            <a:r>
-              <a:t/>
-            </a:r>
-            <a:endParaRPr/>
+            <a:endParaRPr b="0" i="0" sz="4000" u="none" cap="none" strike="noStrike"/>
           </a:p>
         </p:txBody>
       </p:sp>
       <p:pic>
         <p:nvPicPr>
-          <p:cNvPr descr="preencoded.png" id="117" name="Google Shape;117;p18"/>
+          <p:cNvPr descr="preencoded.png" id="144" name="Google Shape;144;p7"/>
           <p:cNvPicPr preferRelativeResize="0"/>
           <p:nvPr/>
         </p:nvPicPr>
@@ -6902,8 +8314,8 @@
         </p:blipFill>
         <p:spPr>
           <a:xfrm>
-            <a:off x="1215390" y="2411730"/>
-            <a:ext cx="306110" cy="306110"/>
+            <a:off x="1445895" y="1629132"/>
+            <a:ext cx="11738491" cy="5152906"/>
           </a:xfrm>
           <a:prstGeom prst="rect">
             <a:avLst/>
@@ -6916,14 +8328,14 @@
       </p:pic>
       <p:sp>
         <p:nvSpPr>
-          <p:cNvPr id="118" name="Google Shape;118;p18"/>
+          <p:cNvPr id="145" name="Google Shape;145;p7"/>
           <p:cNvSpPr/>
           <p:nvPr/>
         </p:nvSpPr>
         <p:spPr>
           <a:xfrm>
-            <a:off x="1028224" y="3131939"/>
-            <a:ext cx="3267313" cy="354330"/>
+            <a:off x="3437169" y="5083565"/>
+            <a:ext cx="2057658" cy="317976"/>
           </a:xfrm>
           <a:prstGeom prst="rect">
             <a:avLst/>
@@ -6939,7 +8351,7 @@
           </a:bodyPr>
           <a:lstStyle/>
           <a:p>
-            <a:pPr indent="0" lvl="0" marL="0" marR="0" rtl="0" algn="l">
+            <a:pPr indent="0" lvl="0" marL="0" marR="0" rtl="0" algn="ctr">
               <a:lnSpc>
                 <a:spcPct val="125000"/>
               </a:lnSpc>
@@ -6950,38 +8362,38 @@
                 <a:spcPts val="0"/>
               </a:spcAft>
               <a:buClr>
-                <a:srgbClr val="2A2742"/>
+                <a:srgbClr val="231971"/>
               </a:buClr>
-              <a:buSzPts val="2200"/>
-              <a:buFont typeface="Outfit"/>
+              <a:buSzPts val="2000"/>
+              <a:buFont typeface="Outfit ExtraBold"/>
               <a:buNone/>
             </a:pPr>
             <a:r>
-              <a:rPr b="1" i="0" lang="en-US" sz="2200" u="none" cap="none" strike="noStrike">
+              <a:rPr b="1" i="0" lang="en-US" sz="2000" u="none" cap="none" strike="noStrike">
                 <a:solidFill>
-                  <a:srgbClr val="2A2742"/>
+                  <a:srgbClr val="231971"/>
                 </a:solidFill>
-                <a:latin typeface="Outfit"/>
-                <a:ea typeface="Outfit"/>
-                <a:cs typeface="Outfit"/>
-                <a:sym typeface="Outfit"/>
+                <a:latin typeface="Outfit ExtraBold"/>
+                <a:ea typeface="Outfit ExtraBold"/>
+                <a:cs typeface="Outfit ExtraBold"/>
+                <a:sym typeface="Outfit ExtraBold"/>
               </a:rPr>
-              <a:t>Бесплатно и прозрачно</a:t>
+              <a:t>Старт</a:t>
             </a:r>
-            <a:endParaRPr b="0" i="0" sz="2200" u="none" cap="none" strike="noStrike"/>
-          </a:p>
-        </p:txBody>
-      </p:sp>
-      <p:sp>
-        <p:nvSpPr>
-          <p:cNvPr id="119" name="Google Shape;119;p18"/>
+            <a:endParaRPr b="0" i="0" sz="2000" u="none" cap="none" strike="noStrike"/>
+          </a:p>
+        </p:txBody>
+      </p:sp>
+      <p:sp>
+        <p:nvSpPr>
+          <p:cNvPr id="146" name="Google Shape;146;p7"/>
           <p:cNvSpPr/>
           <p:nvPr/>
         </p:nvSpPr>
         <p:spPr>
           <a:xfrm>
-            <a:off x="1028224" y="3622358"/>
-            <a:ext cx="5939076" cy="362903"/>
+            <a:off x="3437169" y="5491988"/>
+            <a:ext cx="2057658" cy="724985"/>
           </a:xfrm>
           <a:prstGeom prst="rect">
             <a:avLst/>
@@ -6997,9 +8409,9 @@
           </a:bodyPr>
           <a:lstStyle/>
           <a:p>
-            <a:pPr indent="0" lvl="0" marL="0" marR="0" rtl="0" algn="l">
+            <a:pPr indent="0" lvl="0" marL="0" marR="0" rtl="0" algn="ctr">
               <a:lnSpc>
-                <a:spcPct val="162857"/>
+                <a:spcPct val="118750"/>
               </a:lnSpc>
               <a:spcBef>
                 <a:spcPts val="0"/>
@@ -7010,12 +8422,12 @@
               <a:buClr>
                 <a:srgbClr val="2A2742"/>
               </a:buClr>
-              <a:buSzPts val="1750"/>
+              <a:buSzPts val="1600"/>
               <a:buFont typeface="Arimo"/>
               <a:buNone/>
             </a:pPr>
             <a:r>
-              <a:rPr b="0" i="0" lang="en-US" sz="1750" u="none" cap="none" strike="noStrike">
+              <a:rPr b="0" i="0" lang="en-US" sz="1600" u="none" cap="none" strike="noStrike">
                 <a:solidFill>
                   <a:srgbClr val="2A2742"/>
                 </a:solidFill>
@@ -7024,145 +8436,22 @@
                 <a:cs typeface="Arimo"/>
                 <a:sym typeface="Arimo"/>
               </a:rPr>
-              <a:t>Полный результат сразу, без скрытых платежей.</a:t>
+              <a:t>Собственные ресурсы на разработку</a:t>
             </a:r>
-            <a:endParaRPr b="0" i="0" sz="1750" u="none" cap="none" strike="noStrike"/>
-          </a:p>
-        </p:txBody>
-      </p:sp>
-      <p:sp>
-        <p:nvSpPr>
-          <p:cNvPr id="120" name="Google Shape;120;p18"/>
+            <a:endParaRPr b="0" i="0" sz="1600" u="none" cap="none" strike="noStrike"/>
+          </a:p>
+        </p:txBody>
+      </p:sp>
+      <p:sp>
+        <p:nvSpPr>
+          <p:cNvPr id="147" name="Google Shape;147;p7"/>
           <p:cNvSpPr/>
           <p:nvPr/>
         </p:nvSpPr>
         <p:spPr>
           <a:xfrm>
-            <a:off x="7428548" y="1990249"/>
-            <a:ext cx="6408063" cy="2592348"/>
-          </a:xfrm>
-          <a:prstGeom prst="roundRect">
-            <a:avLst>
-              <a:gd fmla="val 3675" name="adj"/>
-            </a:avLst>
-          </a:prstGeom>
-          <a:solidFill>
-            <a:srgbClr val="E9E6FA"/>
-          </a:solidFill>
-          <a:ln cap="flat" cmpd="sng" w="9525">
-            <a:solidFill>
-              <a:srgbClr val="BDB8DF"/>
-            </a:solidFill>
-            <a:prstDash val="solid"/>
-            <a:round/>
-            <a:headEnd len="sm" w="sm" type="none"/>
-            <a:tailEnd len="sm" w="sm" type="none"/>
-          </a:ln>
-        </p:spPr>
-        <p:txBody>
-          <a:bodyPr anchorCtr="0" anchor="ctr" bIns="91425" lIns="91425" spcFirstLastPara="1" rIns="91425" wrap="square" tIns="91425">
-            <a:noAutofit/>
-          </a:bodyPr>
-          <a:lstStyle/>
-          <a:p>
-            <a:pPr indent="0" lvl="0" marL="0" rtl="0" algn="l">
-              <a:spcBef>
-                <a:spcPts val="0"/>
-              </a:spcBef>
-              <a:spcAft>
-                <a:spcPts val="0"/>
-              </a:spcAft>
-              <a:buNone/>
-            </a:pPr>
-            <a:r>
-              <a:t/>
-            </a:r>
-            <a:endParaRPr/>
-          </a:p>
-        </p:txBody>
-      </p:sp>
-      <p:sp>
-        <p:nvSpPr>
-          <p:cNvPr id="121" name="Google Shape;121;p18"/>
-          <p:cNvSpPr/>
-          <p:nvPr/>
-        </p:nvSpPr>
-        <p:spPr>
-          <a:xfrm>
-            <a:off x="7662982" y="2224683"/>
-            <a:ext cx="680442" cy="680442"/>
-          </a:xfrm>
-          <a:prstGeom prst="roundRect">
-            <a:avLst>
-              <a:gd fmla="val 13436980" name="adj"/>
-            </a:avLst>
-          </a:prstGeom>
-          <a:solidFill>
-            <a:srgbClr val="5E4CE6"/>
-          </a:solidFill>
-          <a:ln>
-            <a:noFill/>
-          </a:ln>
-        </p:spPr>
-        <p:txBody>
-          <a:bodyPr anchorCtr="0" anchor="ctr" bIns="91425" lIns="91425" spcFirstLastPara="1" rIns="91425" wrap="square" tIns="91425">
-            <a:noAutofit/>
-          </a:bodyPr>
-          <a:lstStyle/>
-          <a:p>
-            <a:pPr indent="0" lvl="0" marL="0" rtl="0" algn="l">
-              <a:spcBef>
-                <a:spcPts val="0"/>
-              </a:spcBef>
-              <a:spcAft>
-                <a:spcPts val="0"/>
-              </a:spcAft>
-              <a:buNone/>
-            </a:pPr>
-            <a:r>
-              <a:t/>
-            </a:r>
-            <a:endParaRPr/>
-          </a:p>
-        </p:txBody>
-      </p:sp>
-      <p:pic>
-        <p:nvPicPr>
-          <p:cNvPr descr="preencoded.png" id="122" name="Google Shape;122;p18"/>
-          <p:cNvPicPr preferRelativeResize="0"/>
-          <p:nvPr/>
-        </p:nvPicPr>
-        <p:blipFill rotWithShape="1">
-          <a:blip r:embed="rId4">
-            <a:alphaModFix/>
-          </a:blip>
-          <a:srcRect b="0" l="0" r="0" t="0"/>
-          <a:stretch/>
-        </p:blipFill>
-        <p:spPr>
-          <a:xfrm>
-            <a:off x="7850148" y="2411730"/>
-            <a:ext cx="306110" cy="306110"/>
-          </a:xfrm>
-          <a:prstGeom prst="rect">
-            <a:avLst/>
-          </a:prstGeom>
-          <a:noFill/>
-          <a:ln>
-            <a:noFill/>
-          </a:ln>
-        </p:spPr>
-      </p:pic>
-      <p:sp>
-        <p:nvSpPr>
-          <p:cNvPr id="123" name="Google Shape;123;p18"/>
-          <p:cNvSpPr/>
-          <p:nvPr/>
-        </p:nvSpPr>
-        <p:spPr>
-          <a:xfrm>
-            <a:off x="7662982" y="3131939"/>
-            <a:ext cx="2835235" cy="354330"/>
+            <a:off x="9214440" y="5246086"/>
+            <a:ext cx="2057658" cy="317976"/>
           </a:xfrm>
           <a:prstGeom prst="rect">
             <a:avLst/>
@@ -7178,7 +8467,7 @@
           </a:bodyPr>
           <a:lstStyle/>
           <a:p>
-            <a:pPr indent="0" lvl="0" marL="0" marR="0" rtl="0" algn="l">
+            <a:pPr indent="0" lvl="0" marL="0" marR="0" rtl="0" algn="ctr">
               <a:lnSpc>
                 <a:spcPct val="125000"/>
               </a:lnSpc>
@@ -7189,38 +8478,38 @@
                 <a:spcPts val="0"/>
               </a:spcAft>
               <a:buClr>
-                <a:srgbClr val="2A2742"/>
+                <a:srgbClr val="231971"/>
               </a:buClr>
-              <a:buSzPts val="2200"/>
-              <a:buFont typeface="Outfit"/>
+              <a:buSzPts val="2000"/>
+              <a:buFont typeface="Outfit ExtraBold"/>
               <a:buNone/>
             </a:pPr>
             <a:r>
-              <a:rPr b="1" i="0" lang="en-US" sz="2200" u="none" cap="none" strike="noStrike">
+              <a:rPr b="1" i="0" lang="en-US" sz="2000" u="none" cap="none" strike="noStrike">
                 <a:solidFill>
-                  <a:srgbClr val="2A2742"/>
+                  <a:srgbClr val="231971"/>
                 </a:solidFill>
-                <a:latin typeface="Outfit"/>
-                <a:ea typeface="Outfit"/>
-                <a:cs typeface="Outfit"/>
-                <a:sym typeface="Outfit"/>
+                <a:latin typeface="Outfit ExtraBold"/>
+                <a:ea typeface="Outfit ExtraBold"/>
+                <a:cs typeface="Outfit ExtraBold"/>
+                <a:sym typeface="Outfit ExtraBold"/>
               </a:rPr>
-              <a:t>Анонимность</a:t>
+              <a:t>Масштаб</a:t>
             </a:r>
-            <a:endParaRPr b="0" i="0" sz="2200" u="none" cap="none" strike="noStrike"/>
-          </a:p>
-        </p:txBody>
-      </p:sp>
-      <p:sp>
-        <p:nvSpPr>
-          <p:cNvPr id="124" name="Google Shape;124;p18"/>
+            <a:endParaRPr b="0" i="0" sz="2000" u="none" cap="none" strike="noStrike"/>
+          </a:p>
+        </p:txBody>
+      </p:sp>
+      <p:sp>
+        <p:nvSpPr>
+          <p:cNvPr id="148" name="Google Shape;148;p7"/>
           <p:cNvSpPr/>
           <p:nvPr/>
         </p:nvSpPr>
         <p:spPr>
           <a:xfrm>
-            <a:off x="7662982" y="3622358"/>
-            <a:ext cx="5939195" cy="725805"/>
+            <a:off x="9214440" y="5654508"/>
+            <a:ext cx="2057658" cy="483324"/>
           </a:xfrm>
           <a:prstGeom prst="rect">
             <a:avLst/>
@@ -7236,9 +8525,9 @@
           </a:bodyPr>
           <a:lstStyle/>
           <a:p>
-            <a:pPr indent="0" lvl="0" marL="0" marR="0" rtl="0" algn="l">
+            <a:pPr indent="0" lvl="0" marL="0" marR="0" rtl="0" algn="ctr">
               <a:lnSpc>
-                <a:spcPct val="162857"/>
+                <a:spcPct val="118750"/>
               </a:lnSpc>
               <a:spcBef>
                 <a:spcPts val="0"/>
@@ -7249,12 +8538,12 @@
               <a:buClr>
                 <a:srgbClr val="2A2742"/>
               </a:buClr>
-              <a:buSzPts val="1750"/>
+              <a:buSzPts val="1600"/>
               <a:buFont typeface="Arimo"/>
               <a:buNone/>
             </a:pPr>
             <a:r>
-              <a:rPr b="0" i="0" lang="en-US" sz="1750" u="none" cap="none" strike="noStrike">
+              <a:rPr b="0" i="0" lang="en-US" sz="1600" u="none" cap="none" strike="noStrike">
                 <a:solidFill>
                   <a:srgbClr val="2A2742"/>
                 </a:solidFill>
@@ -7263,145 +8552,22 @@
                 <a:cs typeface="Arimo"/>
                 <a:sym typeface="Arimo"/>
               </a:rPr>
-              <a:t>Диагностика без регистрации — критично для психологических тестов.</a:t>
+              <a:t>Частные инвестиции для расширения</a:t>
             </a:r>
-            <a:endParaRPr b="0" i="0" sz="1750" u="none" cap="none" strike="noStrike"/>
-          </a:p>
-        </p:txBody>
-      </p:sp>
-      <p:sp>
-        <p:nvSpPr>
-          <p:cNvPr id="125" name="Google Shape;125;p18"/>
+            <a:endParaRPr b="0" i="0" sz="1600" u="none" cap="none" strike="noStrike"/>
+          </a:p>
+        </p:txBody>
+      </p:sp>
+      <p:sp>
+        <p:nvSpPr>
+          <p:cNvPr id="149" name="Google Shape;149;p7"/>
           <p:cNvSpPr/>
           <p:nvPr/>
         </p:nvSpPr>
         <p:spPr>
           <a:xfrm>
-            <a:off x="793790" y="4809411"/>
-            <a:ext cx="6407944" cy="2592348"/>
-          </a:xfrm>
-          <a:prstGeom prst="roundRect">
-            <a:avLst>
-              <a:gd fmla="val 3675" name="adj"/>
-            </a:avLst>
-          </a:prstGeom>
-          <a:solidFill>
-            <a:srgbClr val="E9E6FA"/>
-          </a:solidFill>
-          <a:ln cap="flat" cmpd="sng" w="9525">
-            <a:solidFill>
-              <a:srgbClr val="BDB8DF"/>
-            </a:solidFill>
-            <a:prstDash val="solid"/>
-            <a:round/>
-            <a:headEnd len="sm" w="sm" type="none"/>
-            <a:tailEnd len="sm" w="sm" type="none"/>
-          </a:ln>
-        </p:spPr>
-        <p:txBody>
-          <a:bodyPr anchorCtr="0" anchor="ctr" bIns="91425" lIns="91425" spcFirstLastPara="1" rIns="91425" wrap="square" tIns="91425">
-            <a:noAutofit/>
-          </a:bodyPr>
-          <a:lstStyle/>
-          <a:p>
-            <a:pPr indent="0" lvl="0" marL="0" rtl="0" algn="l">
-              <a:spcBef>
-                <a:spcPts val="0"/>
-              </a:spcBef>
-              <a:spcAft>
-                <a:spcPts val="0"/>
-              </a:spcAft>
-              <a:buNone/>
-            </a:pPr>
-            <a:r>
-              <a:t/>
-            </a:r>
-            <a:endParaRPr/>
-          </a:p>
-        </p:txBody>
-      </p:sp>
-      <p:sp>
-        <p:nvSpPr>
-          <p:cNvPr id="126" name="Google Shape;126;p18"/>
-          <p:cNvSpPr/>
-          <p:nvPr/>
-        </p:nvSpPr>
-        <p:spPr>
-          <a:xfrm>
-            <a:off x="1028224" y="5043845"/>
-            <a:ext cx="680442" cy="680442"/>
-          </a:xfrm>
-          <a:prstGeom prst="roundRect">
-            <a:avLst>
-              <a:gd fmla="val 13436980" name="adj"/>
-            </a:avLst>
-          </a:prstGeom>
-          <a:solidFill>
-            <a:srgbClr val="5E4CE6"/>
-          </a:solidFill>
-          <a:ln>
-            <a:noFill/>
-          </a:ln>
-        </p:spPr>
-        <p:txBody>
-          <a:bodyPr anchorCtr="0" anchor="ctr" bIns="91425" lIns="91425" spcFirstLastPara="1" rIns="91425" wrap="square" tIns="91425">
-            <a:noAutofit/>
-          </a:bodyPr>
-          <a:lstStyle/>
-          <a:p>
-            <a:pPr indent="0" lvl="0" marL="0" rtl="0" algn="l">
-              <a:spcBef>
-                <a:spcPts val="0"/>
-              </a:spcBef>
-              <a:spcAft>
-                <a:spcPts val="0"/>
-              </a:spcAft>
-              <a:buNone/>
-            </a:pPr>
-            <a:r>
-              <a:t/>
-            </a:r>
-            <a:endParaRPr/>
-          </a:p>
-        </p:txBody>
-      </p:sp>
-      <p:pic>
-        <p:nvPicPr>
-          <p:cNvPr descr="preencoded.png" id="127" name="Google Shape;127;p18"/>
-          <p:cNvPicPr preferRelativeResize="0"/>
-          <p:nvPr/>
-        </p:nvPicPr>
-        <p:blipFill rotWithShape="1">
-          <a:blip r:embed="rId5">
-            <a:alphaModFix/>
-          </a:blip>
-          <a:srcRect b="0" l="0" r="0" t="0"/>
-          <a:stretch/>
-        </p:blipFill>
-        <p:spPr>
-          <a:xfrm>
-            <a:off x="1215390" y="5230892"/>
-            <a:ext cx="306110" cy="306110"/>
-          </a:xfrm>
-          <a:prstGeom prst="rect">
-            <a:avLst/>
-          </a:prstGeom>
-          <a:noFill/>
-          <a:ln>
-            <a:noFill/>
-          </a:ln>
-        </p:spPr>
-      </p:pic>
-      <p:sp>
-        <p:nvSpPr>
-          <p:cNvPr id="128" name="Google Shape;128;p18"/>
-          <p:cNvSpPr/>
-          <p:nvPr/>
-        </p:nvSpPr>
-        <p:spPr>
-          <a:xfrm>
-            <a:off x="1028224" y="5951101"/>
-            <a:ext cx="2835235" cy="354330"/>
+            <a:off x="6342763" y="2169491"/>
+            <a:ext cx="2057658" cy="317976"/>
           </a:xfrm>
           <a:prstGeom prst="rect">
             <a:avLst/>
@@ -7417,7 +8583,7 @@
           </a:bodyPr>
           <a:lstStyle/>
           <a:p>
-            <a:pPr indent="0" lvl="0" marL="0" marR="0" rtl="0" algn="l">
+            <a:pPr indent="0" lvl="0" marL="0" marR="0" rtl="0" algn="ctr">
               <a:lnSpc>
                 <a:spcPct val="125000"/>
               </a:lnSpc>
@@ -7428,38 +8594,38 @@
                 <a:spcPts val="0"/>
               </a:spcAft>
               <a:buClr>
-                <a:srgbClr val="2A2742"/>
+                <a:srgbClr val="231971"/>
               </a:buClr>
-              <a:buSzPts val="2200"/>
-              <a:buFont typeface="Outfit"/>
+              <a:buSzPts val="2000"/>
+              <a:buFont typeface="Outfit ExtraBold"/>
               <a:buNone/>
             </a:pPr>
             <a:r>
-              <a:rPr b="1" i="0" lang="en-US" sz="2200" u="none" cap="none" strike="noStrike">
+              <a:rPr b="1" i="0" lang="en-US" sz="2000" u="none" cap="none" strike="noStrike">
                 <a:solidFill>
-                  <a:srgbClr val="2A2742"/>
+                  <a:srgbClr val="231971"/>
                 </a:solidFill>
-                <a:latin typeface="Outfit"/>
-                <a:ea typeface="Outfit"/>
-                <a:cs typeface="Outfit"/>
-                <a:sym typeface="Outfit"/>
+                <a:latin typeface="Outfit ExtraBold"/>
+                <a:ea typeface="Outfit ExtraBold"/>
+                <a:cs typeface="Outfit ExtraBold"/>
+                <a:sym typeface="Outfit ExtraBold"/>
               </a:rPr>
-              <a:t>Современный стек</a:t>
+              <a:t>Рост</a:t>
             </a:r>
-            <a:endParaRPr b="0" i="0" sz="2200" u="none" cap="none" strike="noStrike"/>
-          </a:p>
-        </p:txBody>
-      </p:sp>
-      <p:sp>
-        <p:nvSpPr>
-          <p:cNvPr id="129" name="Google Shape;129;p18"/>
+            <a:endParaRPr b="0" i="0" sz="2000" u="none" cap="none" strike="noStrike"/>
+          </a:p>
+        </p:txBody>
+      </p:sp>
+      <p:sp>
+        <p:nvSpPr>
+          <p:cNvPr id="150" name="Google Shape;150;p7"/>
           <p:cNvSpPr/>
           <p:nvPr/>
         </p:nvSpPr>
         <p:spPr>
           <a:xfrm>
-            <a:off x="1028224" y="6441519"/>
-            <a:ext cx="5939076" cy="725805"/>
+            <a:off x="6342763" y="2577914"/>
+            <a:ext cx="2057658" cy="483324"/>
           </a:xfrm>
           <a:prstGeom prst="rect">
             <a:avLst/>
@@ -7475,9 +8641,9 @@
           </a:bodyPr>
           <a:lstStyle/>
           <a:p>
-            <a:pPr indent="0" lvl="0" marL="0" marR="0" rtl="0" algn="l">
+            <a:pPr indent="0" lvl="0" marL="0" marR="0" rtl="0" algn="ctr">
               <a:lnSpc>
-                <a:spcPct val="162857"/>
+                <a:spcPct val="118750"/>
               </a:lnSpc>
               <a:spcBef>
                 <a:spcPts val="0"/>
@@ -7488,12 +8654,12 @@
               <a:buClr>
                 <a:srgbClr val="2A2742"/>
               </a:buClr>
-              <a:buSzPts val="1750"/>
+              <a:buSzPts val="1600"/>
               <a:buFont typeface="Arimo"/>
               <a:buNone/>
             </a:pPr>
             <a:r>
-              <a:rPr b="0" i="0" lang="en-US" sz="1750" u="none" cap="none" strike="noStrike">
+              <a:rPr b="0" i="0" lang="en-US" sz="1600" u="none" cap="none" strike="noStrike">
                 <a:solidFill>
                   <a:srgbClr val="2A2742"/>
                 </a:solidFill>
@@ -7502,145 +8668,22 @@
                 <a:cs typeface="Arimo"/>
                 <a:sym typeface="Arimo"/>
               </a:rPr>
-              <a:t>Быстрый отклик, адаптивность, высокая безопасность данных.</a:t>
+              <a:t>Гранты Mental Health и EdTech</a:t>
             </a:r>
-            <a:endParaRPr b="0" i="0" sz="1750" u="none" cap="none" strike="noStrike"/>
-          </a:p>
-        </p:txBody>
-      </p:sp>
-      <p:sp>
-        <p:nvSpPr>
-          <p:cNvPr id="130" name="Google Shape;130;p18"/>
+            <a:endParaRPr b="0" i="0" sz="1600" u="none" cap="none" strike="noStrike"/>
+          </a:p>
+        </p:txBody>
+      </p:sp>
+      <p:sp>
+        <p:nvSpPr>
+          <p:cNvPr id="151" name="Google Shape;151;p7"/>
           <p:cNvSpPr/>
           <p:nvPr/>
         </p:nvSpPr>
         <p:spPr>
           <a:xfrm>
-            <a:off x="7428548" y="4809411"/>
-            <a:ext cx="6408063" cy="2592348"/>
-          </a:xfrm>
-          <a:prstGeom prst="roundRect">
-            <a:avLst>
-              <a:gd fmla="val 3675" name="adj"/>
-            </a:avLst>
-          </a:prstGeom>
-          <a:solidFill>
-            <a:srgbClr val="E9E6FA"/>
-          </a:solidFill>
-          <a:ln cap="flat" cmpd="sng" w="9525">
-            <a:solidFill>
-              <a:srgbClr val="BDB8DF"/>
-            </a:solidFill>
-            <a:prstDash val="solid"/>
-            <a:round/>
-            <a:headEnd len="sm" w="sm" type="none"/>
-            <a:tailEnd len="sm" w="sm" type="none"/>
-          </a:ln>
-        </p:spPr>
-        <p:txBody>
-          <a:bodyPr anchorCtr="0" anchor="ctr" bIns="91425" lIns="91425" spcFirstLastPara="1" rIns="91425" wrap="square" tIns="91425">
-            <a:noAutofit/>
-          </a:bodyPr>
-          <a:lstStyle/>
-          <a:p>
-            <a:pPr indent="0" lvl="0" marL="0" rtl="0" algn="l">
-              <a:spcBef>
-                <a:spcPts val="0"/>
-              </a:spcBef>
-              <a:spcAft>
-                <a:spcPts val="0"/>
-              </a:spcAft>
-              <a:buNone/>
-            </a:pPr>
-            <a:r>
-              <a:t/>
-            </a:r>
-            <a:endParaRPr/>
-          </a:p>
-        </p:txBody>
-      </p:sp>
-      <p:sp>
-        <p:nvSpPr>
-          <p:cNvPr id="131" name="Google Shape;131;p18"/>
-          <p:cNvSpPr/>
-          <p:nvPr/>
-        </p:nvSpPr>
-        <p:spPr>
-          <a:xfrm>
-            <a:off x="7662982" y="5043845"/>
-            <a:ext cx="680442" cy="680442"/>
-          </a:xfrm>
-          <a:prstGeom prst="roundRect">
-            <a:avLst>
-              <a:gd fmla="val 13436980" name="adj"/>
-            </a:avLst>
-          </a:prstGeom>
-          <a:solidFill>
-            <a:srgbClr val="5E4CE6"/>
-          </a:solidFill>
-          <a:ln>
-            <a:noFill/>
-          </a:ln>
-        </p:spPr>
-        <p:txBody>
-          <a:bodyPr anchorCtr="0" anchor="ctr" bIns="91425" lIns="91425" spcFirstLastPara="1" rIns="91425" wrap="square" tIns="91425">
-            <a:noAutofit/>
-          </a:bodyPr>
-          <a:lstStyle/>
-          <a:p>
-            <a:pPr indent="0" lvl="0" marL="0" rtl="0" algn="l">
-              <a:spcBef>
-                <a:spcPts val="0"/>
-              </a:spcBef>
-              <a:spcAft>
-                <a:spcPts val="0"/>
-              </a:spcAft>
-              <a:buNone/>
-            </a:pPr>
-            <a:r>
-              <a:t/>
-            </a:r>
-            <a:endParaRPr/>
-          </a:p>
-        </p:txBody>
-      </p:sp>
-      <p:pic>
-        <p:nvPicPr>
-          <p:cNvPr descr="preencoded.png" id="132" name="Google Shape;132;p18"/>
-          <p:cNvPicPr preferRelativeResize="0"/>
-          <p:nvPr/>
-        </p:nvPicPr>
-        <p:blipFill rotWithShape="1">
-          <a:blip r:embed="rId6">
-            <a:alphaModFix/>
-          </a:blip>
-          <a:srcRect b="0" l="0" r="0" t="0"/>
-          <a:stretch/>
-        </p:blipFill>
-        <p:spPr>
-          <a:xfrm>
-            <a:off x="7850148" y="5230892"/>
-            <a:ext cx="306110" cy="306110"/>
-          </a:xfrm>
-          <a:prstGeom prst="rect">
-            <a:avLst/>
-          </a:prstGeom>
-          <a:noFill/>
-          <a:ln>
-            <a:noFill/>
-          </a:ln>
-        </p:spPr>
-      </p:pic>
-      <p:sp>
-        <p:nvSpPr>
-          <p:cNvPr id="133" name="Google Shape;133;p18"/>
-          <p:cNvSpPr/>
-          <p:nvPr/>
-        </p:nvSpPr>
-        <p:spPr>
-          <a:xfrm>
-            <a:off x="7662982" y="5951101"/>
-            <a:ext cx="2835235" cy="354330"/>
+            <a:off x="793790" y="6988731"/>
+            <a:ext cx="13042821" cy="620554"/>
           </a:xfrm>
           <a:prstGeom prst="rect">
             <a:avLst/>
@@ -7658,7 +8701,7 @@
           <a:p>
             <a:pPr indent="0" lvl="0" marL="0" marR="0" rtl="0" algn="l">
               <a:lnSpc>
-                <a:spcPct val="125000"/>
+                <a:spcPct val="150000"/>
               </a:lnSpc>
               <a:spcBef>
                 <a:spcPts val="0"/>
@@ -7669,70 +8712,12 @@
               <a:buClr>
                 <a:srgbClr val="2A2742"/>
               </a:buClr>
-              <a:buSzPts val="2200"/>
-              <a:buFont typeface="Outfit"/>
+              <a:buSzPts val="1600"/>
+              <a:buFont typeface="Arimo"/>
               <a:buNone/>
             </a:pPr>
             <a:r>
-              <a:rPr b="1" i="0" lang="en-US" sz="2200" u="none" cap="none" strike="noStrike">
-                <a:solidFill>
-                  <a:srgbClr val="2A2742"/>
-                </a:solidFill>
-                <a:latin typeface="Outfit"/>
-                <a:ea typeface="Outfit"/>
-                <a:cs typeface="Outfit"/>
-                <a:sym typeface="Outfit"/>
-              </a:rPr>
-              <a:t>Масштабируемость</a:t>
-            </a:r>
-            <a:endParaRPr b="0" i="0" sz="2200" u="none" cap="none" strike="noStrike"/>
-          </a:p>
-        </p:txBody>
-      </p:sp>
-      <p:sp>
-        <p:nvSpPr>
-          <p:cNvPr id="134" name="Google Shape;134;p18"/>
-          <p:cNvSpPr/>
-          <p:nvPr/>
-        </p:nvSpPr>
-        <p:spPr>
-          <a:xfrm>
-            <a:off x="7662982" y="6441519"/>
-            <a:ext cx="5939195" cy="725805"/>
-          </a:xfrm>
-          <a:prstGeom prst="rect">
-            <a:avLst/>
-          </a:prstGeom>
-          <a:noFill/>
-          <a:ln>
-            <a:noFill/>
-          </a:ln>
-        </p:spPr>
-        <p:txBody>
-          <a:bodyPr anchorCtr="0" anchor="t" bIns="0" lIns="0" spcFirstLastPara="1" rIns="0" wrap="square" tIns="0">
-            <a:noAutofit/>
-          </a:bodyPr>
-          <a:lstStyle/>
-          <a:p>
-            <a:pPr indent="0" lvl="0" marL="0" marR="0" rtl="0" algn="l">
-              <a:lnSpc>
-                <a:spcPct val="162857"/>
-              </a:lnSpc>
-              <a:spcBef>
-                <a:spcPts val="0"/>
-              </a:spcBef>
-              <a:spcAft>
-                <a:spcPts val="0"/>
-              </a:spcAft>
-              <a:buClr>
-                <a:srgbClr val="2A2742"/>
-              </a:buClr>
-              <a:buSzPts val="1750"/>
-              <a:buFont typeface="Arimo"/>
-              <a:buNone/>
-            </a:pPr>
-            <a:r>
-              <a:rPr b="0" i="0" lang="en-US" sz="1750" u="none" cap="none" strike="noStrike">
+              <a:rPr b="0" i="0" lang="en-US" sz="1600" u="none" cap="none" strike="noStrike">
                 <a:solidFill>
                   <a:srgbClr val="2A2742"/>
                 </a:solidFill>
@@ -7741,9 +8726,9 @@
                 <a:cs typeface="Arimo"/>
                 <a:sym typeface="Arimo"/>
               </a:rPr>
-              <a:t>Архитектура позволяет легко добавлять новые категории тестов.</a:t>
+              <a:t>Проект стартует на собственных ресурсах, затем планируется участие в грантовых программах и привлечение частных инвестиций для верификации контента и расширения платформы.</a:t>
             </a:r>
-            <a:endParaRPr b="0" i="0" sz="1750" u="none" cap="none" strike="noStrike"/>
+            <a:endParaRPr b="0" i="0" sz="1600" u="none" cap="none" strike="noStrike"/>
           </a:p>
         </p:txBody>
       </p:sp>
@@ -7760,7 +8745,7 @@
   <p:cSld>
     <p:spTree>
       <p:nvGrpSpPr>
-        <p:cNvPr id="139" name="Shape 139"/>
+        <p:cNvPr id="156" name="Shape 156"/>
         <p:cNvGrpSpPr/>
         <p:nvPr/>
       </p:nvGrpSpPr>
@@ -7774,14 +8759,14 @@
       </p:grpSpPr>
       <p:sp>
         <p:nvSpPr>
-          <p:cNvPr id="140" name="Google Shape;140;p19"/>
+          <p:cNvPr id="157" name="Google Shape;157;p8"/>
           <p:cNvSpPr/>
           <p:nvPr/>
         </p:nvSpPr>
         <p:spPr>
           <a:xfrm>
-            <a:off x="793790" y="921068"/>
-            <a:ext cx="9457730" cy="708779"/>
+            <a:off x="793790" y="756404"/>
+            <a:ext cx="3969425" cy="496133"/>
           </a:xfrm>
           <a:prstGeom prst="rect">
             <a:avLst/>
@@ -7799,7 +8784,7 @@
           <a:p>
             <a:pPr indent="0" lvl="0" marL="0" marR="0" rtl="0" algn="l">
               <a:lnSpc>
-                <a:spcPct val="124719"/>
+                <a:spcPct val="125806"/>
               </a:lnSpc>
               <a:spcBef>
                 <a:spcPts val="0"/>
@@ -7810,29 +8795,29 @@
               <a:buClr>
                 <a:srgbClr val="231971"/>
               </a:buClr>
-              <a:buSzPts val="4450"/>
-              <a:buFont typeface="Outfit"/>
+              <a:buSzPts val="3100"/>
+              <a:buFont typeface="Outfit ExtraBold"/>
               <a:buNone/>
             </a:pPr>
             <a:r>
-              <a:rPr b="1" i="0" lang="en-US" sz="4450" u="none" cap="none" strike="noStrike">
+              <a:rPr b="1" i="0" lang="en-US" sz="3100" u="none" cap="none" strike="noStrike">
                 <a:solidFill>
                   <a:srgbClr val="231971"/>
                 </a:solidFill>
-                <a:latin typeface="Outfit"/>
-                <a:ea typeface="Outfit"/>
-                <a:cs typeface="Outfit"/>
-                <a:sym typeface="Outfit"/>
+                <a:latin typeface="Outfit ExtraBold"/>
+                <a:ea typeface="Outfit ExtraBold"/>
+                <a:cs typeface="Outfit ExtraBold"/>
+                <a:sym typeface="Outfit ExtraBold"/>
               </a:rPr>
-              <a:t>Экономика: модель Freemium-Ads</a:t>
+              <a:t>Мой GitHub</a:t>
             </a:r>
-            <a:endParaRPr b="0" i="0" sz="4450" u="none" cap="none" strike="noStrike"/>
+            <a:endParaRPr b="0" i="0" sz="3100" u="none" cap="none" strike="noStrike"/>
           </a:p>
         </p:txBody>
       </p:sp>
       <p:pic>
         <p:nvPicPr>
-          <p:cNvPr descr="preencoded.png" id="141" name="Google Shape;141;p19"/>
+          <p:cNvPr descr="preencoded.png" id="158" name="Google Shape;158;p8"/>
           <p:cNvPicPr preferRelativeResize="0"/>
           <p:nvPr/>
         </p:nvPicPr>
@@ -7845,8 +8830,8 @@
         </p:blipFill>
         <p:spPr>
           <a:xfrm>
-            <a:off x="878800" y="2232184"/>
-            <a:ext cx="340162" cy="340162"/>
+            <a:off x="4316016" y="1474827"/>
+            <a:ext cx="5998250" cy="5998250"/>
           </a:xfrm>
           <a:prstGeom prst="rect">
             <a:avLst/>
@@ -7857,454 +8842,6 @@
           </a:ln>
         </p:spPr>
       </p:pic>
-      <p:sp>
-        <p:nvSpPr>
-          <p:cNvPr id="142" name="Google Shape;142;p19"/>
-          <p:cNvSpPr/>
-          <p:nvPr/>
-        </p:nvSpPr>
-        <p:spPr>
-          <a:xfrm>
-            <a:off x="1530906" y="2225159"/>
-            <a:ext cx="4013716" cy="354330"/>
-          </a:xfrm>
-          <a:prstGeom prst="rect">
-            <a:avLst/>
-          </a:prstGeom>
-          <a:noFill/>
-          <a:ln>
-            <a:noFill/>
-          </a:ln>
-        </p:spPr>
-        <p:txBody>
-          <a:bodyPr anchorCtr="0" anchor="t" bIns="0" lIns="0" spcFirstLastPara="1" rIns="0" wrap="square" tIns="0">
-            <a:noAutofit/>
-          </a:bodyPr>
-          <a:lstStyle/>
-          <a:p>
-            <a:pPr indent="0" lvl="0" marL="0" marR="0" rtl="0" algn="l">
-              <a:lnSpc>
-                <a:spcPct val="125000"/>
-              </a:lnSpc>
-              <a:spcBef>
-                <a:spcPts val="0"/>
-              </a:spcBef>
-              <a:spcAft>
-                <a:spcPts val="0"/>
-              </a:spcAft>
-              <a:buClr>
-                <a:srgbClr val="2A2742"/>
-              </a:buClr>
-              <a:buSzPts val="2200"/>
-              <a:buFont typeface="Outfit"/>
-              <a:buNone/>
-            </a:pPr>
-            <a:r>
-              <a:rPr b="1" i="0" lang="en-US" sz="2200" u="none" cap="none" strike="noStrike">
-                <a:solidFill>
-                  <a:srgbClr val="2A2742"/>
-                </a:solidFill>
-                <a:latin typeface="Outfit"/>
-                <a:ea typeface="Outfit"/>
-                <a:cs typeface="Outfit"/>
-                <a:sym typeface="Outfit"/>
-              </a:rPr>
-              <a:t>Бесплатно для пользователя</a:t>
-            </a:r>
-            <a:endParaRPr b="0" i="0" sz="2200" u="none" cap="none" strike="noStrike"/>
-          </a:p>
-        </p:txBody>
-      </p:sp>
-      <p:sp>
-        <p:nvSpPr>
-          <p:cNvPr id="143" name="Google Shape;143;p19"/>
-          <p:cNvSpPr/>
-          <p:nvPr/>
-        </p:nvSpPr>
-        <p:spPr>
-          <a:xfrm>
-            <a:off x="1530906" y="2806303"/>
-            <a:ext cx="6187321" cy="725805"/>
-          </a:xfrm>
-          <a:prstGeom prst="rect">
-            <a:avLst/>
-          </a:prstGeom>
-          <a:noFill/>
-          <a:ln>
-            <a:noFill/>
-          </a:ln>
-        </p:spPr>
-        <p:txBody>
-          <a:bodyPr anchorCtr="0" anchor="t" bIns="0" lIns="0" spcFirstLastPara="1" rIns="0" wrap="square" tIns="0">
-            <a:noAutofit/>
-          </a:bodyPr>
-          <a:lstStyle/>
-          <a:p>
-            <a:pPr indent="0" lvl="0" marL="0" marR="0" rtl="0" algn="l">
-              <a:lnSpc>
-                <a:spcPct val="162857"/>
-              </a:lnSpc>
-              <a:spcBef>
-                <a:spcPts val="0"/>
-              </a:spcBef>
-              <a:spcAft>
-                <a:spcPts val="0"/>
-              </a:spcAft>
-              <a:buClr>
-                <a:srgbClr val="2A2742"/>
-              </a:buClr>
-              <a:buSzPts val="1750"/>
-              <a:buFont typeface="Arimo"/>
-              <a:buNone/>
-            </a:pPr>
-            <a:r>
-              <a:rPr b="0" i="0" lang="en-US" sz="1750" u="none" cap="none" strike="noStrike">
-                <a:solidFill>
-                  <a:srgbClr val="2A2742"/>
-                </a:solidFill>
-                <a:latin typeface="Arimo"/>
-                <a:ea typeface="Arimo"/>
-                <a:cs typeface="Arimo"/>
-                <a:sym typeface="Arimo"/>
-              </a:rPr>
-              <a:t>Весь функционал доступен без оплаты — низкий порог входа.</a:t>
-            </a:r>
-            <a:endParaRPr b="0" i="0" sz="1750" u="none" cap="none" strike="noStrike"/>
-          </a:p>
-        </p:txBody>
-      </p:sp>
-      <p:pic>
-        <p:nvPicPr>
-          <p:cNvPr descr="preencoded.png" id="144" name="Google Shape;144;p19"/>
-          <p:cNvPicPr preferRelativeResize="0"/>
-          <p:nvPr/>
-        </p:nvPicPr>
-        <p:blipFill rotWithShape="1">
-          <a:blip r:embed="rId3">
-            <a:alphaModFix/>
-          </a:blip>
-          <a:srcRect b="0" l="0" r="0" t="0"/>
-          <a:stretch/>
-        </p:blipFill>
-        <p:spPr>
-          <a:xfrm>
-            <a:off x="878800" y="3992761"/>
-            <a:ext cx="340162" cy="340162"/>
-          </a:xfrm>
-          <a:prstGeom prst="rect">
-            <a:avLst/>
-          </a:prstGeom>
-          <a:noFill/>
-          <a:ln>
-            <a:noFill/>
-          </a:ln>
-        </p:spPr>
-      </p:pic>
-      <p:sp>
-        <p:nvSpPr>
-          <p:cNvPr id="145" name="Google Shape;145;p19"/>
-          <p:cNvSpPr/>
-          <p:nvPr/>
-        </p:nvSpPr>
-        <p:spPr>
-          <a:xfrm>
-            <a:off x="1530906" y="3985736"/>
-            <a:ext cx="3946208" cy="354330"/>
-          </a:xfrm>
-          <a:prstGeom prst="rect">
-            <a:avLst/>
-          </a:prstGeom>
-          <a:noFill/>
-          <a:ln>
-            <a:noFill/>
-          </a:ln>
-        </p:spPr>
-        <p:txBody>
-          <a:bodyPr anchorCtr="0" anchor="t" bIns="0" lIns="0" spcFirstLastPara="1" rIns="0" wrap="square" tIns="0">
-            <a:noAutofit/>
-          </a:bodyPr>
-          <a:lstStyle/>
-          <a:p>
-            <a:pPr indent="0" lvl="0" marL="0" marR="0" rtl="0" algn="l">
-              <a:lnSpc>
-                <a:spcPct val="125000"/>
-              </a:lnSpc>
-              <a:spcBef>
-                <a:spcPts val="0"/>
-              </a:spcBef>
-              <a:spcAft>
-                <a:spcPts val="0"/>
-              </a:spcAft>
-              <a:buClr>
-                <a:srgbClr val="2A2742"/>
-              </a:buClr>
-              <a:buSzPts val="2200"/>
-              <a:buFont typeface="Outfit"/>
-              <a:buNone/>
-            </a:pPr>
-            <a:r>
-              <a:rPr b="1" i="0" lang="en-US" sz="2200" u="none" cap="none" strike="noStrike">
-                <a:solidFill>
-                  <a:srgbClr val="2A2742"/>
-                </a:solidFill>
-                <a:latin typeface="Outfit"/>
-                <a:ea typeface="Outfit"/>
-                <a:cs typeface="Outfit"/>
-                <a:sym typeface="Outfit"/>
-              </a:rPr>
-              <a:t>Монетизация через рекламу</a:t>
-            </a:r>
-            <a:endParaRPr b="0" i="0" sz="2200" u="none" cap="none" strike="noStrike"/>
-          </a:p>
-        </p:txBody>
-      </p:sp>
-      <p:sp>
-        <p:nvSpPr>
-          <p:cNvPr id="146" name="Google Shape;146;p19"/>
-          <p:cNvSpPr/>
-          <p:nvPr/>
-        </p:nvSpPr>
-        <p:spPr>
-          <a:xfrm>
-            <a:off x="1530906" y="4566880"/>
-            <a:ext cx="6187321" cy="725805"/>
-          </a:xfrm>
-          <a:prstGeom prst="rect">
-            <a:avLst/>
-          </a:prstGeom>
-          <a:noFill/>
-          <a:ln>
-            <a:noFill/>
-          </a:ln>
-        </p:spPr>
-        <p:txBody>
-          <a:bodyPr anchorCtr="0" anchor="t" bIns="0" lIns="0" spcFirstLastPara="1" rIns="0" wrap="square" tIns="0">
-            <a:noAutofit/>
-          </a:bodyPr>
-          <a:lstStyle/>
-          <a:p>
-            <a:pPr indent="0" lvl="0" marL="0" marR="0" rtl="0" algn="l">
-              <a:lnSpc>
-                <a:spcPct val="162857"/>
-              </a:lnSpc>
-              <a:spcBef>
-                <a:spcPts val="0"/>
-              </a:spcBef>
-              <a:spcAft>
-                <a:spcPts val="0"/>
-              </a:spcAft>
-              <a:buClr>
-                <a:srgbClr val="2A2742"/>
-              </a:buClr>
-              <a:buSzPts val="1750"/>
-              <a:buFont typeface="Arimo"/>
-              <a:buNone/>
-            </a:pPr>
-            <a:r>
-              <a:rPr b="0" i="0" lang="en-US" sz="1750" u="none" cap="none" strike="noStrike">
-                <a:solidFill>
-                  <a:srgbClr val="2A2742"/>
-                </a:solidFill>
-                <a:latin typeface="Arimo"/>
-                <a:ea typeface="Arimo"/>
-                <a:cs typeface="Arimo"/>
-                <a:sym typeface="Arimo"/>
-              </a:rPr>
-              <a:t>Баннерная реклама (Google AdSense, Яндекс Директ) в некритичных зонах — после результата.</a:t>
-            </a:r>
-            <a:endParaRPr b="0" i="0" sz="1750" u="none" cap="none" strike="noStrike"/>
-          </a:p>
-        </p:txBody>
-      </p:sp>
-      <p:pic>
-        <p:nvPicPr>
-          <p:cNvPr descr="preencoded.png" id="147" name="Google Shape;147;p19"/>
-          <p:cNvPicPr preferRelativeResize="0"/>
-          <p:nvPr/>
-        </p:nvPicPr>
-        <p:blipFill rotWithShape="1">
-          <a:blip r:embed="rId3">
-            <a:alphaModFix/>
-          </a:blip>
-          <a:srcRect b="0" l="0" r="0" t="0"/>
-          <a:stretch/>
-        </p:blipFill>
-        <p:spPr>
-          <a:xfrm>
-            <a:off x="878800" y="5753338"/>
-            <a:ext cx="340162" cy="340162"/>
-          </a:xfrm>
-          <a:prstGeom prst="rect">
-            <a:avLst/>
-          </a:prstGeom>
-          <a:noFill/>
-          <a:ln>
-            <a:noFill/>
-          </a:ln>
-        </p:spPr>
-      </p:pic>
-      <p:sp>
-        <p:nvSpPr>
-          <p:cNvPr id="148" name="Google Shape;148;p19"/>
-          <p:cNvSpPr/>
-          <p:nvPr/>
-        </p:nvSpPr>
-        <p:spPr>
-          <a:xfrm>
-            <a:off x="1530906" y="5746313"/>
-            <a:ext cx="4514136" cy="354330"/>
-          </a:xfrm>
-          <a:prstGeom prst="rect">
-            <a:avLst/>
-          </a:prstGeom>
-          <a:noFill/>
-          <a:ln>
-            <a:noFill/>
-          </a:ln>
-        </p:spPr>
-        <p:txBody>
-          <a:bodyPr anchorCtr="0" anchor="t" bIns="0" lIns="0" spcFirstLastPara="1" rIns="0" wrap="square" tIns="0">
-            <a:noAutofit/>
-          </a:bodyPr>
-          <a:lstStyle/>
-          <a:p>
-            <a:pPr indent="0" lvl="0" marL="0" marR="0" rtl="0" algn="l">
-              <a:lnSpc>
-                <a:spcPct val="125000"/>
-              </a:lnSpc>
-              <a:spcBef>
-                <a:spcPts val="0"/>
-              </a:spcBef>
-              <a:spcAft>
-                <a:spcPts val="0"/>
-              </a:spcAft>
-              <a:buClr>
-                <a:srgbClr val="2A2742"/>
-              </a:buClr>
-              <a:buSzPts val="2200"/>
-              <a:buFont typeface="Outfit"/>
-              <a:buNone/>
-            </a:pPr>
-            <a:r>
-              <a:rPr b="1" i="0" lang="en-US" sz="2200" u="none" cap="none" strike="noStrike">
-                <a:solidFill>
-                  <a:srgbClr val="2A2742"/>
-                </a:solidFill>
-                <a:latin typeface="Outfit"/>
-                <a:ea typeface="Outfit"/>
-                <a:cs typeface="Outfit"/>
-                <a:sym typeface="Outfit"/>
-              </a:rPr>
-              <a:t>Партнёрская программа (Future)</a:t>
-            </a:r>
-            <a:endParaRPr b="0" i="0" sz="2200" u="none" cap="none" strike="noStrike"/>
-          </a:p>
-        </p:txBody>
-      </p:sp>
-      <p:sp>
-        <p:nvSpPr>
-          <p:cNvPr id="149" name="Google Shape;149;p19"/>
-          <p:cNvSpPr/>
-          <p:nvPr/>
-        </p:nvSpPr>
-        <p:spPr>
-          <a:xfrm>
-            <a:off x="1530906" y="6327458"/>
-            <a:ext cx="6187321" cy="725805"/>
-          </a:xfrm>
-          <a:prstGeom prst="rect">
-            <a:avLst/>
-          </a:prstGeom>
-          <a:noFill/>
-          <a:ln>
-            <a:noFill/>
-          </a:ln>
-        </p:spPr>
-        <p:txBody>
-          <a:bodyPr anchorCtr="0" anchor="t" bIns="0" lIns="0" spcFirstLastPara="1" rIns="0" wrap="square" tIns="0">
-            <a:noAutofit/>
-          </a:bodyPr>
-          <a:lstStyle/>
-          <a:p>
-            <a:pPr indent="0" lvl="0" marL="0" marR="0" rtl="0" algn="l">
-              <a:lnSpc>
-                <a:spcPct val="162857"/>
-              </a:lnSpc>
-              <a:spcBef>
-                <a:spcPts val="0"/>
-              </a:spcBef>
-              <a:spcAft>
-                <a:spcPts val="0"/>
-              </a:spcAft>
-              <a:buClr>
-                <a:srgbClr val="2A2742"/>
-              </a:buClr>
-              <a:buSzPts val="1750"/>
-              <a:buFont typeface="Arimo"/>
-              <a:buNone/>
-            </a:pPr>
-            <a:r>
-              <a:rPr b="0" i="0" lang="en-US" sz="1750" u="none" cap="none" strike="noStrike">
-                <a:solidFill>
-                  <a:srgbClr val="2A2742"/>
-                </a:solidFill>
-                <a:latin typeface="Arimo"/>
-                <a:ea typeface="Arimo"/>
-                <a:cs typeface="Arimo"/>
-                <a:sym typeface="Arimo"/>
-              </a:rPr>
-              <a:t>Нативная рекомендация клиник по результатам теста (CPA-модель).</a:t>
-            </a:r>
-            <a:endParaRPr b="0" i="0" sz="1750" u="none" cap="none" strike="noStrike"/>
-          </a:p>
-        </p:txBody>
-      </p:sp>
-      <p:sp>
-        <p:nvSpPr>
-          <p:cNvPr id="150" name="Google Shape;150;p19"/>
-          <p:cNvSpPr/>
-          <p:nvPr/>
-        </p:nvSpPr>
-        <p:spPr>
-          <a:xfrm>
-            <a:off x="8279249" y="4457700"/>
-            <a:ext cx="5564862" cy="362903"/>
-          </a:xfrm>
-          <a:prstGeom prst="rect">
-            <a:avLst/>
-          </a:prstGeom>
-          <a:noFill/>
-          <a:ln>
-            <a:noFill/>
-          </a:ln>
-        </p:spPr>
-        <p:txBody>
-          <a:bodyPr anchorCtr="0" anchor="t" bIns="0" lIns="0" spcFirstLastPara="1" rIns="0" wrap="square" tIns="0">
-            <a:noAutofit/>
-          </a:bodyPr>
-          <a:lstStyle/>
-          <a:p>
-            <a:pPr indent="0" lvl="0" marL="0" marR="0" rtl="0" algn="l">
-              <a:lnSpc>
-                <a:spcPct val="162857"/>
-              </a:lnSpc>
-              <a:spcBef>
-                <a:spcPts val="0"/>
-              </a:spcBef>
-              <a:spcAft>
-                <a:spcPts val="0"/>
-              </a:spcAft>
-              <a:buSzPts val="1750"/>
-              <a:buFont typeface="Arial"/>
-              <a:buNone/>
-            </a:pPr>
-            <a:r>
-              <a:t/>
-            </a:r>
-            <a:endParaRPr b="0" i="0" sz="1750" u="none" cap="none" strike="noStrike"/>
-          </a:p>
-        </p:txBody>
-      </p:sp>
     </p:spTree>
   </p:cSld>
   <p:clrMapOvr>
@@ -8318,7 +8855,7 @@
   <p:cSld>
     <p:spTree>
       <p:nvGrpSpPr>
-        <p:cNvPr id="155" name="Shape 155"/>
+        <p:cNvPr id="163" name="Shape 163"/>
         <p:cNvGrpSpPr/>
         <p:nvPr/>
       </p:nvGrpSpPr>
@@ -8332,14 +8869,14 @@
       </p:grpSpPr>
       <p:sp>
         <p:nvSpPr>
-          <p:cNvPr id="156" name="Google Shape;156;p20"/>
+          <p:cNvPr id="164" name="Google Shape;164;p9"/>
           <p:cNvSpPr/>
           <p:nvPr/>
         </p:nvSpPr>
         <p:spPr>
           <a:xfrm>
-            <a:off x="1644491" y="3405902"/>
-            <a:ext cx="11341298" cy="1417677"/>
+            <a:off x="2766060" y="2869049"/>
+            <a:ext cx="9098280" cy="978218"/>
           </a:xfrm>
           <a:prstGeom prst="rect">
             <a:avLst/>
@@ -8357,7 +8894,7 @@
           <a:p>
             <a:pPr indent="0" lvl="0" marL="0" marR="0" rtl="0" algn="ctr">
               <a:lnSpc>
-                <a:spcPct val="125280"/>
+                <a:spcPct val="125203"/>
               </a:lnSpc>
               <a:spcBef>
                 <a:spcPts val="0"/>
@@ -8368,23 +8905,188 @@
               <a:buClr>
                 <a:srgbClr val="231971"/>
               </a:buClr>
-              <a:buSzPts val="8900"/>
-              <a:buFont typeface="Outfit"/>
+              <a:buSzPts val="6150"/>
+              <a:buFont typeface="Outfit ExtraBold"/>
               <a:buNone/>
             </a:pPr>
             <a:r>
-              <a:rPr b="1" i="0" lang="en-US" sz="8900" u="none" cap="none" strike="noStrike">
+              <a:rPr b="1" i="0" lang="en-US" sz="6150" u="none" cap="none" strike="noStrike">
                 <a:solidFill>
                   <a:srgbClr val="231971"/>
                 </a:solidFill>
-                <a:latin typeface="Outfit"/>
-                <a:ea typeface="Outfit"/>
-                <a:cs typeface="Outfit"/>
-                <a:sym typeface="Outfit"/>
+                <a:latin typeface="Outfit ExtraBold"/>
+                <a:ea typeface="Outfit ExtraBold"/>
+                <a:cs typeface="Outfit ExtraBold"/>
+                <a:sym typeface="Outfit ExtraBold"/>
               </a:rPr>
-              <a:t>Спасибо!</a:t>
+              <a:t>Спасибо за внимание!</a:t>
             </a:r>
-            <a:endParaRPr b="0" i="0" sz="8900" u="none" cap="none" strike="noStrike"/>
+            <a:endParaRPr b="0" i="0" sz="6150" u="none" cap="none" strike="noStrike"/>
+          </a:p>
+        </p:txBody>
+      </p:sp>
+      <p:sp>
+        <p:nvSpPr>
+          <p:cNvPr id="165" name="Google Shape;165;p9"/>
+          <p:cNvSpPr/>
+          <p:nvPr/>
+        </p:nvSpPr>
+        <p:spPr>
+          <a:xfrm>
+            <a:off x="793790" y="4300895"/>
+            <a:ext cx="13042821" cy="362903"/>
+          </a:xfrm>
+          <a:prstGeom prst="rect">
+            <a:avLst/>
+          </a:prstGeom>
+          <a:noFill/>
+          <a:ln>
+            <a:noFill/>
+          </a:ln>
+        </p:spPr>
+        <p:txBody>
+          <a:bodyPr anchorCtr="0" anchor="t" bIns="0" lIns="0" spcFirstLastPara="1" rIns="0" wrap="square" tIns="0">
+            <a:noAutofit/>
+          </a:bodyPr>
+          <a:lstStyle/>
+          <a:p>
+            <a:pPr indent="0" lvl="0" marL="0" marR="0" rtl="0" algn="ctr">
+              <a:lnSpc>
+                <a:spcPct val="162857"/>
+              </a:lnSpc>
+              <a:spcBef>
+                <a:spcPts val="0"/>
+              </a:spcBef>
+              <a:spcAft>
+                <a:spcPts val="0"/>
+              </a:spcAft>
+              <a:buClr>
+                <a:srgbClr val="2A2742"/>
+              </a:buClr>
+              <a:buSzPts val="1750"/>
+              <a:buFont typeface="Arimo"/>
+              <a:buNone/>
+            </a:pPr>
+            <a:r>
+              <a:rPr b="0" i="0" lang="en-US" sz="1750" u="none" cap="none" strike="noStrike">
+                <a:solidFill>
+                  <a:srgbClr val="2A2742"/>
+                </a:solidFill>
+                <a:latin typeface="Arimo"/>
+                <a:ea typeface="Arimo"/>
+                <a:cs typeface="Arimo"/>
+                <a:sym typeface="Arimo"/>
+              </a:rPr>
+              <a:t>«Сфера Тестов» — доступная, анонимная и научно обоснованная диагностика для каждого</a:t>
+            </a:r>
+            <a:endParaRPr b="0" i="0" sz="1750" u="none" cap="none" strike="noStrike"/>
+          </a:p>
+        </p:txBody>
+      </p:sp>
+      <p:sp>
+        <p:nvSpPr>
+          <p:cNvPr id="166" name="Google Shape;166;p9"/>
+          <p:cNvSpPr/>
+          <p:nvPr/>
+        </p:nvSpPr>
+        <p:spPr>
+          <a:xfrm>
+            <a:off x="793790" y="4918948"/>
+            <a:ext cx="2172295" cy="441484"/>
+          </a:xfrm>
+          <a:prstGeom prst="roundRect">
+            <a:avLst>
+              <a:gd fmla="val 17263" name="adj"/>
+            </a:avLst>
+          </a:prstGeom>
+          <a:noFill/>
+          <a:ln cap="flat" cmpd="sng" w="9525">
+            <a:solidFill>
+              <a:srgbClr val="5E4CE6"/>
+            </a:solidFill>
+            <a:prstDash val="solid"/>
+            <a:round/>
+            <a:headEnd len="sm" w="sm" type="none"/>
+            <a:tailEnd len="sm" w="sm" type="none"/>
+          </a:ln>
+        </p:spPr>
+        <p:txBody>
+          <a:bodyPr anchorCtr="0" anchor="ctr" bIns="91425" lIns="91425" spcFirstLastPara="1" rIns="91425" wrap="square" tIns="91425">
+            <a:noAutofit/>
+          </a:bodyPr>
+          <a:lstStyle/>
+          <a:p>
+            <a:pPr indent="0" lvl="0" marL="0" rtl="0" algn="l">
+              <a:spcBef>
+                <a:spcPts val="0"/>
+              </a:spcBef>
+              <a:spcAft>
+                <a:spcPts val="0"/>
+              </a:spcAft>
+              <a:buNone/>
+            </a:pPr>
+            <a:r>
+              <a:t/>
+            </a:r>
+            <a:endParaRPr/>
+          </a:p>
+        </p:txBody>
+      </p:sp>
+      <p:sp>
+        <p:nvSpPr>
+          <p:cNvPr id="167" name="Google Shape;167;p9"/>
+          <p:cNvSpPr/>
+          <p:nvPr/>
+        </p:nvSpPr>
+        <p:spPr>
+          <a:xfrm>
+            <a:off x="937498" y="4994553"/>
+            <a:ext cx="1884878" cy="290274"/>
+          </a:xfrm>
+          <a:prstGeom prst="rect">
+            <a:avLst/>
+          </a:prstGeom>
+          <a:noFill/>
+          <a:ln>
+            <a:noFill/>
+          </a:ln>
+        </p:spPr>
+        <p:txBody>
+          <a:bodyPr anchorCtr="0" anchor="t" bIns="0" lIns="0" spcFirstLastPara="1" rIns="0" wrap="square" tIns="0">
+            <a:noAutofit/>
+          </a:bodyPr>
+          <a:lstStyle/>
+          <a:p>
+            <a:pPr indent="0" lvl="0" marL="0" marR="0" rtl="0" algn="l">
+              <a:lnSpc>
+                <a:spcPct val="160714"/>
+              </a:lnSpc>
+              <a:spcBef>
+                <a:spcPts val="0"/>
+              </a:spcBef>
+              <a:spcAft>
+                <a:spcPts val="0"/>
+              </a:spcAft>
+              <a:buClr>
+                <a:srgbClr val="5E4CE6"/>
+              </a:buClr>
+              <a:buSzPts val="1400"/>
+              <a:buFont typeface="Arimo"/>
+              <a:buNone/>
+            </a:pPr>
+            <a:r>
+              <a:rPr b="0" i="0" lang="en-US" sz="1400" u="none" cap="none" strike="noStrike">
+                <a:solidFill>
+                  <a:srgbClr val="5E4CE6"/>
+                </a:solidFill>
+                <a:latin typeface="Arimo"/>
+                <a:ea typeface="Arimo"/>
+                <a:cs typeface="Arimo"/>
+                <a:sym typeface="Arimo"/>
+              </a:rPr>
+              <a:t>ТУШИН ИВАН · ИИ-72</a:t>
+            </a:r>
+            <a:endParaRPr b="0" i="0" sz="1400" u="none" cap="none" strike="noStrike"/>
           </a:p>
         </p:txBody>
       </p:sp>
